--- a/slides/modules/m17-deployment-targets-scheduling.pptx
+++ b/slides/modules/m17-deployment-targets-scheduling.pptx
@@ -14,6 +14,8 @@
     <p:sldId id="262" r:id="rId14"/>
     <p:sldId id="263" r:id="rId15"/>
     <p:sldId id="264" r:id="rId16"/>
+    <p:sldId id="265" r:id="rId17"/>
+    <p:sldId id="266" r:id="rId18"/>
   </p:sldIdLst>
   <p:sldSz cx="12191695" cy="6858000" type="screen4x3"/>
   <p:notesSz cx="6858000" cy="9144000"/>
@@ -535,6 +537,76 @@
 </p:notes>
 </file>
 
+<file path=ppt/notesSlides/notesSlide10.xml><?xml version="1.0" encoding="utf-8"?>
+<p:notes xmlns:a="http://schemas.openxmlformats.org/drawingml/2006/main" xmlns:p="http://schemas.openxmlformats.org/presentationml/2006/main" xmlns:r="http://schemas.openxmlformats.org/officeDocument/2006/relationships">
+  <p:cSld>
+    <p:spTree>
+      <p:nvGrpSpPr>
+        <p:cNvPr id="1" name=""/>
+        <p:cNvGrpSpPr/>
+        <p:nvPr/>
+      </p:nvGrpSpPr>
+      <p:grpSpPr>
+        <a:xfrm>
+          <a:off x="0" y="0"/>
+          <a:ext cx="0" cy="0"/>
+          <a:chOff x="0" y="0"/>
+          <a:chExt cx="0" cy="0"/>
+        </a:xfrm>
+      </p:grpSpPr>
+      <p:sp>
+        <p:nvSpPr>
+          <p:cNvPr id="2" name="Slide Image Placeholder 1"/>
+          <p:cNvSpPr>
+            <a:spLocks noGrp="1"/>
+          </p:cNvSpPr>
+          <p:nvPr>
+            <p:ph type="sldImg" idx="2"/>
+          </p:nvPr>
+        </p:nvSpPr>
+        <p:spPr/>
+      </p:sp>
+      <p:sp>
+        <p:nvSpPr>
+          <p:cNvPr id="3" name="Notes Placeholder 2"/>
+          <p:cNvSpPr>
+            <a:spLocks noGrp="1"/>
+          </p:cNvSpPr>
+          <p:nvPr>
+            <p:ph type="body" idx="3" sz="quarter"/>
+          </p:nvPr>
+        </p:nvSpPr>
+        <p:spPr/>
+        <p:txBody>
+          <a:bodyPr/>
+          <a:lstStyle/>
+          <a:p>
+            <a:r>
+              <a:t>Concept diagram: Reseed on boot.</a:t>
+            </a:r>
+          </a:p>
+        </p:txBody>
+      </p:sp>
+      <p:sp>
+        <p:nvSpPr>
+          <p:cNvPr id="4" name="Slide Number Placeholder 3"/>
+          <p:cNvSpPr>
+            <a:spLocks noGrp="1"/>
+          </p:cNvSpPr>
+          <p:nvPr>
+            <p:ph type="sldNum" idx="5" sz="quarter"/>
+          </p:nvPr>
+        </p:nvSpPr>
+        <p:spPr/>
+      </p:sp>
+    </p:spTree>
+  </p:cSld>
+  <p:clrMapOvr>
+    <a:masterClrMapping/>
+  </p:clrMapOvr>
+</p:notes>
+</file>
+
 <file path=ppt/notesSlides/notesSlide2.xml><?xml version="1.0" encoding="utf-8"?>
 <p:notes xmlns:a="http://schemas.openxmlformats.org/drawingml/2006/main" xmlns:p="http://schemas.openxmlformats.org/presentationml/2006/main" xmlns:r="http://schemas.openxmlformats.org/officeDocument/2006/relationships">
   <p:cSld>
@@ -1001,6 +1073,76 @@
           <a:p>
             <a:r>
               <a:t>Set expectations for the hands-on, all in the attendee's own claims-app namespace, then land the transfer. You read how the scheduler placed the pods and confirm it against a Scheduled event; force the API replicas apart with required anti-affinity and read the FailedScheduling event when the scheduler can't oblige; spread them evenly with topologySpreadConstraints across nodes, and with one changed key across zones; pin the batch worker onto a dedicated pool the honest way — feeling the Pending a nodeSelector alone earns, then fixing it with the toleration; make a rollout zero-downtime where the Deployment can (maxUnavailable 0 holding capacity flat) and protect it with a PodDisruptionBudget that blocks an eviction rather than breach its floor. Take the questions back: if the node under your busiest service died right now, is a replica already running elsewhere — guaranteed, or just probably? Is your expensive hardware running the workload you bought it for and nothing else? And do your deploys drop requests — does anyone even know?</a:t>
+            </a:r>
+          </a:p>
+        </p:txBody>
+      </p:sp>
+      <p:sp>
+        <p:nvSpPr>
+          <p:cNvPr id="4" name="Slide Number Placeholder 3"/>
+          <p:cNvSpPr>
+            <a:spLocks noGrp="1"/>
+          </p:cNvSpPr>
+          <p:nvPr>
+            <p:ph type="sldNum" idx="5" sz="quarter"/>
+          </p:nvPr>
+        </p:nvSpPr>
+        <p:spPr/>
+      </p:sp>
+    </p:spTree>
+  </p:cSld>
+  <p:clrMapOvr>
+    <a:masterClrMapping/>
+  </p:clrMapOvr>
+</p:notes>
+</file>
+
+<file path=ppt/notesSlides/notesSlide9.xml><?xml version="1.0" encoding="utf-8"?>
+<p:notes xmlns:a="http://schemas.openxmlformats.org/drawingml/2006/main" xmlns:p="http://schemas.openxmlformats.org/presentationml/2006/main" xmlns:r="http://schemas.openxmlformats.org/officeDocument/2006/relationships">
+  <p:cSld>
+    <p:spTree>
+      <p:nvGrpSpPr>
+        <p:cNvPr id="1" name=""/>
+        <p:cNvGrpSpPr/>
+        <p:nvPr/>
+      </p:nvGrpSpPr>
+      <p:grpSpPr>
+        <a:xfrm>
+          <a:off x="0" y="0"/>
+          <a:ext cx="0" cy="0"/>
+          <a:chOff x="0" y="0"/>
+          <a:chExt cx="0" cy="0"/>
+        </a:xfrm>
+      </p:grpSpPr>
+      <p:sp>
+        <p:nvSpPr>
+          <p:cNvPr id="2" name="Slide Image Placeholder 1"/>
+          <p:cNvSpPr>
+            <a:spLocks noGrp="1"/>
+          </p:cNvSpPr>
+          <p:nvPr>
+            <p:ph type="sldImg" idx="2"/>
+          </p:nvPr>
+        </p:nvSpPr>
+        <p:spPr/>
+      </p:sp>
+      <p:sp>
+        <p:nvSpPr>
+          <p:cNvPr id="3" name="Notes Placeholder 2"/>
+          <p:cNvSpPr>
+            <a:spLocks noGrp="1"/>
+          </p:cNvSpPr>
+          <p:nvPr>
+            <p:ph type="body" idx="3" sz="quarter"/>
+          </p:nvPr>
+        </p:nvSpPr>
+        <p:spPr/>
+        <p:txBody>
+          <a:bodyPr/>
+          <a:lstStyle/>
+          <a:p>
+            <a:r>
+              <a:t>Concept diagram: What you built.</a:t>
             </a:r>
           </a:p>
         </p:txBody>
@@ -4209,6 +4351,738 @@
 </p:sld>
 </file>
 
+<file path=ppt/slides/slide10.xml><?xml version="1.0" encoding="utf-8"?>
+<p:sld xmlns:a="http://schemas.openxmlformats.org/drawingml/2006/main" xmlns:p="http://schemas.openxmlformats.org/presentationml/2006/main" xmlns:r="http://schemas.openxmlformats.org/officeDocument/2006/relationships">
+  <p:cSld>
+    <p:spTree>
+      <p:nvGrpSpPr>
+        <p:cNvPr id="1" name=""/>
+        <p:cNvGrpSpPr/>
+        <p:nvPr/>
+      </p:nvGrpSpPr>
+      <p:grpSpPr/>
+      <p:pic>
+        <p:nvPicPr>
+          <p:cNvPr id="2" name="Picture 1" descr="redhat_logo.jpg"/>
+          <p:cNvPicPr>
+            <a:picLocks noChangeAspect="1"/>
+          </p:cNvPicPr>
+          <p:nvPr/>
+        </p:nvPicPr>
+        <p:blipFill>
+          <a:blip r:embed="rId2"/>
+          <a:stretch>
+            <a:fillRect/>
+          </a:stretch>
+        </p:blipFill>
+        <p:spPr>
+          <a:xfrm>
+            <a:off x="10326319" y="475488"/>
+            <a:ext cx="1024128" cy="242248"/>
+          </a:xfrm>
+          <a:prstGeom prst="rect">
+            <a:avLst/>
+          </a:prstGeom>
+        </p:spPr>
+      </p:pic>
+      <p:sp>
+        <p:nvSpPr>
+          <p:cNvPr id="3" name="TextBox 2"/>
+          <p:cNvSpPr txBox="1"/>
+          <p:nvPr/>
+        </p:nvSpPr>
+        <p:spPr>
+          <a:xfrm>
+            <a:off x="841248" y="548640"/>
+            <a:ext cx="8595360" cy="274320"/>
+          </a:xfrm>
+          <a:prstGeom prst="rect">
+            <a:avLst/>
+          </a:prstGeom>
+          <a:noFill/>
+        </p:spPr>
+        <p:txBody>
+          <a:bodyPr wrap="square" anchor="t" lIns="0" rIns="0" tIns="0" bIns="0">
+            <a:spAutoFit/>
+          </a:bodyPr>
+          <a:lstStyle/>
+          <a:p>
+            <a:pPr algn="l">
+              <a:lnSpc>
+                <a:spcPct val="106000"/>
+              </a:lnSpc>
+              <a:spcBef>
+                <a:spcPts val="0"/>
+              </a:spcBef>
+              <a:spcAft>
+                <a:spcPts val="0"/>
+              </a:spcAft>
+            </a:pPr>
+            <a:r>
+              <a:rPr sz="1250" b="1" spc="220">
+                <a:solidFill>
+                  <a:srgbClr val="EE0000"/>
+                </a:solidFill>
+                <a:latin typeface="Red Hat Display"/>
+              </a:rPr>
+              <a:t>M17 · DEPLOYMENT TARGETS &amp; SCHEDULING</a:t>
+            </a:r>
+          </a:p>
+        </p:txBody>
+      </p:sp>
+      <p:sp>
+        <p:nvSpPr>
+          <p:cNvPr id="4" name="TextBox 3"/>
+          <p:cNvSpPr txBox="1"/>
+          <p:nvPr/>
+        </p:nvSpPr>
+        <p:spPr>
+          <a:xfrm>
+            <a:off x="841248" y="877824"/>
+            <a:ext cx="10515600" cy="548640"/>
+          </a:xfrm>
+          <a:prstGeom prst="rect">
+            <a:avLst/>
+          </a:prstGeom>
+          <a:noFill/>
+        </p:spPr>
+        <p:txBody>
+          <a:bodyPr wrap="none" anchor="t" lIns="0" rIns="0" tIns="0" bIns="0">
+            <a:spAutoFit/>
+          </a:bodyPr>
+          <a:lstStyle/>
+          <a:p>
+            <a:pPr algn="l">
+              <a:lnSpc>
+                <a:spcPct val="100000"/>
+              </a:lnSpc>
+              <a:spcBef>
+                <a:spcPts val="0"/>
+              </a:spcBef>
+              <a:spcAft>
+                <a:spcPts val="0"/>
+              </a:spcAft>
+            </a:pPr>
+            <a:r>
+              <a:rPr sz="2500" b="1">
+                <a:solidFill>
+                  <a:srgbClr val="1A1A1A"/>
+                </a:solidFill>
+                <a:latin typeface="Red Hat Display"/>
+              </a:rPr>
+              <a:t>What you built</a:t>
+            </a:r>
+          </a:p>
+        </p:txBody>
+      </p:sp>
+      <p:cxnSp>
+        <p:nvCxnSpPr>
+          <p:cNvPr id="5" name="Connector 4"/>
+          <p:cNvCxnSpPr/>
+          <p:nvPr/>
+        </p:nvCxnSpPr>
+        <p:spPr>
+          <a:xfrm>
+            <a:off x="841248" y="1554480"/>
+            <a:ext cx="1371600" cy="0"/>
+          </a:xfrm>
+          <a:prstGeom prst="bentConnector3">
+            <a:avLst/>
+          </a:prstGeom>
+          <a:ln w="31750">
+            <a:solidFill>
+              <a:srgbClr val="EE0000"/>
+            </a:solidFill>
+          </a:ln>
+          <a:effectLst/>
+        </p:spPr>
+        <p:style>
+          <a:lnRef idx="2">
+            <a:schemeClr val="accent1"/>
+          </a:lnRef>
+          <a:fillRef idx="0">
+            <a:schemeClr val="accent1"/>
+          </a:fillRef>
+          <a:effectRef idx="1">
+            <a:schemeClr val="accent1"/>
+          </a:effectRef>
+          <a:fontRef idx="minor">
+            <a:schemeClr val="tx1"/>
+          </a:fontRef>
+        </p:style>
+      </p:cxnSp>
+      <p:sp>
+        <p:nvSpPr>
+          <p:cNvPr id="6" name="Rounded Rectangle 5"/>
+          <p:cNvSpPr/>
+          <p:nvPr/>
+        </p:nvSpPr>
+        <p:spPr>
+          <a:xfrm>
+            <a:off x="841248" y="2331720"/>
+            <a:ext cx="10509199" cy="3794760"/>
+          </a:xfrm>
+          <a:prstGeom prst="roundRect">
+            <a:avLst>
+              <a:gd name="adj" fmla="val 4000"/>
+            </a:avLst>
+          </a:prstGeom>
+          <a:solidFill>
+            <a:srgbClr val="FFFFFF"/>
+          </a:solidFill>
+          <a:ln w="15240">
+            <a:solidFill>
+              <a:srgbClr val="DDE1E6"/>
+            </a:solidFill>
+          </a:ln>
+          <a:effectLst/>
+        </p:spPr>
+        <p:style>
+          <a:lnRef idx="1">
+            <a:schemeClr val="accent1"/>
+          </a:lnRef>
+          <a:fillRef idx="3">
+            <a:schemeClr val="accent1"/>
+          </a:fillRef>
+          <a:effectRef idx="2">
+            <a:schemeClr val="accent1"/>
+          </a:effectRef>
+          <a:fontRef idx="minor">
+            <a:schemeClr val="lt1"/>
+          </a:fontRef>
+        </p:style>
+        <p:txBody>
+          <a:bodyPr rtlCol="0" anchor="ctr"/>
+          <a:lstStyle/>
+          <a:p>
+            <a:pPr algn="ctr"/>
+          </a:p>
+        </p:txBody>
+      </p:sp>
+      <p:pic>
+        <p:nvPicPr>
+          <p:cNvPr id="7" name="Picture 6" descr="03-what-you-built.png"/>
+          <p:cNvPicPr>
+            <a:picLocks noChangeAspect="1"/>
+          </p:cNvPicPr>
+          <p:nvPr/>
+        </p:nvPicPr>
+        <p:blipFill>
+          <a:blip r:embed="rId3"/>
+          <a:stretch>
+            <a:fillRect/>
+          </a:stretch>
+        </p:blipFill>
+        <p:spPr>
+          <a:xfrm>
+            <a:off x="3637569" y="2532887"/>
+            <a:ext cx="4916556" cy="3392424"/>
+          </a:xfrm>
+          <a:prstGeom prst="rect">
+            <a:avLst/>
+          </a:prstGeom>
+        </p:spPr>
+      </p:pic>
+      <p:cxnSp>
+        <p:nvCxnSpPr>
+          <p:cNvPr id="8" name="Connector 7"/>
+          <p:cNvCxnSpPr/>
+          <p:nvPr/>
+        </p:nvCxnSpPr>
+        <p:spPr>
+          <a:xfrm>
+            <a:off x="841248" y="6437376"/>
+            <a:ext cx="10509199" cy="0"/>
+          </a:xfrm>
+          <a:prstGeom prst="bentConnector3">
+            <a:avLst/>
+          </a:prstGeom>
+          <a:ln w="12700">
+            <a:solidFill>
+              <a:srgbClr val="DDE1E6"/>
+            </a:solidFill>
+          </a:ln>
+          <a:effectLst/>
+        </p:spPr>
+        <p:style>
+          <a:lnRef idx="2">
+            <a:schemeClr val="accent1"/>
+          </a:lnRef>
+          <a:fillRef idx="0">
+            <a:schemeClr val="accent1"/>
+          </a:fillRef>
+          <a:effectRef idx="1">
+            <a:schemeClr val="accent1"/>
+          </a:effectRef>
+          <a:fontRef idx="minor">
+            <a:schemeClr val="tx1"/>
+          </a:fontRef>
+        </p:style>
+      </p:cxnSp>
+      <p:sp>
+        <p:nvSpPr>
+          <p:cNvPr id="9" name="TextBox 8"/>
+          <p:cNvSpPr txBox="1"/>
+          <p:nvPr/>
+        </p:nvSpPr>
+        <p:spPr>
+          <a:xfrm>
+            <a:off x="841248" y="6473952"/>
+            <a:ext cx="7315200" cy="274320"/>
+          </a:xfrm>
+          <a:prstGeom prst="rect">
+            <a:avLst/>
+          </a:prstGeom>
+          <a:noFill/>
+        </p:spPr>
+        <p:txBody>
+          <a:bodyPr wrap="square" anchor="t" lIns="0" rIns="0" tIns="0" bIns="0">
+            <a:spAutoFit/>
+          </a:bodyPr>
+          <a:lstStyle/>
+          <a:p>
+            <a:pPr algn="l">
+              <a:lnSpc>
+                <a:spcPct val="106000"/>
+              </a:lnSpc>
+              <a:spcBef>
+                <a:spcPts val="0"/>
+              </a:spcBef>
+              <a:spcAft>
+                <a:spcPts val="0"/>
+              </a:spcAft>
+            </a:pPr>
+            <a:r>
+              <a:rPr sz="950" b="0">
+                <a:solidFill>
+                  <a:srgbClr val="8A9099"/>
+                </a:solidFill>
+                <a:latin typeface="Red Hat Text"/>
+              </a:rPr>
+              <a:t>CONFIDENTIAL</a:t>
+            </a:r>
+          </a:p>
+        </p:txBody>
+      </p:sp>
+      <p:sp>
+        <p:nvSpPr>
+          <p:cNvPr id="10" name="TextBox 9"/>
+          <p:cNvSpPr txBox="1"/>
+          <p:nvPr/>
+        </p:nvSpPr>
+        <p:spPr>
+          <a:xfrm>
+            <a:off x="10801807" y="6473952"/>
+            <a:ext cx="548640" cy="274320"/>
+          </a:xfrm>
+          <a:prstGeom prst="rect">
+            <a:avLst/>
+          </a:prstGeom>
+          <a:noFill/>
+        </p:spPr>
+        <p:txBody>
+          <a:bodyPr wrap="square" anchor="t" lIns="0" rIns="0" tIns="0" bIns="0">
+            <a:spAutoFit/>
+          </a:bodyPr>
+          <a:lstStyle/>
+          <a:p>
+            <a:pPr algn="r">
+              <a:lnSpc>
+                <a:spcPct val="106000"/>
+              </a:lnSpc>
+              <a:spcBef>
+                <a:spcPts val="0"/>
+              </a:spcBef>
+              <a:spcAft>
+                <a:spcPts val="0"/>
+              </a:spcAft>
+            </a:pPr>
+            <a:r>
+              <a:rPr sz="950" b="0">
+                <a:solidFill>
+                  <a:srgbClr val="8A9099"/>
+                </a:solidFill>
+                <a:latin typeface="Red Hat Text"/>
+              </a:rPr>
+              <a:t>9</a:t>
+            </a:r>
+          </a:p>
+        </p:txBody>
+      </p:sp>
+    </p:spTree>
+  </p:cSld>
+  <p:clrMapOvr>
+    <a:masterClrMapping/>
+  </p:clrMapOvr>
+</p:sld>
+</file>
+
+<file path=ppt/slides/slide11.xml><?xml version="1.0" encoding="utf-8"?>
+<p:sld xmlns:a="http://schemas.openxmlformats.org/drawingml/2006/main" xmlns:p="http://schemas.openxmlformats.org/presentationml/2006/main" xmlns:r="http://schemas.openxmlformats.org/officeDocument/2006/relationships">
+  <p:cSld>
+    <p:spTree>
+      <p:nvGrpSpPr>
+        <p:cNvPr id="1" name=""/>
+        <p:cNvGrpSpPr/>
+        <p:nvPr/>
+      </p:nvGrpSpPr>
+      <p:grpSpPr/>
+      <p:pic>
+        <p:nvPicPr>
+          <p:cNvPr id="2" name="Picture 1" descr="redhat_logo.jpg"/>
+          <p:cNvPicPr>
+            <a:picLocks noChangeAspect="1"/>
+          </p:cNvPicPr>
+          <p:nvPr/>
+        </p:nvPicPr>
+        <p:blipFill>
+          <a:blip r:embed="rId2"/>
+          <a:stretch>
+            <a:fillRect/>
+          </a:stretch>
+        </p:blipFill>
+        <p:spPr>
+          <a:xfrm>
+            <a:off x="10326319" y="475488"/>
+            <a:ext cx="1024128" cy="242248"/>
+          </a:xfrm>
+          <a:prstGeom prst="rect">
+            <a:avLst/>
+          </a:prstGeom>
+        </p:spPr>
+      </p:pic>
+      <p:sp>
+        <p:nvSpPr>
+          <p:cNvPr id="3" name="TextBox 2"/>
+          <p:cNvSpPr txBox="1"/>
+          <p:nvPr/>
+        </p:nvSpPr>
+        <p:spPr>
+          <a:xfrm>
+            <a:off x="841248" y="548640"/>
+            <a:ext cx="8595360" cy="274320"/>
+          </a:xfrm>
+          <a:prstGeom prst="rect">
+            <a:avLst/>
+          </a:prstGeom>
+          <a:noFill/>
+        </p:spPr>
+        <p:txBody>
+          <a:bodyPr wrap="square" anchor="t" lIns="0" rIns="0" tIns="0" bIns="0">
+            <a:spAutoFit/>
+          </a:bodyPr>
+          <a:lstStyle/>
+          <a:p>
+            <a:pPr algn="l">
+              <a:lnSpc>
+                <a:spcPct val="106000"/>
+              </a:lnSpc>
+              <a:spcBef>
+                <a:spcPts val="0"/>
+              </a:spcBef>
+              <a:spcAft>
+                <a:spcPts val="0"/>
+              </a:spcAft>
+            </a:pPr>
+            <a:r>
+              <a:rPr sz="1250" b="1" spc="220">
+                <a:solidFill>
+                  <a:srgbClr val="EE0000"/>
+                </a:solidFill>
+                <a:latin typeface="Red Hat Display"/>
+              </a:rPr>
+              <a:t>M17 · DEPLOYMENT TARGETS &amp; SCHEDULING</a:t>
+            </a:r>
+          </a:p>
+        </p:txBody>
+      </p:sp>
+      <p:sp>
+        <p:nvSpPr>
+          <p:cNvPr id="4" name="TextBox 3"/>
+          <p:cNvSpPr txBox="1"/>
+          <p:nvPr/>
+        </p:nvSpPr>
+        <p:spPr>
+          <a:xfrm>
+            <a:off x="841248" y="877824"/>
+            <a:ext cx="10515600" cy="548640"/>
+          </a:xfrm>
+          <a:prstGeom prst="rect">
+            <a:avLst/>
+          </a:prstGeom>
+          <a:noFill/>
+        </p:spPr>
+        <p:txBody>
+          <a:bodyPr wrap="none" anchor="t" lIns="0" rIns="0" tIns="0" bIns="0">
+            <a:spAutoFit/>
+          </a:bodyPr>
+          <a:lstStyle/>
+          <a:p>
+            <a:pPr algn="l">
+              <a:lnSpc>
+                <a:spcPct val="100000"/>
+              </a:lnSpc>
+              <a:spcBef>
+                <a:spcPts val="0"/>
+              </a:spcBef>
+              <a:spcAft>
+                <a:spcPts val="0"/>
+              </a:spcAft>
+            </a:pPr>
+            <a:r>
+              <a:rPr sz="2500" b="1">
+                <a:solidFill>
+                  <a:srgbClr val="1A1A1A"/>
+                </a:solidFill>
+                <a:latin typeface="Red Hat Display"/>
+              </a:rPr>
+              <a:t>Reseed on boot</a:t>
+            </a:r>
+          </a:p>
+        </p:txBody>
+      </p:sp>
+      <p:cxnSp>
+        <p:nvCxnSpPr>
+          <p:cNvPr id="5" name="Connector 4"/>
+          <p:cNvCxnSpPr/>
+          <p:nvPr/>
+        </p:nvCxnSpPr>
+        <p:spPr>
+          <a:xfrm>
+            <a:off x="841248" y="1554480"/>
+            <a:ext cx="1371600" cy="0"/>
+          </a:xfrm>
+          <a:prstGeom prst="bentConnector3">
+            <a:avLst/>
+          </a:prstGeom>
+          <a:ln w="31750">
+            <a:solidFill>
+              <a:srgbClr val="EE0000"/>
+            </a:solidFill>
+          </a:ln>
+          <a:effectLst/>
+        </p:spPr>
+        <p:style>
+          <a:lnRef idx="2">
+            <a:schemeClr val="accent1"/>
+          </a:lnRef>
+          <a:fillRef idx="0">
+            <a:schemeClr val="accent1"/>
+          </a:fillRef>
+          <a:effectRef idx="1">
+            <a:schemeClr val="accent1"/>
+          </a:effectRef>
+          <a:fontRef idx="minor">
+            <a:schemeClr val="tx1"/>
+          </a:fontRef>
+        </p:style>
+      </p:cxnSp>
+      <p:sp>
+        <p:nvSpPr>
+          <p:cNvPr id="6" name="Rounded Rectangle 5"/>
+          <p:cNvSpPr/>
+          <p:nvPr/>
+        </p:nvSpPr>
+        <p:spPr>
+          <a:xfrm>
+            <a:off x="841248" y="2331720"/>
+            <a:ext cx="10509199" cy="3794760"/>
+          </a:xfrm>
+          <a:prstGeom prst="roundRect">
+            <a:avLst>
+              <a:gd name="adj" fmla="val 4000"/>
+            </a:avLst>
+          </a:prstGeom>
+          <a:solidFill>
+            <a:srgbClr val="FFFFFF"/>
+          </a:solidFill>
+          <a:ln w="15240">
+            <a:solidFill>
+              <a:srgbClr val="DDE1E6"/>
+            </a:solidFill>
+          </a:ln>
+          <a:effectLst/>
+        </p:spPr>
+        <p:style>
+          <a:lnRef idx="1">
+            <a:schemeClr val="accent1"/>
+          </a:lnRef>
+          <a:fillRef idx="3">
+            <a:schemeClr val="accent1"/>
+          </a:fillRef>
+          <a:effectRef idx="2">
+            <a:schemeClr val="accent1"/>
+          </a:effectRef>
+          <a:fontRef idx="minor">
+            <a:schemeClr val="lt1"/>
+          </a:fontRef>
+        </p:style>
+        <p:txBody>
+          <a:bodyPr rtlCol="0" anchor="ctr"/>
+          <a:lstStyle/>
+          <a:p>
+            <a:pPr algn="ctr"/>
+          </a:p>
+        </p:txBody>
+      </p:sp>
+      <p:pic>
+        <p:nvPicPr>
+          <p:cNvPr id="7" name="Picture 6" descr="04-reseed-on-boot.png"/>
+          <p:cNvPicPr>
+            <a:picLocks noChangeAspect="1"/>
+          </p:cNvPicPr>
+          <p:nvPr/>
+        </p:nvPicPr>
+        <p:blipFill>
+          <a:blip r:embed="rId3"/>
+          <a:stretch>
+            <a:fillRect/>
+          </a:stretch>
+        </p:blipFill>
+        <p:spPr>
+          <a:xfrm>
+            <a:off x="1042416" y="2959425"/>
+            <a:ext cx="10106863" cy="2539349"/>
+          </a:xfrm>
+          <a:prstGeom prst="rect">
+            <a:avLst/>
+          </a:prstGeom>
+        </p:spPr>
+      </p:pic>
+      <p:cxnSp>
+        <p:nvCxnSpPr>
+          <p:cNvPr id="8" name="Connector 7"/>
+          <p:cNvCxnSpPr/>
+          <p:nvPr/>
+        </p:nvCxnSpPr>
+        <p:spPr>
+          <a:xfrm>
+            <a:off x="841248" y="6437376"/>
+            <a:ext cx="10509199" cy="0"/>
+          </a:xfrm>
+          <a:prstGeom prst="bentConnector3">
+            <a:avLst/>
+          </a:prstGeom>
+          <a:ln w="12700">
+            <a:solidFill>
+              <a:srgbClr val="DDE1E6"/>
+            </a:solidFill>
+          </a:ln>
+          <a:effectLst/>
+        </p:spPr>
+        <p:style>
+          <a:lnRef idx="2">
+            <a:schemeClr val="accent1"/>
+          </a:lnRef>
+          <a:fillRef idx="0">
+            <a:schemeClr val="accent1"/>
+          </a:fillRef>
+          <a:effectRef idx="1">
+            <a:schemeClr val="accent1"/>
+          </a:effectRef>
+          <a:fontRef idx="minor">
+            <a:schemeClr val="tx1"/>
+          </a:fontRef>
+        </p:style>
+      </p:cxnSp>
+      <p:sp>
+        <p:nvSpPr>
+          <p:cNvPr id="9" name="TextBox 8"/>
+          <p:cNvSpPr txBox="1"/>
+          <p:nvPr/>
+        </p:nvSpPr>
+        <p:spPr>
+          <a:xfrm>
+            <a:off x="841248" y="6473952"/>
+            <a:ext cx="7315200" cy="274320"/>
+          </a:xfrm>
+          <a:prstGeom prst="rect">
+            <a:avLst/>
+          </a:prstGeom>
+          <a:noFill/>
+        </p:spPr>
+        <p:txBody>
+          <a:bodyPr wrap="square" anchor="t" lIns="0" rIns="0" tIns="0" bIns="0">
+            <a:spAutoFit/>
+          </a:bodyPr>
+          <a:lstStyle/>
+          <a:p>
+            <a:pPr algn="l">
+              <a:lnSpc>
+                <a:spcPct val="106000"/>
+              </a:lnSpc>
+              <a:spcBef>
+                <a:spcPts val="0"/>
+              </a:spcBef>
+              <a:spcAft>
+                <a:spcPts val="0"/>
+              </a:spcAft>
+            </a:pPr>
+            <a:r>
+              <a:rPr sz="950" b="0">
+                <a:solidFill>
+                  <a:srgbClr val="8A9099"/>
+                </a:solidFill>
+                <a:latin typeface="Red Hat Text"/>
+              </a:rPr>
+              <a:t>CONFIDENTIAL</a:t>
+            </a:r>
+          </a:p>
+        </p:txBody>
+      </p:sp>
+      <p:sp>
+        <p:nvSpPr>
+          <p:cNvPr id="10" name="TextBox 9"/>
+          <p:cNvSpPr txBox="1"/>
+          <p:nvPr/>
+        </p:nvSpPr>
+        <p:spPr>
+          <a:xfrm>
+            <a:off x="10801807" y="6473952"/>
+            <a:ext cx="548640" cy="274320"/>
+          </a:xfrm>
+          <a:prstGeom prst="rect">
+            <a:avLst/>
+          </a:prstGeom>
+          <a:noFill/>
+        </p:spPr>
+        <p:txBody>
+          <a:bodyPr wrap="square" anchor="t" lIns="0" rIns="0" tIns="0" bIns="0">
+            <a:spAutoFit/>
+          </a:bodyPr>
+          <a:lstStyle/>
+          <a:p>
+            <a:pPr algn="r">
+              <a:lnSpc>
+                <a:spcPct val="106000"/>
+              </a:lnSpc>
+              <a:spcBef>
+                <a:spcPts val="0"/>
+              </a:spcBef>
+              <a:spcAft>
+                <a:spcPts val="0"/>
+              </a:spcAft>
+            </a:pPr>
+            <a:r>
+              <a:rPr sz="950" b="0">
+                <a:solidFill>
+                  <a:srgbClr val="8A9099"/>
+                </a:solidFill>
+                <a:latin typeface="Red Hat Text"/>
+              </a:rPr>
+              <a:t>10</a:t>
+            </a:r>
+          </a:p>
+        </p:txBody>
+      </p:sp>
+    </p:spTree>
+  </p:cSld>
+  <p:clrMapOvr>
+    <a:masterClrMapping/>
+  </p:clrMapOvr>
+</p:sld>
+</file>
+
 <file path=ppt/slides/slide2.xml><?xml version="1.0" encoding="utf-8"?>
 <p:sld xmlns:a="http://schemas.openxmlformats.org/drawingml/2006/main" xmlns:p="http://schemas.openxmlformats.org/presentationml/2006/main" xmlns:r="http://schemas.openxmlformats.org/officeDocument/2006/relationships">
   <p:cSld>
@@ -4378,11 +5252,11 @@
         <p:spPr>
           <a:xfrm>
             <a:off x="841248" y="2395728"/>
-            <a:ext cx="5715000" cy="530352"/>
+            <a:ext cx="5138928" cy="786384"/>
           </a:xfrm>
           <a:prstGeom prst="roundRect">
             <a:avLst>
-              <a:gd name="adj" fmla="val 6000"/>
+              <a:gd name="adj" fmla="val 7000"/>
             </a:avLst>
           </a:prstGeom>
           <a:solidFill>
@@ -4417,9 +5291,55 @@
           </a:p>
         </p:txBody>
       </p:sp>
+      <p:sp>
+        <p:nvSpPr>
+          <p:cNvPr id="7" name="Rounded Rectangle 6"/>
+          <p:cNvSpPr/>
+          <p:nvPr/>
+        </p:nvSpPr>
+        <p:spPr>
+          <a:xfrm>
+            <a:off x="987552" y="2532888"/>
+            <a:ext cx="512064" cy="512064"/>
+          </a:xfrm>
+          <a:prstGeom prst="roundRect">
+            <a:avLst>
+              <a:gd name="adj" fmla="val 26000"/>
+            </a:avLst>
+          </a:prstGeom>
+          <a:solidFill>
+            <a:srgbClr val="EE0000"/>
+          </a:solidFill>
+          <a:ln>
+            <a:noFill/>
+          </a:ln>
+          <a:effectLst/>
+        </p:spPr>
+        <p:style>
+          <a:lnRef idx="1">
+            <a:schemeClr val="accent1"/>
+          </a:lnRef>
+          <a:fillRef idx="3">
+            <a:schemeClr val="accent1"/>
+          </a:fillRef>
+          <a:effectRef idx="2">
+            <a:schemeClr val="accent1"/>
+          </a:effectRef>
+          <a:fontRef idx="minor">
+            <a:schemeClr val="lt1"/>
+          </a:fontRef>
+        </p:style>
+        <p:txBody>
+          <a:bodyPr rtlCol="0" anchor="ctr"/>
+          <a:lstStyle/>
+          <a:p>
+            <a:pPr algn="ctr"/>
+          </a:p>
+        </p:txBody>
+      </p:sp>
       <p:pic>
         <p:nvPicPr>
-          <p:cNvPr id="7" name="Picture 6" descr="check_steel.png"/>
+          <p:cNvPr id="8" name="Picture 7" descr="check_white.png"/>
           <p:cNvPicPr>
             <a:picLocks noChangeAspect="1"/>
           </p:cNvPicPr>
@@ -4433,8 +5353,8 @@
         </p:blipFill>
         <p:spPr>
           <a:xfrm>
-            <a:off x="987552" y="2542032"/>
-            <a:ext cx="237744" cy="237744"/>
+            <a:off x="1110447" y="2655783"/>
+            <a:ext cx="266273" cy="266273"/>
           </a:xfrm>
           <a:prstGeom prst="rect">
             <a:avLst/>
@@ -4443,14 +5363,14 @@
       </p:pic>
       <p:sp>
         <p:nvSpPr>
-          <p:cNvPr id="8" name="TextBox 7"/>
+          <p:cNvPr id="9" name="TextBox 8"/>
           <p:cNvSpPr txBox="1"/>
           <p:nvPr/>
         </p:nvSpPr>
         <p:spPr>
           <a:xfrm>
-            <a:off x="1353312" y="2395728"/>
-            <a:ext cx="5029200" cy="530352"/>
+            <a:off x="1627632" y="2395728"/>
+            <a:ext cx="4206240" cy="786384"/>
           </a:xfrm>
           <a:prstGeom prst="rect">
             <a:avLst/>
@@ -4475,7 +5395,7 @@
               </a:spcAft>
             </a:pPr>
             <a:r>
-              <a:rPr sz="1200" b="0">
+              <a:rPr sz="1150" b="0">
                 <a:solidFill>
                   <a:srgbClr val="1A1A1A"/>
                 </a:solidFill>
@@ -4488,18 +5408,18 @@
       </p:sp>
       <p:sp>
         <p:nvSpPr>
-          <p:cNvPr id="9" name="Rounded Rectangle 8"/>
+          <p:cNvPr id="10" name="Rounded Rectangle 9"/>
           <p:cNvSpPr/>
           <p:nvPr/>
         </p:nvSpPr>
         <p:spPr>
           <a:xfrm>
-            <a:off x="841248" y="2999232"/>
-            <a:ext cx="5715000" cy="530352"/>
+            <a:off x="6254496" y="2395728"/>
+            <a:ext cx="5138928" cy="786384"/>
           </a:xfrm>
           <a:prstGeom prst="roundRect">
             <a:avLst>
-              <a:gd name="adj" fmla="val 6000"/>
+              <a:gd name="adj" fmla="val 7000"/>
             </a:avLst>
           </a:prstGeom>
           <a:solidFill>
@@ -4534,9 +5454,55 @@
           </a:p>
         </p:txBody>
       </p:sp>
+      <p:sp>
+        <p:nvSpPr>
+          <p:cNvPr id="11" name="Rounded Rectangle 10"/>
+          <p:cNvSpPr/>
+          <p:nvPr/>
+        </p:nvSpPr>
+        <p:spPr>
+          <a:xfrm>
+            <a:off x="6400800" y="2532888"/>
+            <a:ext cx="512064" cy="512064"/>
+          </a:xfrm>
+          <a:prstGeom prst="roundRect">
+            <a:avLst>
+              <a:gd name="adj" fmla="val 26000"/>
+            </a:avLst>
+          </a:prstGeom>
+          <a:solidFill>
+            <a:srgbClr val="EE0000"/>
+          </a:solidFill>
+          <a:ln>
+            <a:noFill/>
+          </a:ln>
+          <a:effectLst/>
+        </p:spPr>
+        <p:style>
+          <a:lnRef idx="1">
+            <a:schemeClr val="accent1"/>
+          </a:lnRef>
+          <a:fillRef idx="3">
+            <a:schemeClr val="accent1"/>
+          </a:fillRef>
+          <a:effectRef idx="2">
+            <a:schemeClr val="accent1"/>
+          </a:effectRef>
+          <a:fontRef idx="minor">
+            <a:schemeClr val="lt1"/>
+          </a:fontRef>
+        </p:style>
+        <p:txBody>
+          <a:bodyPr rtlCol="0" anchor="ctr"/>
+          <a:lstStyle/>
+          <a:p>
+            <a:pPr algn="ctr"/>
+          </a:p>
+        </p:txBody>
+      </p:sp>
       <p:pic>
         <p:nvPicPr>
-          <p:cNvPr id="10" name="Picture 9" descr="check_steel.png"/>
+          <p:cNvPr id="12" name="Picture 11" descr="check_white.png"/>
           <p:cNvPicPr>
             <a:picLocks noChangeAspect="1"/>
           </p:cNvPicPr>
@@ -4550,8 +5516,8 @@
         </p:blipFill>
         <p:spPr>
           <a:xfrm>
-            <a:off x="987552" y="3145536"/>
-            <a:ext cx="237744" cy="237744"/>
+            <a:off x="6523695" y="2655783"/>
+            <a:ext cx="266273" cy="266273"/>
           </a:xfrm>
           <a:prstGeom prst="rect">
             <a:avLst/>
@@ -4560,14 +5526,14 @@
       </p:pic>
       <p:sp>
         <p:nvSpPr>
-          <p:cNvPr id="11" name="TextBox 10"/>
+          <p:cNvPr id="13" name="TextBox 12"/>
           <p:cNvSpPr txBox="1"/>
           <p:nvPr/>
         </p:nvSpPr>
         <p:spPr>
           <a:xfrm>
-            <a:off x="1353312" y="2999232"/>
-            <a:ext cx="5029200" cy="530352"/>
+            <a:off x="7040880" y="2395728"/>
+            <a:ext cx="4206240" cy="786384"/>
           </a:xfrm>
           <a:prstGeom prst="rect">
             <a:avLst/>
@@ -4592,7 +5558,7 @@
               </a:spcAft>
             </a:pPr>
             <a:r>
-              <a:rPr sz="1200" b="0">
+              <a:rPr sz="1150" b="0">
                 <a:solidFill>
                   <a:srgbClr val="1A1A1A"/>
                 </a:solidFill>
@@ -4605,18 +5571,18 @@
       </p:sp>
       <p:sp>
         <p:nvSpPr>
-          <p:cNvPr id="12" name="Rounded Rectangle 11"/>
+          <p:cNvPr id="14" name="Rounded Rectangle 13"/>
           <p:cNvSpPr/>
           <p:nvPr/>
         </p:nvSpPr>
         <p:spPr>
           <a:xfrm>
-            <a:off x="841248" y="3602736"/>
-            <a:ext cx="5715000" cy="530352"/>
+            <a:off x="841248" y="3328416"/>
+            <a:ext cx="5138928" cy="786384"/>
           </a:xfrm>
           <a:prstGeom prst="roundRect">
             <a:avLst>
-              <a:gd name="adj" fmla="val 6000"/>
+              <a:gd name="adj" fmla="val 7000"/>
             </a:avLst>
           </a:prstGeom>
           <a:solidFill>
@@ -4651,9 +5617,55 @@
           </a:p>
         </p:txBody>
       </p:sp>
+      <p:sp>
+        <p:nvSpPr>
+          <p:cNvPr id="15" name="Rounded Rectangle 14"/>
+          <p:cNvSpPr/>
+          <p:nvPr/>
+        </p:nvSpPr>
+        <p:spPr>
+          <a:xfrm>
+            <a:off x="987552" y="3465576"/>
+            <a:ext cx="512064" cy="512064"/>
+          </a:xfrm>
+          <a:prstGeom prst="roundRect">
+            <a:avLst>
+              <a:gd name="adj" fmla="val 26000"/>
+            </a:avLst>
+          </a:prstGeom>
+          <a:solidFill>
+            <a:srgbClr val="EE0000"/>
+          </a:solidFill>
+          <a:ln>
+            <a:noFill/>
+          </a:ln>
+          <a:effectLst/>
+        </p:spPr>
+        <p:style>
+          <a:lnRef idx="1">
+            <a:schemeClr val="accent1"/>
+          </a:lnRef>
+          <a:fillRef idx="3">
+            <a:schemeClr val="accent1"/>
+          </a:fillRef>
+          <a:effectRef idx="2">
+            <a:schemeClr val="accent1"/>
+          </a:effectRef>
+          <a:fontRef idx="minor">
+            <a:schemeClr val="lt1"/>
+          </a:fontRef>
+        </p:style>
+        <p:txBody>
+          <a:bodyPr rtlCol="0" anchor="ctr"/>
+          <a:lstStyle/>
+          <a:p>
+            <a:pPr algn="ctr"/>
+          </a:p>
+        </p:txBody>
+      </p:sp>
       <p:pic>
         <p:nvPicPr>
-          <p:cNvPr id="13" name="Picture 12" descr="check_steel.png"/>
+          <p:cNvPr id="16" name="Picture 15" descr="check_white.png"/>
           <p:cNvPicPr>
             <a:picLocks noChangeAspect="1"/>
           </p:cNvPicPr>
@@ -4667,8 +5679,8 @@
         </p:blipFill>
         <p:spPr>
           <a:xfrm>
-            <a:off x="987552" y="3749040"/>
-            <a:ext cx="237744" cy="237744"/>
+            <a:off x="1110447" y="3588471"/>
+            <a:ext cx="266273" cy="266273"/>
           </a:xfrm>
           <a:prstGeom prst="rect">
             <a:avLst/>
@@ -4677,14 +5689,14 @@
       </p:pic>
       <p:sp>
         <p:nvSpPr>
-          <p:cNvPr id="14" name="TextBox 13"/>
+          <p:cNvPr id="17" name="TextBox 16"/>
           <p:cNvSpPr txBox="1"/>
           <p:nvPr/>
         </p:nvSpPr>
         <p:spPr>
           <a:xfrm>
-            <a:off x="1353312" y="3602736"/>
-            <a:ext cx="5029200" cy="530352"/>
+            <a:off x="1627632" y="3328416"/>
+            <a:ext cx="4206240" cy="786384"/>
           </a:xfrm>
           <a:prstGeom prst="rect">
             <a:avLst/>
@@ -4709,7 +5721,7 @@
               </a:spcAft>
             </a:pPr>
             <a:r>
-              <a:rPr sz="1200" b="0">
+              <a:rPr sz="1150" b="0">
                 <a:solidFill>
                   <a:srgbClr val="1A1A1A"/>
                 </a:solidFill>
@@ -4722,18 +5734,18 @@
       </p:sp>
       <p:sp>
         <p:nvSpPr>
-          <p:cNvPr id="15" name="Rounded Rectangle 14"/>
+          <p:cNvPr id="18" name="Rounded Rectangle 17"/>
           <p:cNvSpPr/>
           <p:nvPr/>
         </p:nvSpPr>
         <p:spPr>
           <a:xfrm>
-            <a:off x="841248" y="4206240"/>
-            <a:ext cx="5715000" cy="530352"/>
+            <a:off x="6254496" y="3328416"/>
+            <a:ext cx="5138928" cy="786384"/>
           </a:xfrm>
           <a:prstGeom prst="roundRect">
             <a:avLst>
-              <a:gd name="adj" fmla="val 6000"/>
+              <a:gd name="adj" fmla="val 7000"/>
             </a:avLst>
           </a:prstGeom>
           <a:solidFill>
@@ -4768,9 +5780,55 @@
           </a:p>
         </p:txBody>
       </p:sp>
+      <p:sp>
+        <p:nvSpPr>
+          <p:cNvPr id="19" name="Rounded Rectangle 18"/>
+          <p:cNvSpPr/>
+          <p:nvPr/>
+        </p:nvSpPr>
+        <p:spPr>
+          <a:xfrm>
+            <a:off x="6400800" y="3465576"/>
+            <a:ext cx="512064" cy="512064"/>
+          </a:xfrm>
+          <a:prstGeom prst="roundRect">
+            <a:avLst>
+              <a:gd name="adj" fmla="val 26000"/>
+            </a:avLst>
+          </a:prstGeom>
+          <a:solidFill>
+            <a:srgbClr val="EE0000"/>
+          </a:solidFill>
+          <a:ln>
+            <a:noFill/>
+          </a:ln>
+          <a:effectLst/>
+        </p:spPr>
+        <p:style>
+          <a:lnRef idx="1">
+            <a:schemeClr val="accent1"/>
+          </a:lnRef>
+          <a:fillRef idx="3">
+            <a:schemeClr val="accent1"/>
+          </a:fillRef>
+          <a:effectRef idx="2">
+            <a:schemeClr val="accent1"/>
+          </a:effectRef>
+          <a:fontRef idx="minor">
+            <a:schemeClr val="lt1"/>
+          </a:fontRef>
+        </p:style>
+        <p:txBody>
+          <a:bodyPr rtlCol="0" anchor="ctr"/>
+          <a:lstStyle/>
+          <a:p>
+            <a:pPr algn="ctr"/>
+          </a:p>
+        </p:txBody>
+      </p:sp>
       <p:pic>
         <p:nvPicPr>
-          <p:cNvPr id="16" name="Picture 15" descr="check_steel.png"/>
+          <p:cNvPr id="20" name="Picture 19" descr="check_white.png"/>
           <p:cNvPicPr>
             <a:picLocks noChangeAspect="1"/>
           </p:cNvPicPr>
@@ -4784,8 +5842,8 @@
         </p:blipFill>
         <p:spPr>
           <a:xfrm>
-            <a:off x="987552" y="4352544"/>
-            <a:ext cx="237744" cy="237744"/>
+            <a:off x="6523695" y="3588471"/>
+            <a:ext cx="266273" cy="266273"/>
           </a:xfrm>
           <a:prstGeom prst="rect">
             <a:avLst/>
@@ -4794,14 +5852,14 @@
       </p:pic>
       <p:sp>
         <p:nvSpPr>
-          <p:cNvPr id="17" name="TextBox 16"/>
+          <p:cNvPr id="21" name="TextBox 20"/>
           <p:cNvSpPr txBox="1"/>
           <p:nvPr/>
         </p:nvSpPr>
         <p:spPr>
           <a:xfrm>
-            <a:off x="1353312" y="4206240"/>
-            <a:ext cx="5029200" cy="530352"/>
+            <a:off x="7040880" y="3328416"/>
+            <a:ext cx="4206240" cy="786384"/>
           </a:xfrm>
           <a:prstGeom prst="rect">
             <a:avLst/>
@@ -4826,7 +5884,7 @@
               </a:spcAft>
             </a:pPr>
             <a:r>
-              <a:rPr sz="1200" b="0">
+              <a:rPr sz="1150" b="0">
                 <a:solidFill>
                   <a:srgbClr val="1A1A1A"/>
                 </a:solidFill>
@@ -4839,18 +5897,18 @@
       </p:sp>
       <p:sp>
         <p:nvSpPr>
-          <p:cNvPr id="18" name="Rounded Rectangle 17"/>
+          <p:cNvPr id="22" name="Rounded Rectangle 21"/>
           <p:cNvSpPr/>
           <p:nvPr/>
         </p:nvSpPr>
         <p:spPr>
           <a:xfrm>
-            <a:off x="841248" y="4809744"/>
-            <a:ext cx="5715000" cy="530352"/>
+            <a:off x="841248" y="4261104"/>
+            <a:ext cx="5138928" cy="786384"/>
           </a:xfrm>
           <a:prstGeom prst="roundRect">
             <a:avLst>
-              <a:gd name="adj" fmla="val 6000"/>
+              <a:gd name="adj" fmla="val 7000"/>
             </a:avLst>
           </a:prstGeom>
           <a:solidFill>
@@ -4885,9 +5943,55 @@
           </a:p>
         </p:txBody>
       </p:sp>
+      <p:sp>
+        <p:nvSpPr>
+          <p:cNvPr id="23" name="Rounded Rectangle 22"/>
+          <p:cNvSpPr/>
+          <p:nvPr/>
+        </p:nvSpPr>
+        <p:spPr>
+          <a:xfrm>
+            <a:off x="987552" y="4398264"/>
+            <a:ext cx="512064" cy="512064"/>
+          </a:xfrm>
+          <a:prstGeom prst="roundRect">
+            <a:avLst>
+              <a:gd name="adj" fmla="val 26000"/>
+            </a:avLst>
+          </a:prstGeom>
+          <a:solidFill>
+            <a:srgbClr val="EE0000"/>
+          </a:solidFill>
+          <a:ln>
+            <a:noFill/>
+          </a:ln>
+          <a:effectLst/>
+        </p:spPr>
+        <p:style>
+          <a:lnRef idx="1">
+            <a:schemeClr val="accent1"/>
+          </a:lnRef>
+          <a:fillRef idx="3">
+            <a:schemeClr val="accent1"/>
+          </a:fillRef>
+          <a:effectRef idx="2">
+            <a:schemeClr val="accent1"/>
+          </a:effectRef>
+          <a:fontRef idx="minor">
+            <a:schemeClr val="lt1"/>
+          </a:fontRef>
+        </p:style>
+        <p:txBody>
+          <a:bodyPr rtlCol="0" anchor="ctr"/>
+          <a:lstStyle/>
+          <a:p>
+            <a:pPr algn="ctr"/>
+          </a:p>
+        </p:txBody>
+      </p:sp>
       <p:pic>
         <p:nvPicPr>
-          <p:cNvPr id="19" name="Picture 18" descr="check_steel.png"/>
+          <p:cNvPr id="24" name="Picture 23" descr="check_white.png"/>
           <p:cNvPicPr>
             <a:picLocks noChangeAspect="1"/>
           </p:cNvPicPr>
@@ -4901,8 +6005,8 @@
         </p:blipFill>
         <p:spPr>
           <a:xfrm>
-            <a:off x="987552" y="4956048"/>
-            <a:ext cx="237744" cy="237744"/>
+            <a:off x="1110447" y="4521159"/>
+            <a:ext cx="266273" cy="266273"/>
           </a:xfrm>
           <a:prstGeom prst="rect">
             <a:avLst/>
@@ -4911,14 +6015,14 @@
       </p:pic>
       <p:sp>
         <p:nvSpPr>
-          <p:cNvPr id="20" name="TextBox 19"/>
+          <p:cNvPr id="25" name="TextBox 24"/>
           <p:cNvSpPr txBox="1"/>
           <p:nvPr/>
         </p:nvSpPr>
         <p:spPr>
           <a:xfrm>
-            <a:off x="1353312" y="4809744"/>
-            <a:ext cx="5029200" cy="530352"/>
+            <a:off x="1627632" y="4261104"/>
+            <a:ext cx="4206240" cy="786384"/>
           </a:xfrm>
           <a:prstGeom prst="rect">
             <a:avLst/>
@@ -4943,221 +6047,13 @@
               </a:spcAft>
             </a:pPr>
             <a:r>
-              <a:rPr sz="1200" b="0">
+              <a:rPr sz="1150" b="0">
                 <a:solidFill>
                   <a:srgbClr val="1A1A1A"/>
                 </a:solidFill>
                 <a:latin typeface="Red Hat Text"/>
               </a:rPr>
               <a:t>Placement is a decision, not a lottery</a:t>
-            </a:r>
-          </a:p>
-        </p:txBody>
-      </p:sp>
-      <p:sp>
-        <p:nvSpPr>
-          <p:cNvPr id="21" name="Rounded Rectangle 20"/>
-          <p:cNvSpPr/>
-          <p:nvPr/>
-        </p:nvSpPr>
-        <p:spPr>
-          <a:xfrm>
-            <a:off x="6812280" y="2395728"/>
-            <a:ext cx="4538167" cy="2944368"/>
-          </a:xfrm>
-          <a:prstGeom prst="roundRect">
-            <a:avLst>
-              <a:gd name="adj" fmla="val 4000"/>
-            </a:avLst>
-          </a:prstGeom>
-          <a:solidFill>
-            <a:srgbClr val="FFFFFF"/>
-          </a:solidFill>
-          <a:ln w="15240">
-            <a:solidFill>
-              <a:srgbClr val="DDE1E6"/>
-            </a:solidFill>
-          </a:ln>
-          <a:effectLst/>
-        </p:spPr>
-        <p:style>
-          <a:lnRef idx="1">
-            <a:schemeClr val="accent1"/>
-          </a:lnRef>
-          <a:fillRef idx="3">
-            <a:schemeClr val="accent1"/>
-          </a:fillRef>
-          <a:effectRef idx="2">
-            <a:schemeClr val="accent1"/>
-          </a:effectRef>
-          <a:fontRef idx="minor">
-            <a:schemeClr val="lt1"/>
-          </a:fontRef>
-        </p:style>
-        <p:txBody>
-          <a:bodyPr rtlCol="0" anchor="ctr"/>
-          <a:lstStyle/>
-          <a:p>
-            <a:pPr algn="ctr"/>
-          </a:p>
-        </p:txBody>
-      </p:sp>
-      <p:sp>
-        <p:nvSpPr>
-          <p:cNvPr id="22" name="Rounded Rectangle 21"/>
-          <p:cNvSpPr/>
-          <p:nvPr/>
-        </p:nvSpPr>
-        <p:spPr>
-          <a:xfrm>
-            <a:off x="7013448" y="2596896"/>
-            <a:ext cx="1298448" cy="310896"/>
-          </a:xfrm>
-          <a:prstGeom prst="roundRect">
-            <a:avLst>
-              <a:gd name="adj" fmla="val 50000"/>
-            </a:avLst>
-          </a:prstGeom>
-          <a:solidFill>
-            <a:srgbClr val="FCECEC"/>
-          </a:solidFill>
-          <a:ln>
-            <a:noFill/>
-          </a:ln>
-          <a:effectLst/>
-        </p:spPr>
-        <p:style>
-          <a:lnRef idx="1">
-            <a:schemeClr val="accent1"/>
-          </a:lnRef>
-          <a:fillRef idx="3">
-            <a:schemeClr val="accent1"/>
-          </a:fillRef>
-          <a:effectRef idx="2">
-            <a:schemeClr val="accent1"/>
-          </a:effectRef>
-          <a:fontRef idx="minor">
-            <a:schemeClr val="lt1"/>
-          </a:fontRef>
-        </p:style>
-        <p:txBody>
-          <a:bodyPr rtlCol="0" anchor="ctr"/>
-          <a:lstStyle/>
-          <a:p>
-            <a:pPr algn="ctr"/>
-          </a:p>
-        </p:txBody>
-      </p:sp>
-      <p:sp>
-        <p:nvSpPr>
-          <p:cNvPr id="23" name="TextBox 22"/>
-          <p:cNvSpPr txBox="1"/>
-          <p:nvPr/>
-        </p:nvSpPr>
-        <p:spPr>
-          <a:xfrm>
-            <a:off x="7013448" y="2596896"/>
-            <a:ext cx="1298448" cy="310896"/>
-          </a:xfrm>
-          <a:prstGeom prst="rect">
-            <a:avLst/>
-          </a:prstGeom>
-          <a:noFill/>
-        </p:spPr>
-        <p:txBody>
-          <a:bodyPr wrap="none" anchor="ctr" lIns="0" rIns="0" tIns="0" bIns="0">
-            <a:spAutoFit/>
-          </a:bodyPr>
-          <a:lstStyle/>
-          <a:p>
-            <a:pPr algn="ctr">
-              <a:lnSpc>
-                <a:spcPct val="106000"/>
-              </a:lnSpc>
-              <a:spcBef>
-                <a:spcPts val="0"/>
-              </a:spcBef>
-              <a:spcAft>
-                <a:spcPts val="0"/>
-              </a:spcAft>
-            </a:pPr>
-            <a:r>
-              <a:rPr sz="850" b="1">
-                <a:solidFill>
-                  <a:srgbClr val="B80000"/>
-                </a:solidFill>
-                <a:latin typeface="Red Hat Display"/>
-              </a:rPr>
-              <a:t>MEDIA PASS</a:t>
-            </a:r>
-          </a:p>
-        </p:txBody>
-      </p:sp>
-      <p:pic>
-        <p:nvPicPr>
-          <p:cNvPr id="24" name="Picture 23" descr="eye_slate.png"/>
-          <p:cNvPicPr>
-            <a:picLocks noChangeAspect="1"/>
-          </p:cNvPicPr>
-          <p:nvPr/>
-        </p:nvPicPr>
-        <p:blipFill>
-          <a:blip r:embed="rId4"/>
-          <a:stretch>
-            <a:fillRect/>
-          </a:stretch>
-        </p:blipFill>
-        <p:spPr>
-          <a:xfrm>
-            <a:off x="8843619" y="3108960"/>
-            <a:ext cx="475488" cy="475488"/>
-          </a:xfrm>
-          <a:prstGeom prst="rect">
-            <a:avLst/>
-          </a:prstGeom>
-        </p:spPr>
-      </p:pic>
-      <p:sp>
-        <p:nvSpPr>
-          <p:cNvPr id="25" name="TextBox 24"/>
-          <p:cNvSpPr txBox="1"/>
-          <p:nvPr/>
-        </p:nvSpPr>
-        <p:spPr>
-          <a:xfrm>
-            <a:off x="7050024" y="3721608"/>
-            <a:ext cx="4062679" cy="1481328"/>
-          </a:xfrm>
-          <a:prstGeom prst="rect">
-            <a:avLst/>
-          </a:prstGeom>
-          <a:noFill/>
-        </p:spPr>
-        <p:txBody>
-          <a:bodyPr wrap="square" anchor="t" lIns="0" rIns="0" tIns="0" bIns="0">
-            <a:spAutoFit/>
-          </a:bodyPr>
-          <a:lstStyle/>
-          <a:p>
-            <a:pPr algn="l">
-              <a:lnSpc>
-                <a:spcPct val="120000"/>
-              </a:lnSpc>
-              <a:spcBef>
-                <a:spcPts val="0"/>
-              </a:spcBef>
-              <a:spcAft>
-                <a:spcPts val="0"/>
-              </a:spcAft>
-            </a:pPr>
-            <a:r>
-              <a:rPr sz="950" b="0">
-                <a:solidFill>
-                  <a:srgbClr val="8A9099"/>
-                </a:solidFill>
-                <a:latin typeface="Red Hat Text"/>
-              </a:rPr>
-              <a:t>A "before" cluster: pods scattered at random across nodes, a batch box and an API box crammed onto the same node (red "contention"), and a deploy arrow leaking a couple of dropped-request dots.</a:t>
             </a:r>
           </a:p>
         </p:txBody>
@@ -5465,7 +6361,7 @@
         <p:spPr>
           <a:xfrm>
             <a:off x="841248" y="2395728"/>
-            <a:ext cx="5715000" cy="530352"/>
+            <a:ext cx="4160520" cy="475488"/>
           </a:xfrm>
           <a:prstGeom prst="roundRect">
             <a:avLst>
@@ -5520,8 +6416,8 @@
         </p:blipFill>
         <p:spPr>
           <a:xfrm>
-            <a:off x="987552" y="2542032"/>
-            <a:ext cx="237744" cy="237744"/>
+            <a:off x="969264" y="2532888"/>
+            <a:ext cx="201168" cy="201168"/>
           </a:xfrm>
           <a:prstGeom prst="rect">
             <a:avLst/>
@@ -5536,8 +6432,8 @@
         </p:nvSpPr>
         <p:spPr>
           <a:xfrm>
-            <a:off x="1353312" y="2395728"/>
-            <a:ext cx="5029200" cy="530352"/>
+            <a:off x="1280160" y="2395728"/>
+            <a:ext cx="3593591" cy="475488"/>
           </a:xfrm>
           <a:prstGeom prst="rect">
             <a:avLst/>
@@ -5562,7 +6458,7 @@
               </a:spcAft>
             </a:pPr>
             <a:r>
-              <a:rPr sz="1200" b="0">
+              <a:rPr sz="1050" b="0">
                 <a:solidFill>
                   <a:srgbClr val="1A1A1A"/>
                 </a:solidFill>
@@ -5581,8 +6477,8 @@
         </p:nvSpPr>
         <p:spPr>
           <a:xfrm>
-            <a:off x="841248" y="2999232"/>
-            <a:ext cx="5715000" cy="530352"/>
+            <a:off x="841248" y="2944368"/>
+            <a:ext cx="4160520" cy="475488"/>
           </a:xfrm>
           <a:prstGeom prst="roundRect">
             <a:avLst>
@@ -5637,8 +6533,8 @@
         </p:blipFill>
         <p:spPr>
           <a:xfrm>
-            <a:off x="987552" y="3145536"/>
-            <a:ext cx="237744" cy="237744"/>
+            <a:off x="969264" y="3081528"/>
+            <a:ext cx="201168" cy="201168"/>
           </a:xfrm>
           <a:prstGeom prst="rect">
             <a:avLst/>
@@ -5653,8 +6549,8 @@
         </p:nvSpPr>
         <p:spPr>
           <a:xfrm>
-            <a:off x="1353312" y="2999232"/>
-            <a:ext cx="5029200" cy="530352"/>
+            <a:off x="1280160" y="2944368"/>
+            <a:ext cx="3593591" cy="475488"/>
           </a:xfrm>
           <a:prstGeom prst="rect">
             <a:avLst/>
@@ -5679,7 +6575,7 @@
               </a:spcAft>
             </a:pPr>
             <a:r>
-              <a:rPr sz="1200" b="0">
+              <a:rPr sz="1050" b="0">
                 <a:solidFill>
                   <a:srgbClr val="1A1A1A"/>
                 </a:solidFill>
@@ -5698,8 +6594,8 @@
         </p:nvSpPr>
         <p:spPr>
           <a:xfrm>
-            <a:off x="841248" y="3602736"/>
-            <a:ext cx="5715000" cy="530352"/>
+            <a:off x="841248" y="3493008"/>
+            <a:ext cx="4160520" cy="475488"/>
           </a:xfrm>
           <a:prstGeom prst="roundRect">
             <a:avLst>
@@ -5754,8 +6650,8 @@
         </p:blipFill>
         <p:spPr>
           <a:xfrm>
-            <a:off x="987552" y="3749040"/>
-            <a:ext cx="237744" cy="237744"/>
+            <a:off x="969264" y="3630168"/>
+            <a:ext cx="201168" cy="201168"/>
           </a:xfrm>
           <a:prstGeom prst="rect">
             <a:avLst/>
@@ -5770,8 +6666,8 @@
         </p:nvSpPr>
         <p:spPr>
           <a:xfrm>
-            <a:off x="1353312" y="3602736"/>
-            <a:ext cx="5029200" cy="530352"/>
+            <a:off x="1280160" y="3493008"/>
+            <a:ext cx="3593591" cy="475488"/>
           </a:xfrm>
           <a:prstGeom prst="rect">
             <a:avLst/>
@@ -5796,7 +6692,7 @@
               </a:spcAft>
             </a:pPr>
             <a:r>
-              <a:rPr sz="1200" b="0">
+              <a:rPr sz="1050" b="0">
                 <a:solidFill>
                   <a:srgbClr val="1A1A1A"/>
                 </a:solidFill>
@@ -5815,8 +6711,8 @@
         </p:nvSpPr>
         <p:spPr>
           <a:xfrm>
-            <a:off x="841248" y="4206240"/>
-            <a:ext cx="5715000" cy="530352"/>
+            <a:off x="841248" y="4041648"/>
+            <a:ext cx="4160520" cy="475488"/>
           </a:xfrm>
           <a:prstGeom prst="roundRect">
             <a:avLst>
@@ -5871,8 +6767,8 @@
         </p:blipFill>
         <p:spPr>
           <a:xfrm>
-            <a:off x="987552" y="4352544"/>
-            <a:ext cx="237744" cy="237744"/>
+            <a:off x="969264" y="4178807"/>
+            <a:ext cx="201168" cy="201168"/>
           </a:xfrm>
           <a:prstGeom prst="rect">
             <a:avLst/>
@@ -5887,8 +6783,8 @@
         </p:nvSpPr>
         <p:spPr>
           <a:xfrm>
-            <a:off x="1353312" y="4206240"/>
-            <a:ext cx="5029200" cy="530352"/>
+            <a:off x="1280160" y="4041648"/>
+            <a:ext cx="3593591" cy="475488"/>
           </a:xfrm>
           <a:prstGeom prst="rect">
             <a:avLst/>
@@ -5913,7 +6809,7 @@
               </a:spcAft>
             </a:pPr>
             <a:r>
-              <a:rPr sz="1200" b="0">
+              <a:rPr sz="1050" b="0">
                 <a:solidFill>
                   <a:srgbClr val="1A1A1A"/>
                 </a:solidFill>
@@ -5932,8 +6828,8 @@
         </p:nvSpPr>
         <p:spPr>
           <a:xfrm>
-            <a:off x="841248" y="4809744"/>
-            <a:ext cx="5715000" cy="530352"/>
+            <a:off x="841248" y="4590288"/>
+            <a:ext cx="4160520" cy="475488"/>
           </a:xfrm>
           <a:prstGeom prst="roundRect">
             <a:avLst>
@@ -5988,8 +6884,8 @@
         </p:blipFill>
         <p:spPr>
           <a:xfrm>
-            <a:off x="987552" y="4956048"/>
-            <a:ext cx="237744" cy="237744"/>
+            <a:off x="969264" y="4727447"/>
+            <a:ext cx="201168" cy="201168"/>
           </a:xfrm>
           <a:prstGeom prst="rect">
             <a:avLst/>
@@ -6004,8 +6900,8 @@
         </p:nvSpPr>
         <p:spPr>
           <a:xfrm>
-            <a:off x="1353312" y="4809744"/>
-            <a:ext cx="5029200" cy="530352"/>
+            <a:off x="1280160" y="4590288"/>
+            <a:ext cx="3593591" cy="475488"/>
           </a:xfrm>
           <a:prstGeom prst="rect">
             <a:avLst/>
@@ -6030,7 +6926,7 @@
               </a:spcAft>
             </a:pPr>
             <a:r>
-              <a:rPr sz="1200" b="0">
+              <a:rPr sz="1050" b="0">
                 <a:solidFill>
                   <a:srgbClr val="1A1A1A"/>
                 </a:solidFill>
@@ -6049,8 +6945,8 @@
         </p:nvSpPr>
         <p:spPr>
           <a:xfrm>
-            <a:off x="6812280" y="2395728"/>
-            <a:ext cx="4538167" cy="2944368"/>
+            <a:off x="5385816" y="2972286"/>
+            <a:ext cx="5964631" cy="1590083"/>
           </a:xfrm>
           <a:prstGeom prst="roundRect">
             <a:avLst>
@@ -6089,100 +6985,9 @@
           </a:p>
         </p:txBody>
       </p:sp>
-      <p:sp>
-        <p:nvSpPr>
-          <p:cNvPr id="22" name="Rounded Rectangle 21"/>
-          <p:cNvSpPr/>
-          <p:nvPr/>
-        </p:nvSpPr>
-        <p:spPr>
-          <a:xfrm>
-            <a:off x="7013448" y="2596896"/>
-            <a:ext cx="1298448" cy="310896"/>
-          </a:xfrm>
-          <a:prstGeom prst="roundRect">
-            <a:avLst>
-              <a:gd name="adj" fmla="val 50000"/>
-            </a:avLst>
-          </a:prstGeom>
-          <a:solidFill>
-            <a:srgbClr val="FCECEC"/>
-          </a:solidFill>
-          <a:ln>
-            <a:noFill/>
-          </a:ln>
-          <a:effectLst/>
-        </p:spPr>
-        <p:style>
-          <a:lnRef idx="1">
-            <a:schemeClr val="accent1"/>
-          </a:lnRef>
-          <a:fillRef idx="3">
-            <a:schemeClr val="accent1"/>
-          </a:fillRef>
-          <a:effectRef idx="2">
-            <a:schemeClr val="accent1"/>
-          </a:effectRef>
-          <a:fontRef idx="minor">
-            <a:schemeClr val="lt1"/>
-          </a:fontRef>
-        </p:style>
-        <p:txBody>
-          <a:bodyPr rtlCol="0" anchor="ctr"/>
-          <a:lstStyle/>
-          <a:p>
-            <a:pPr algn="ctr"/>
-          </a:p>
-        </p:txBody>
-      </p:sp>
-      <p:sp>
-        <p:nvSpPr>
-          <p:cNvPr id="23" name="TextBox 22"/>
-          <p:cNvSpPr txBox="1"/>
-          <p:nvPr/>
-        </p:nvSpPr>
-        <p:spPr>
-          <a:xfrm>
-            <a:off x="7013448" y="2596896"/>
-            <a:ext cx="1298448" cy="310896"/>
-          </a:xfrm>
-          <a:prstGeom prst="rect">
-            <a:avLst/>
-          </a:prstGeom>
-          <a:noFill/>
-        </p:spPr>
-        <p:txBody>
-          <a:bodyPr wrap="none" anchor="ctr" lIns="0" rIns="0" tIns="0" bIns="0">
-            <a:spAutoFit/>
-          </a:bodyPr>
-          <a:lstStyle/>
-          <a:p>
-            <a:pPr algn="ctr">
-              <a:lnSpc>
-                <a:spcPct val="106000"/>
-              </a:lnSpc>
-              <a:spcBef>
-                <a:spcPts val="0"/>
-              </a:spcBef>
-              <a:spcAft>
-                <a:spcPts val="0"/>
-              </a:spcAft>
-            </a:pPr>
-            <a:r>
-              <a:rPr sz="850" b="1">
-                <a:solidFill>
-                  <a:srgbClr val="B80000"/>
-                </a:solidFill>
-                <a:latin typeface="Red Hat Display"/>
-              </a:rPr>
-              <a:t>MEDIA PASS</a:t>
-            </a:r>
-          </a:p>
-        </p:txBody>
-      </p:sp>
       <p:pic>
         <p:nvPicPr>
-          <p:cNvPr id="24" name="Picture 23" descr="eye_slate.png"/>
+          <p:cNvPr id="22" name="Picture 21" descr="01-scheduler-pipeline.png"/>
           <p:cNvPicPr>
             <a:picLocks noChangeAspect="1"/>
           </p:cNvPicPr>
@@ -6196,62 +7001,17 @@
         </p:blipFill>
         <p:spPr>
           <a:xfrm>
-            <a:off x="8843619" y="3108960"/>
-            <a:ext cx="475488" cy="475488"/>
+            <a:off x="5532120" y="3118590"/>
+            <a:ext cx="5672023" cy="1297475"/>
           </a:xfrm>
           <a:prstGeom prst="rect">
             <a:avLst/>
           </a:prstGeom>
         </p:spPr>
       </p:pic>
-      <p:sp>
-        <p:nvSpPr>
-          <p:cNvPr id="25" name="TextBox 24"/>
-          <p:cNvSpPr txBox="1"/>
-          <p:nvPr/>
-        </p:nvSpPr>
-        <p:spPr>
-          <a:xfrm>
-            <a:off x="7050024" y="3721608"/>
-            <a:ext cx="4062679" cy="1481328"/>
-          </a:xfrm>
-          <a:prstGeom prst="rect">
-            <a:avLst/>
-          </a:prstGeom>
-          <a:noFill/>
-        </p:spPr>
-        <p:txBody>
-          <a:bodyPr wrap="square" anchor="t" lIns="0" rIns="0" tIns="0" bIns="0">
-            <a:spAutoFit/>
-          </a:bodyPr>
-          <a:lstStyle/>
-          <a:p>
-            <a:pPr algn="l">
-              <a:lnSpc>
-                <a:spcPct val="120000"/>
-              </a:lnSpc>
-              <a:spcBef>
-                <a:spcPts val="0"/>
-              </a:spcBef>
-              <a:spcAft>
-                <a:spcPts val="0"/>
-              </a:spcAft>
-            </a:pPr>
-            <a:r>
-              <a:rPr sz="950" b="0">
-                <a:solidFill>
-                  <a:srgbClr val="8A9099"/>
-                </a:solidFill>
-                <a:latin typeface="Red Hat Text"/>
-              </a:rPr>
-              <a:t>Reuse concept diagram deployment-targets-scheduling-...-01-scheduler-pipeline.svg — Pending pod → FILTER → SCORE → BIND, with a red branch "0 survive → Pending + FailedScheduling."</a:t>
-            </a:r>
-          </a:p>
-        </p:txBody>
-      </p:sp>
       <p:cxnSp>
         <p:nvCxnSpPr>
-          <p:cNvPr id="26" name="Connector 25"/>
+          <p:cNvPr id="23" name="Connector 22"/>
           <p:cNvCxnSpPr/>
           <p:nvPr/>
         </p:nvCxnSpPr>
@@ -6287,7 +7047,7 @@
       </p:cxnSp>
       <p:sp>
         <p:nvSpPr>
-          <p:cNvPr id="27" name="TextBox 26"/>
+          <p:cNvPr id="24" name="TextBox 23"/>
           <p:cNvSpPr txBox="1"/>
           <p:nvPr/>
         </p:nvSpPr>
@@ -6332,7 +7092,7 @@
       </p:sp>
       <p:sp>
         <p:nvSpPr>
-          <p:cNvPr id="28" name="TextBox 27"/>
+          <p:cNvPr id="25" name="TextBox 24"/>
           <p:cNvSpPr txBox="1"/>
           <p:nvPr/>
         </p:nvSpPr>
@@ -6552,7 +7312,7 @@
         <p:spPr>
           <a:xfrm>
             <a:off x="841248" y="2395728"/>
-            <a:ext cx="5715000" cy="530352"/>
+            <a:ext cx="4160520" cy="475488"/>
           </a:xfrm>
           <a:prstGeom prst="roundRect">
             <a:avLst>
@@ -6607,8 +7367,8 @@
         </p:blipFill>
         <p:spPr>
           <a:xfrm>
-            <a:off x="987552" y="2542032"/>
-            <a:ext cx="237744" cy="237744"/>
+            <a:off x="969264" y="2532888"/>
+            <a:ext cx="201168" cy="201168"/>
           </a:xfrm>
           <a:prstGeom prst="rect">
             <a:avLst/>
@@ -6623,8 +7383,8 @@
         </p:nvSpPr>
         <p:spPr>
           <a:xfrm>
-            <a:off x="1353312" y="2395728"/>
-            <a:ext cx="5029200" cy="530352"/>
+            <a:off x="1280160" y="2395728"/>
+            <a:ext cx="3593591" cy="475488"/>
           </a:xfrm>
           <a:prstGeom prst="rect">
             <a:avLst/>
@@ -6649,7 +7409,7 @@
               </a:spcAft>
             </a:pPr>
             <a:r>
-              <a:rPr sz="1200" b="0">
+              <a:rPr sz="1050" b="0">
                 <a:solidFill>
                   <a:srgbClr val="1A1A1A"/>
                 </a:solidFill>
@@ -6668,8 +7428,8 @@
         </p:nvSpPr>
         <p:spPr>
           <a:xfrm>
-            <a:off x="841248" y="2999232"/>
-            <a:ext cx="5715000" cy="530352"/>
+            <a:off x="841248" y="2944368"/>
+            <a:ext cx="4160520" cy="475488"/>
           </a:xfrm>
           <a:prstGeom prst="roundRect">
             <a:avLst>
@@ -6724,8 +7484,8 @@
         </p:blipFill>
         <p:spPr>
           <a:xfrm>
-            <a:off x="987552" y="3145536"/>
-            <a:ext cx="237744" cy="237744"/>
+            <a:off x="969264" y="3081528"/>
+            <a:ext cx="201168" cy="201168"/>
           </a:xfrm>
           <a:prstGeom prst="rect">
             <a:avLst/>
@@ -6740,8 +7500,8 @@
         </p:nvSpPr>
         <p:spPr>
           <a:xfrm>
-            <a:off x="1353312" y="2999232"/>
-            <a:ext cx="5029200" cy="530352"/>
+            <a:off x="1280160" y="2944368"/>
+            <a:ext cx="3593591" cy="475488"/>
           </a:xfrm>
           <a:prstGeom prst="rect">
             <a:avLst/>
@@ -6766,7 +7526,7 @@
               </a:spcAft>
             </a:pPr>
             <a:r>
-              <a:rPr sz="1200" b="0">
+              <a:rPr sz="1050" b="0">
                 <a:solidFill>
                   <a:srgbClr val="1A1A1A"/>
                 </a:solidFill>
@@ -6785,8 +7545,8 @@
         </p:nvSpPr>
         <p:spPr>
           <a:xfrm>
-            <a:off x="841248" y="3602736"/>
-            <a:ext cx="5715000" cy="530352"/>
+            <a:off x="841248" y="3493008"/>
+            <a:ext cx="4160520" cy="475488"/>
           </a:xfrm>
           <a:prstGeom prst="roundRect">
             <a:avLst>
@@ -6841,8 +7601,8 @@
         </p:blipFill>
         <p:spPr>
           <a:xfrm>
-            <a:off x="987552" y="3749040"/>
-            <a:ext cx="237744" cy="237744"/>
+            <a:off x="969264" y="3630168"/>
+            <a:ext cx="201168" cy="201168"/>
           </a:xfrm>
           <a:prstGeom prst="rect">
             <a:avLst/>
@@ -6857,8 +7617,8 @@
         </p:nvSpPr>
         <p:spPr>
           <a:xfrm>
-            <a:off x="1353312" y="3602736"/>
-            <a:ext cx="5029200" cy="530352"/>
+            <a:off x="1280160" y="3493008"/>
+            <a:ext cx="3593591" cy="475488"/>
           </a:xfrm>
           <a:prstGeom prst="rect">
             <a:avLst/>
@@ -6883,7 +7643,7 @@
               </a:spcAft>
             </a:pPr>
             <a:r>
-              <a:rPr sz="1200" b="0">
+              <a:rPr sz="1050" b="0">
                 <a:solidFill>
                   <a:srgbClr val="1A1A1A"/>
                 </a:solidFill>
@@ -6902,8 +7662,8 @@
         </p:nvSpPr>
         <p:spPr>
           <a:xfrm>
-            <a:off x="841248" y="4206240"/>
-            <a:ext cx="5715000" cy="530352"/>
+            <a:off x="841248" y="4041648"/>
+            <a:ext cx="4160520" cy="475488"/>
           </a:xfrm>
           <a:prstGeom prst="roundRect">
             <a:avLst>
@@ -6958,8 +7718,8 @@
         </p:blipFill>
         <p:spPr>
           <a:xfrm>
-            <a:off x="987552" y="4352544"/>
-            <a:ext cx="237744" cy="237744"/>
+            <a:off x="969264" y="4178807"/>
+            <a:ext cx="201168" cy="201168"/>
           </a:xfrm>
           <a:prstGeom prst="rect">
             <a:avLst/>
@@ -6974,8 +7734,8 @@
         </p:nvSpPr>
         <p:spPr>
           <a:xfrm>
-            <a:off x="1353312" y="4206240"/>
-            <a:ext cx="5029200" cy="530352"/>
+            <a:off x="1280160" y="4041648"/>
+            <a:ext cx="3593591" cy="475488"/>
           </a:xfrm>
           <a:prstGeom prst="rect">
             <a:avLst/>
@@ -7000,7 +7760,7 @@
               </a:spcAft>
             </a:pPr>
             <a:r>
-              <a:rPr sz="1200" b="0">
+              <a:rPr sz="1050" b="0">
                 <a:solidFill>
                   <a:srgbClr val="1A1A1A"/>
                 </a:solidFill>
@@ -7019,8 +7779,8 @@
         </p:nvSpPr>
         <p:spPr>
           <a:xfrm>
-            <a:off x="841248" y="4809744"/>
-            <a:ext cx="5715000" cy="530352"/>
+            <a:off x="841248" y="4590288"/>
+            <a:ext cx="4160520" cy="475488"/>
           </a:xfrm>
           <a:prstGeom prst="roundRect">
             <a:avLst>
@@ -7075,8 +7835,8 @@
         </p:blipFill>
         <p:spPr>
           <a:xfrm>
-            <a:off x="987552" y="4956048"/>
-            <a:ext cx="237744" cy="237744"/>
+            <a:off x="969264" y="4727447"/>
+            <a:ext cx="201168" cy="201168"/>
           </a:xfrm>
           <a:prstGeom prst="rect">
             <a:avLst/>
@@ -7091,8 +7851,8 @@
         </p:nvSpPr>
         <p:spPr>
           <a:xfrm>
-            <a:off x="1353312" y="4809744"/>
-            <a:ext cx="5029200" cy="530352"/>
+            <a:off x="1280160" y="4590288"/>
+            <a:ext cx="3593591" cy="475488"/>
           </a:xfrm>
           <a:prstGeom prst="rect">
             <a:avLst/>
@@ -7117,7 +7877,7 @@
               </a:spcAft>
             </a:pPr>
             <a:r>
-              <a:rPr sz="1200" b="0">
+              <a:rPr sz="1050" b="0">
                 <a:solidFill>
                   <a:srgbClr val="1A1A1A"/>
                 </a:solidFill>
@@ -7136,8 +7896,8 @@
         </p:nvSpPr>
         <p:spPr>
           <a:xfrm>
-            <a:off x="6812280" y="2395728"/>
-            <a:ext cx="4538167" cy="2944368"/>
+            <a:off x="5385816" y="3369327"/>
+            <a:ext cx="5964631" cy="796000"/>
           </a:xfrm>
           <a:prstGeom prst="roundRect">
             <a:avLst>
@@ -7176,100 +7936,9 @@
           </a:p>
         </p:txBody>
       </p:sp>
-      <p:sp>
-        <p:nvSpPr>
-          <p:cNvPr id="22" name="Rounded Rectangle 21"/>
-          <p:cNvSpPr/>
-          <p:nvPr/>
-        </p:nvSpPr>
-        <p:spPr>
-          <a:xfrm>
-            <a:off x="7013448" y="2596896"/>
-            <a:ext cx="1298448" cy="310896"/>
-          </a:xfrm>
-          <a:prstGeom prst="roundRect">
-            <a:avLst>
-              <a:gd name="adj" fmla="val 50000"/>
-            </a:avLst>
-          </a:prstGeom>
-          <a:solidFill>
-            <a:srgbClr val="FCECEC"/>
-          </a:solidFill>
-          <a:ln>
-            <a:noFill/>
-          </a:ln>
-          <a:effectLst/>
-        </p:spPr>
-        <p:style>
-          <a:lnRef idx="1">
-            <a:schemeClr val="accent1"/>
-          </a:lnRef>
-          <a:fillRef idx="3">
-            <a:schemeClr val="accent1"/>
-          </a:fillRef>
-          <a:effectRef idx="2">
-            <a:schemeClr val="accent1"/>
-          </a:effectRef>
-          <a:fontRef idx="minor">
-            <a:schemeClr val="lt1"/>
-          </a:fontRef>
-        </p:style>
-        <p:txBody>
-          <a:bodyPr rtlCol="0" anchor="ctr"/>
-          <a:lstStyle/>
-          <a:p>
-            <a:pPr algn="ctr"/>
-          </a:p>
-        </p:txBody>
-      </p:sp>
-      <p:sp>
-        <p:nvSpPr>
-          <p:cNvPr id="23" name="TextBox 22"/>
-          <p:cNvSpPr txBox="1"/>
-          <p:nvPr/>
-        </p:nvSpPr>
-        <p:spPr>
-          <a:xfrm>
-            <a:off x="7013448" y="2596896"/>
-            <a:ext cx="1298448" cy="310896"/>
-          </a:xfrm>
-          <a:prstGeom prst="rect">
-            <a:avLst/>
-          </a:prstGeom>
-          <a:noFill/>
-        </p:spPr>
-        <p:txBody>
-          <a:bodyPr wrap="none" anchor="ctr" lIns="0" rIns="0" tIns="0" bIns="0">
-            <a:spAutoFit/>
-          </a:bodyPr>
-          <a:lstStyle/>
-          <a:p>
-            <a:pPr algn="ctr">
-              <a:lnSpc>
-                <a:spcPct val="106000"/>
-              </a:lnSpc>
-              <a:spcBef>
-                <a:spcPts val="0"/>
-              </a:spcBef>
-              <a:spcAft>
-                <a:spcPts val="0"/>
-              </a:spcAft>
-            </a:pPr>
-            <a:r>
-              <a:rPr sz="850" b="1">
-                <a:solidFill>
-                  <a:srgbClr val="B80000"/>
-                </a:solidFill>
-                <a:latin typeface="Red Hat Display"/>
-              </a:rPr>
-              <a:t>MEDIA PASS</a:t>
-            </a:r>
-          </a:p>
-        </p:txBody>
-      </p:sp>
       <p:pic>
         <p:nvPicPr>
-          <p:cNvPr id="24" name="Picture 23" descr="eye_slate.png"/>
+          <p:cNvPr id="22" name="Picture 21" descr="02-seek-vs-repel.png"/>
           <p:cNvPicPr>
             <a:picLocks noChangeAspect="1"/>
           </p:cNvPicPr>
@@ -7283,62 +7952,17 @@
         </p:blipFill>
         <p:spPr>
           <a:xfrm>
-            <a:off x="8843619" y="3108960"/>
-            <a:ext cx="475488" cy="475488"/>
+            <a:off x="5532120" y="3515631"/>
+            <a:ext cx="5672023" cy="503392"/>
           </a:xfrm>
           <a:prstGeom prst="rect">
             <a:avLst/>
           </a:prstGeom>
         </p:spPr>
       </p:pic>
-      <p:sp>
-        <p:nvSpPr>
-          <p:cNvPr id="25" name="TextBox 24"/>
-          <p:cNvSpPr txBox="1"/>
-          <p:nvPr/>
-        </p:nvSpPr>
-        <p:spPr>
-          <a:xfrm>
-            <a:off x="7050024" y="3721608"/>
-            <a:ext cx="4062679" cy="1481328"/>
-          </a:xfrm>
-          <a:prstGeom prst="rect">
-            <a:avLst/>
-          </a:prstGeom>
-          <a:noFill/>
-        </p:spPr>
-        <p:txBody>
-          <a:bodyPr wrap="square" anchor="t" lIns="0" rIns="0" tIns="0" bIns="0">
-            <a:spAutoFit/>
-          </a:bodyPr>
-          <a:lstStyle/>
-          <a:p>
-            <a:pPr algn="l">
-              <a:lnSpc>
-                <a:spcPct val="120000"/>
-              </a:lnSpc>
-              <a:spcBef>
-                <a:spcPts val="0"/>
-              </a:spcBef>
-              <a:spcAft>
-                <a:spcPts val="0"/>
-              </a:spcAft>
-            </a:pPr>
-            <a:r>
-              <a:rPr sz="950" b="0">
-                <a:solidFill>
-                  <a:srgbClr val="8A9099"/>
-                </a:solidFill>
-                <a:latin typeface="Red Hat Text"/>
-              </a:rPr>
-              <a:t>Reuse concept diagram deployment-targets-scheduling-...-02-seek-vs-repel.svg — left "affinity pulls the pod toward a labelled node"; right "a taint pushes pods away; a toleration is a permitted-but-not-attracted arrow."</a:t>
-            </a:r>
-          </a:p>
-        </p:txBody>
-      </p:sp>
       <p:cxnSp>
         <p:nvCxnSpPr>
-          <p:cNvPr id="26" name="Connector 25"/>
+          <p:cNvPr id="23" name="Connector 22"/>
           <p:cNvCxnSpPr/>
           <p:nvPr/>
         </p:nvCxnSpPr>
@@ -7374,7 +7998,7 @@
       </p:cxnSp>
       <p:sp>
         <p:nvSpPr>
-          <p:cNvPr id="27" name="TextBox 26"/>
+          <p:cNvPr id="24" name="TextBox 23"/>
           <p:cNvSpPr txBox="1"/>
           <p:nvPr/>
         </p:nvSpPr>
@@ -7419,7 +8043,7 @@
       </p:sp>
       <p:sp>
         <p:nvSpPr>
-          <p:cNvPr id="28" name="TextBox 27"/>
+          <p:cNvPr id="25" name="TextBox 24"/>
           <p:cNvSpPr txBox="1"/>
           <p:nvPr/>
         </p:nvSpPr>
@@ -7639,11 +8263,11 @@
         <p:spPr>
           <a:xfrm>
             <a:off x="841248" y="2395728"/>
-            <a:ext cx="5715000" cy="530352"/>
+            <a:ext cx="5138928" cy="786384"/>
           </a:xfrm>
           <a:prstGeom prst="roundRect">
             <a:avLst>
-              <a:gd name="adj" fmla="val 6000"/>
+              <a:gd name="adj" fmla="val 7000"/>
             </a:avLst>
           </a:prstGeom>
           <a:solidFill>
@@ -7678,9 +8302,55 @@
           </a:p>
         </p:txBody>
       </p:sp>
+      <p:sp>
+        <p:nvSpPr>
+          <p:cNvPr id="7" name="Rounded Rectangle 6"/>
+          <p:cNvSpPr/>
+          <p:nvPr/>
+        </p:nvSpPr>
+        <p:spPr>
+          <a:xfrm>
+            <a:off x="987552" y="2532888"/>
+            <a:ext cx="512064" cy="512064"/>
+          </a:xfrm>
+          <a:prstGeom prst="roundRect">
+            <a:avLst>
+              <a:gd name="adj" fmla="val 26000"/>
+            </a:avLst>
+          </a:prstGeom>
+          <a:solidFill>
+            <a:srgbClr val="EE0000"/>
+          </a:solidFill>
+          <a:ln>
+            <a:noFill/>
+          </a:ln>
+          <a:effectLst/>
+        </p:spPr>
+        <p:style>
+          <a:lnRef idx="1">
+            <a:schemeClr val="accent1"/>
+          </a:lnRef>
+          <a:fillRef idx="3">
+            <a:schemeClr val="accent1"/>
+          </a:fillRef>
+          <a:effectRef idx="2">
+            <a:schemeClr val="accent1"/>
+          </a:effectRef>
+          <a:fontRef idx="minor">
+            <a:schemeClr val="lt1"/>
+          </a:fontRef>
+        </p:style>
+        <p:txBody>
+          <a:bodyPr rtlCol="0" anchor="ctr"/>
+          <a:lstStyle/>
+          <a:p>
+            <a:pPr algn="ctr"/>
+          </a:p>
+        </p:txBody>
+      </p:sp>
       <p:pic>
         <p:nvPicPr>
-          <p:cNvPr id="7" name="Picture 6" descr="check_steel.png"/>
+          <p:cNvPr id="8" name="Picture 7" descr="check_white.png"/>
           <p:cNvPicPr>
             <a:picLocks noChangeAspect="1"/>
           </p:cNvPicPr>
@@ -7694,8 +8364,8 @@
         </p:blipFill>
         <p:spPr>
           <a:xfrm>
-            <a:off x="987552" y="2542032"/>
-            <a:ext cx="237744" cy="237744"/>
+            <a:off x="1110447" y="2655783"/>
+            <a:ext cx="266273" cy="266273"/>
           </a:xfrm>
           <a:prstGeom prst="rect">
             <a:avLst/>
@@ -7704,14 +8374,14 @@
       </p:pic>
       <p:sp>
         <p:nvSpPr>
-          <p:cNvPr id="8" name="TextBox 7"/>
+          <p:cNvPr id="9" name="TextBox 8"/>
           <p:cNvSpPr txBox="1"/>
           <p:nvPr/>
         </p:nvSpPr>
         <p:spPr>
           <a:xfrm>
-            <a:off x="1353312" y="2395728"/>
-            <a:ext cx="5029200" cy="530352"/>
+            <a:off x="1627632" y="2395728"/>
+            <a:ext cx="4206240" cy="786384"/>
           </a:xfrm>
           <a:prstGeom prst="rect">
             <a:avLst/>
@@ -7736,7 +8406,7 @@
               </a:spcAft>
             </a:pPr>
             <a:r>
-              <a:rPr sz="1200" b="0">
+              <a:rPr sz="1150" b="0">
                 <a:solidFill>
                   <a:srgbClr val="1A1A1A"/>
                 </a:solidFill>
@@ -7749,18 +8419,18 @@
       </p:sp>
       <p:sp>
         <p:nvSpPr>
-          <p:cNvPr id="9" name="Rounded Rectangle 8"/>
+          <p:cNvPr id="10" name="Rounded Rectangle 9"/>
           <p:cNvSpPr/>
           <p:nvPr/>
         </p:nvSpPr>
         <p:spPr>
           <a:xfrm>
-            <a:off x="841248" y="2999232"/>
-            <a:ext cx="5715000" cy="530352"/>
+            <a:off x="6254496" y="2395728"/>
+            <a:ext cx="5138928" cy="786384"/>
           </a:xfrm>
           <a:prstGeom prst="roundRect">
             <a:avLst>
-              <a:gd name="adj" fmla="val 6000"/>
+              <a:gd name="adj" fmla="val 7000"/>
             </a:avLst>
           </a:prstGeom>
           <a:solidFill>
@@ -7795,9 +8465,55 @@
           </a:p>
         </p:txBody>
       </p:sp>
+      <p:sp>
+        <p:nvSpPr>
+          <p:cNvPr id="11" name="Rounded Rectangle 10"/>
+          <p:cNvSpPr/>
+          <p:nvPr/>
+        </p:nvSpPr>
+        <p:spPr>
+          <a:xfrm>
+            <a:off x="6400800" y="2532888"/>
+            <a:ext cx="512064" cy="512064"/>
+          </a:xfrm>
+          <a:prstGeom prst="roundRect">
+            <a:avLst>
+              <a:gd name="adj" fmla="val 26000"/>
+            </a:avLst>
+          </a:prstGeom>
+          <a:solidFill>
+            <a:srgbClr val="EE0000"/>
+          </a:solidFill>
+          <a:ln>
+            <a:noFill/>
+          </a:ln>
+          <a:effectLst/>
+        </p:spPr>
+        <p:style>
+          <a:lnRef idx="1">
+            <a:schemeClr val="accent1"/>
+          </a:lnRef>
+          <a:fillRef idx="3">
+            <a:schemeClr val="accent1"/>
+          </a:fillRef>
+          <a:effectRef idx="2">
+            <a:schemeClr val="accent1"/>
+          </a:effectRef>
+          <a:fontRef idx="minor">
+            <a:schemeClr val="lt1"/>
+          </a:fontRef>
+        </p:style>
+        <p:txBody>
+          <a:bodyPr rtlCol="0" anchor="ctr"/>
+          <a:lstStyle/>
+          <a:p>
+            <a:pPr algn="ctr"/>
+          </a:p>
+        </p:txBody>
+      </p:sp>
       <p:pic>
         <p:nvPicPr>
-          <p:cNvPr id="10" name="Picture 9" descr="check_steel.png"/>
+          <p:cNvPr id="12" name="Picture 11" descr="check_white.png"/>
           <p:cNvPicPr>
             <a:picLocks noChangeAspect="1"/>
           </p:cNvPicPr>
@@ -7811,8 +8527,8 @@
         </p:blipFill>
         <p:spPr>
           <a:xfrm>
-            <a:off x="987552" y="3145536"/>
-            <a:ext cx="237744" cy="237744"/>
+            <a:off x="6523695" y="2655783"/>
+            <a:ext cx="266273" cy="266273"/>
           </a:xfrm>
           <a:prstGeom prst="rect">
             <a:avLst/>
@@ -7821,14 +8537,14 @@
       </p:pic>
       <p:sp>
         <p:nvSpPr>
-          <p:cNvPr id="11" name="TextBox 10"/>
+          <p:cNvPr id="13" name="TextBox 12"/>
           <p:cNvSpPr txBox="1"/>
           <p:nvPr/>
         </p:nvSpPr>
         <p:spPr>
           <a:xfrm>
-            <a:off x="1353312" y="2999232"/>
-            <a:ext cx="5029200" cy="530352"/>
+            <a:off x="7040880" y="2395728"/>
+            <a:ext cx="4206240" cy="786384"/>
           </a:xfrm>
           <a:prstGeom prst="rect">
             <a:avLst/>
@@ -7853,7 +8569,7 @@
               </a:spcAft>
             </a:pPr>
             <a:r>
-              <a:rPr sz="1200" b="0">
+              <a:rPr sz="1150" b="0">
                 <a:solidFill>
                   <a:srgbClr val="1A1A1A"/>
                 </a:solidFill>
@@ -7866,18 +8582,18 @@
       </p:sp>
       <p:sp>
         <p:nvSpPr>
-          <p:cNvPr id="12" name="Rounded Rectangle 11"/>
+          <p:cNvPr id="14" name="Rounded Rectangle 13"/>
           <p:cNvSpPr/>
           <p:nvPr/>
         </p:nvSpPr>
         <p:spPr>
           <a:xfrm>
-            <a:off x="841248" y="3602736"/>
-            <a:ext cx="5715000" cy="530352"/>
+            <a:off x="841248" y="3328416"/>
+            <a:ext cx="5138928" cy="786384"/>
           </a:xfrm>
           <a:prstGeom prst="roundRect">
             <a:avLst>
-              <a:gd name="adj" fmla="val 6000"/>
+              <a:gd name="adj" fmla="val 7000"/>
             </a:avLst>
           </a:prstGeom>
           <a:solidFill>
@@ -7912,9 +8628,55 @@
           </a:p>
         </p:txBody>
       </p:sp>
+      <p:sp>
+        <p:nvSpPr>
+          <p:cNvPr id="15" name="Rounded Rectangle 14"/>
+          <p:cNvSpPr/>
+          <p:nvPr/>
+        </p:nvSpPr>
+        <p:spPr>
+          <a:xfrm>
+            <a:off x="987552" y="3465576"/>
+            <a:ext cx="512064" cy="512064"/>
+          </a:xfrm>
+          <a:prstGeom prst="roundRect">
+            <a:avLst>
+              <a:gd name="adj" fmla="val 26000"/>
+            </a:avLst>
+          </a:prstGeom>
+          <a:solidFill>
+            <a:srgbClr val="EE0000"/>
+          </a:solidFill>
+          <a:ln>
+            <a:noFill/>
+          </a:ln>
+          <a:effectLst/>
+        </p:spPr>
+        <p:style>
+          <a:lnRef idx="1">
+            <a:schemeClr val="accent1"/>
+          </a:lnRef>
+          <a:fillRef idx="3">
+            <a:schemeClr val="accent1"/>
+          </a:fillRef>
+          <a:effectRef idx="2">
+            <a:schemeClr val="accent1"/>
+          </a:effectRef>
+          <a:fontRef idx="minor">
+            <a:schemeClr val="lt1"/>
+          </a:fontRef>
+        </p:style>
+        <p:txBody>
+          <a:bodyPr rtlCol="0" anchor="ctr"/>
+          <a:lstStyle/>
+          <a:p>
+            <a:pPr algn="ctr"/>
+          </a:p>
+        </p:txBody>
+      </p:sp>
       <p:pic>
         <p:nvPicPr>
-          <p:cNvPr id="13" name="Picture 12" descr="check_steel.png"/>
+          <p:cNvPr id="16" name="Picture 15" descr="check_white.png"/>
           <p:cNvPicPr>
             <a:picLocks noChangeAspect="1"/>
           </p:cNvPicPr>
@@ -7928,8 +8690,8 @@
         </p:blipFill>
         <p:spPr>
           <a:xfrm>
-            <a:off x="987552" y="3749040"/>
-            <a:ext cx="237744" cy="237744"/>
+            <a:off x="1110447" y="3588471"/>
+            <a:ext cx="266273" cy="266273"/>
           </a:xfrm>
           <a:prstGeom prst="rect">
             <a:avLst/>
@@ -7938,14 +8700,14 @@
       </p:pic>
       <p:sp>
         <p:nvSpPr>
-          <p:cNvPr id="14" name="TextBox 13"/>
+          <p:cNvPr id="17" name="TextBox 16"/>
           <p:cNvSpPr txBox="1"/>
           <p:nvPr/>
         </p:nvSpPr>
         <p:spPr>
           <a:xfrm>
-            <a:off x="1353312" y="3602736"/>
-            <a:ext cx="5029200" cy="530352"/>
+            <a:off x="1627632" y="3328416"/>
+            <a:ext cx="4206240" cy="786384"/>
           </a:xfrm>
           <a:prstGeom prst="rect">
             <a:avLst/>
@@ -7970,7 +8732,7 @@
               </a:spcAft>
             </a:pPr>
             <a:r>
-              <a:rPr sz="1200" b="0">
+              <a:rPr sz="1150" b="0">
                 <a:solidFill>
                   <a:srgbClr val="1A1A1A"/>
                 </a:solidFill>
@@ -7983,18 +8745,18 @@
       </p:sp>
       <p:sp>
         <p:nvSpPr>
-          <p:cNvPr id="15" name="Rounded Rectangle 14"/>
+          <p:cNvPr id="18" name="Rounded Rectangle 17"/>
           <p:cNvSpPr/>
           <p:nvPr/>
         </p:nvSpPr>
         <p:spPr>
           <a:xfrm>
-            <a:off x="841248" y="4206240"/>
-            <a:ext cx="5715000" cy="530352"/>
+            <a:off x="6254496" y="3328416"/>
+            <a:ext cx="5138928" cy="786384"/>
           </a:xfrm>
           <a:prstGeom prst="roundRect">
             <a:avLst>
-              <a:gd name="adj" fmla="val 6000"/>
+              <a:gd name="adj" fmla="val 7000"/>
             </a:avLst>
           </a:prstGeom>
           <a:solidFill>
@@ -8029,9 +8791,55 @@
           </a:p>
         </p:txBody>
       </p:sp>
+      <p:sp>
+        <p:nvSpPr>
+          <p:cNvPr id="19" name="Rounded Rectangle 18"/>
+          <p:cNvSpPr/>
+          <p:nvPr/>
+        </p:nvSpPr>
+        <p:spPr>
+          <a:xfrm>
+            <a:off x="6400800" y="3465576"/>
+            <a:ext cx="512064" cy="512064"/>
+          </a:xfrm>
+          <a:prstGeom prst="roundRect">
+            <a:avLst>
+              <a:gd name="adj" fmla="val 26000"/>
+            </a:avLst>
+          </a:prstGeom>
+          <a:solidFill>
+            <a:srgbClr val="EE0000"/>
+          </a:solidFill>
+          <a:ln>
+            <a:noFill/>
+          </a:ln>
+          <a:effectLst/>
+        </p:spPr>
+        <p:style>
+          <a:lnRef idx="1">
+            <a:schemeClr val="accent1"/>
+          </a:lnRef>
+          <a:fillRef idx="3">
+            <a:schemeClr val="accent1"/>
+          </a:fillRef>
+          <a:effectRef idx="2">
+            <a:schemeClr val="accent1"/>
+          </a:effectRef>
+          <a:fontRef idx="minor">
+            <a:schemeClr val="lt1"/>
+          </a:fontRef>
+        </p:style>
+        <p:txBody>
+          <a:bodyPr rtlCol="0" anchor="ctr"/>
+          <a:lstStyle/>
+          <a:p>
+            <a:pPr algn="ctr"/>
+          </a:p>
+        </p:txBody>
+      </p:sp>
       <p:pic>
         <p:nvPicPr>
-          <p:cNvPr id="16" name="Picture 15" descr="check_steel.png"/>
+          <p:cNvPr id="20" name="Picture 19" descr="check_white.png"/>
           <p:cNvPicPr>
             <a:picLocks noChangeAspect="1"/>
           </p:cNvPicPr>
@@ -8045,8 +8853,8 @@
         </p:blipFill>
         <p:spPr>
           <a:xfrm>
-            <a:off x="987552" y="4352544"/>
-            <a:ext cx="237744" cy="237744"/>
+            <a:off x="6523695" y="3588471"/>
+            <a:ext cx="266273" cy="266273"/>
           </a:xfrm>
           <a:prstGeom prst="rect">
             <a:avLst/>
@@ -8055,14 +8863,14 @@
       </p:pic>
       <p:sp>
         <p:nvSpPr>
-          <p:cNvPr id="17" name="TextBox 16"/>
+          <p:cNvPr id="21" name="TextBox 20"/>
           <p:cNvSpPr txBox="1"/>
           <p:nvPr/>
         </p:nvSpPr>
         <p:spPr>
           <a:xfrm>
-            <a:off x="1353312" y="4206240"/>
-            <a:ext cx="5029200" cy="530352"/>
+            <a:off x="7040880" y="3328416"/>
+            <a:ext cx="4206240" cy="786384"/>
           </a:xfrm>
           <a:prstGeom prst="rect">
             <a:avLst/>
@@ -8087,7 +8895,7 @@
               </a:spcAft>
             </a:pPr>
             <a:r>
-              <a:rPr sz="1200" b="0">
+              <a:rPr sz="1150" b="0">
                 <a:solidFill>
                   <a:srgbClr val="1A1A1A"/>
                 </a:solidFill>
@@ -8100,18 +8908,18 @@
       </p:sp>
       <p:sp>
         <p:nvSpPr>
-          <p:cNvPr id="18" name="Rounded Rectangle 17"/>
+          <p:cNvPr id="22" name="Rounded Rectangle 21"/>
           <p:cNvSpPr/>
           <p:nvPr/>
         </p:nvSpPr>
         <p:spPr>
           <a:xfrm>
-            <a:off x="841248" y="4809744"/>
-            <a:ext cx="5715000" cy="530352"/>
+            <a:off x="841248" y="4261104"/>
+            <a:ext cx="5138928" cy="786384"/>
           </a:xfrm>
           <a:prstGeom prst="roundRect">
             <a:avLst>
-              <a:gd name="adj" fmla="val 6000"/>
+              <a:gd name="adj" fmla="val 7000"/>
             </a:avLst>
           </a:prstGeom>
           <a:solidFill>
@@ -8146,9 +8954,55 @@
           </a:p>
         </p:txBody>
       </p:sp>
+      <p:sp>
+        <p:nvSpPr>
+          <p:cNvPr id="23" name="Rounded Rectangle 22"/>
+          <p:cNvSpPr/>
+          <p:nvPr/>
+        </p:nvSpPr>
+        <p:spPr>
+          <a:xfrm>
+            <a:off x="987552" y="4398264"/>
+            <a:ext cx="512064" cy="512064"/>
+          </a:xfrm>
+          <a:prstGeom prst="roundRect">
+            <a:avLst>
+              <a:gd name="adj" fmla="val 26000"/>
+            </a:avLst>
+          </a:prstGeom>
+          <a:solidFill>
+            <a:srgbClr val="EE0000"/>
+          </a:solidFill>
+          <a:ln>
+            <a:noFill/>
+          </a:ln>
+          <a:effectLst/>
+        </p:spPr>
+        <p:style>
+          <a:lnRef idx="1">
+            <a:schemeClr val="accent1"/>
+          </a:lnRef>
+          <a:fillRef idx="3">
+            <a:schemeClr val="accent1"/>
+          </a:fillRef>
+          <a:effectRef idx="2">
+            <a:schemeClr val="accent1"/>
+          </a:effectRef>
+          <a:fontRef idx="minor">
+            <a:schemeClr val="lt1"/>
+          </a:fontRef>
+        </p:style>
+        <p:txBody>
+          <a:bodyPr rtlCol="0" anchor="ctr"/>
+          <a:lstStyle/>
+          <a:p>
+            <a:pPr algn="ctr"/>
+          </a:p>
+        </p:txBody>
+      </p:sp>
       <p:pic>
         <p:nvPicPr>
-          <p:cNvPr id="19" name="Picture 18" descr="check_steel.png"/>
+          <p:cNvPr id="24" name="Picture 23" descr="check_white.png"/>
           <p:cNvPicPr>
             <a:picLocks noChangeAspect="1"/>
           </p:cNvPicPr>
@@ -8162,8 +9016,8 @@
         </p:blipFill>
         <p:spPr>
           <a:xfrm>
-            <a:off x="987552" y="4956048"/>
-            <a:ext cx="237744" cy="237744"/>
+            <a:off x="1110447" y="4521159"/>
+            <a:ext cx="266273" cy="266273"/>
           </a:xfrm>
           <a:prstGeom prst="rect">
             <a:avLst/>
@@ -8172,14 +9026,14 @@
       </p:pic>
       <p:sp>
         <p:nvSpPr>
-          <p:cNvPr id="20" name="TextBox 19"/>
+          <p:cNvPr id="25" name="TextBox 24"/>
           <p:cNvSpPr txBox="1"/>
           <p:nvPr/>
         </p:nvSpPr>
         <p:spPr>
           <a:xfrm>
-            <a:off x="1353312" y="4809744"/>
-            <a:ext cx="5029200" cy="530352"/>
+            <a:off x="1627632" y="4261104"/>
+            <a:ext cx="4206240" cy="786384"/>
           </a:xfrm>
           <a:prstGeom prst="rect">
             <a:avLst/>
@@ -8204,221 +9058,13 @@
               </a:spcAft>
             </a:pPr>
             <a:r>
-              <a:rPr sz="1200" b="0">
+              <a:rPr sz="1150" b="0">
                 <a:solidFill>
                   <a:srgbClr val="1A1A1A"/>
                 </a:solidFill>
                 <a:latin typeface="Red Hat Text"/>
               </a:rPr>
               <a:t>DoNotSchedule (hard) vs ScheduleAnyway (soft)</a:t>
-            </a:r>
-          </a:p>
-        </p:txBody>
-      </p:sp>
-      <p:sp>
-        <p:nvSpPr>
-          <p:cNvPr id="21" name="Rounded Rectangle 20"/>
-          <p:cNvSpPr/>
-          <p:nvPr/>
-        </p:nvSpPr>
-        <p:spPr>
-          <a:xfrm>
-            <a:off x="6812280" y="2395728"/>
-            <a:ext cx="4538167" cy="2944368"/>
-          </a:xfrm>
-          <a:prstGeom prst="roundRect">
-            <a:avLst>
-              <a:gd name="adj" fmla="val 4000"/>
-            </a:avLst>
-          </a:prstGeom>
-          <a:solidFill>
-            <a:srgbClr val="FFFFFF"/>
-          </a:solidFill>
-          <a:ln w="15240">
-            <a:solidFill>
-              <a:srgbClr val="DDE1E6"/>
-            </a:solidFill>
-          </a:ln>
-          <a:effectLst/>
-        </p:spPr>
-        <p:style>
-          <a:lnRef idx="1">
-            <a:schemeClr val="accent1"/>
-          </a:lnRef>
-          <a:fillRef idx="3">
-            <a:schemeClr val="accent1"/>
-          </a:fillRef>
-          <a:effectRef idx="2">
-            <a:schemeClr val="accent1"/>
-          </a:effectRef>
-          <a:fontRef idx="minor">
-            <a:schemeClr val="lt1"/>
-          </a:fontRef>
-        </p:style>
-        <p:txBody>
-          <a:bodyPr rtlCol="0" anchor="ctr"/>
-          <a:lstStyle/>
-          <a:p>
-            <a:pPr algn="ctr"/>
-          </a:p>
-        </p:txBody>
-      </p:sp>
-      <p:sp>
-        <p:nvSpPr>
-          <p:cNvPr id="22" name="Rounded Rectangle 21"/>
-          <p:cNvSpPr/>
-          <p:nvPr/>
-        </p:nvSpPr>
-        <p:spPr>
-          <a:xfrm>
-            <a:off x="7013448" y="2596896"/>
-            <a:ext cx="1298448" cy="310896"/>
-          </a:xfrm>
-          <a:prstGeom prst="roundRect">
-            <a:avLst>
-              <a:gd name="adj" fmla="val 50000"/>
-            </a:avLst>
-          </a:prstGeom>
-          <a:solidFill>
-            <a:srgbClr val="FCECEC"/>
-          </a:solidFill>
-          <a:ln>
-            <a:noFill/>
-          </a:ln>
-          <a:effectLst/>
-        </p:spPr>
-        <p:style>
-          <a:lnRef idx="1">
-            <a:schemeClr val="accent1"/>
-          </a:lnRef>
-          <a:fillRef idx="3">
-            <a:schemeClr val="accent1"/>
-          </a:fillRef>
-          <a:effectRef idx="2">
-            <a:schemeClr val="accent1"/>
-          </a:effectRef>
-          <a:fontRef idx="minor">
-            <a:schemeClr val="lt1"/>
-          </a:fontRef>
-        </p:style>
-        <p:txBody>
-          <a:bodyPr rtlCol="0" anchor="ctr"/>
-          <a:lstStyle/>
-          <a:p>
-            <a:pPr algn="ctr"/>
-          </a:p>
-        </p:txBody>
-      </p:sp>
-      <p:sp>
-        <p:nvSpPr>
-          <p:cNvPr id="23" name="TextBox 22"/>
-          <p:cNvSpPr txBox="1"/>
-          <p:nvPr/>
-        </p:nvSpPr>
-        <p:spPr>
-          <a:xfrm>
-            <a:off x="7013448" y="2596896"/>
-            <a:ext cx="1298448" cy="310896"/>
-          </a:xfrm>
-          <a:prstGeom prst="rect">
-            <a:avLst/>
-          </a:prstGeom>
-          <a:noFill/>
-        </p:spPr>
-        <p:txBody>
-          <a:bodyPr wrap="none" anchor="ctr" lIns="0" rIns="0" tIns="0" bIns="0">
-            <a:spAutoFit/>
-          </a:bodyPr>
-          <a:lstStyle/>
-          <a:p>
-            <a:pPr algn="ctr">
-              <a:lnSpc>
-                <a:spcPct val="106000"/>
-              </a:lnSpc>
-              <a:spcBef>
-                <a:spcPts val="0"/>
-              </a:spcBef>
-              <a:spcAft>
-                <a:spcPts val="0"/>
-              </a:spcAft>
-            </a:pPr>
-            <a:r>
-              <a:rPr sz="850" b="1">
-                <a:solidFill>
-                  <a:srgbClr val="B80000"/>
-                </a:solidFill>
-                <a:latin typeface="Red Hat Display"/>
-              </a:rPr>
-              <a:t>MEDIA PASS</a:t>
-            </a:r>
-          </a:p>
-        </p:txBody>
-      </p:sp>
-      <p:pic>
-        <p:nvPicPr>
-          <p:cNvPr id="24" name="Picture 23" descr="eye_slate.png"/>
-          <p:cNvPicPr>
-            <a:picLocks noChangeAspect="1"/>
-          </p:cNvPicPr>
-          <p:nvPr/>
-        </p:nvPicPr>
-        <p:blipFill>
-          <a:blip r:embed="rId4"/>
-          <a:stretch>
-            <a:fillRect/>
-          </a:stretch>
-        </p:blipFill>
-        <p:spPr>
-          <a:xfrm>
-            <a:off x="8843619" y="3108960"/>
-            <a:ext cx="475488" cy="475488"/>
-          </a:xfrm>
-          <a:prstGeom prst="rect">
-            <a:avLst/>
-          </a:prstGeom>
-        </p:spPr>
-      </p:pic>
-      <p:sp>
-        <p:nvSpPr>
-          <p:cNvPr id="25" name="TextBox 24"/>
-          <p:cNvSpPr txBox="1"/>
-          <p:nvPr/>
-        </p:nvSpPr>
-        <p:spPr>
-          <a:xfrm>
-            <a:off x="7050024" y="3721608"/>
-            <a:ext cx="4062679" cy="1481328"/>
-          </a:xfrm>
-          <a:prstGeom prst="rect">
-            <a:avLst/>
-          </a:prstGeom>
-          <a:noFill/>
-        </p:spPr>
-        <p:txBody>
-          <a:bodyPr wrap="square" anchor="t" lIns="0" rIns="0" tIns="0" bIns="0">
-            <a:spAutoFit/>
-          </a:bodyPr>
-          <a:lstStyle/>
-          <a:p>
-            <a:pPr algn="l">
-              <a:lnSpc>
-                <a:spcPct val="120000"/>
-              </a:lnSpc>
-              <a:spcBef>
-                <a:spcPts val="0"/>
-              </a:spcBef>
-              <a:spcAft>
-                <a:spcPts val="0"/>
-              </a:spcAft>
-            </a:pPr>
-            <a:r>
-              <a:rPr sz="950" b="0">
-                <a:solidFill>
-                  <a:srgbClr val="8A9099"/>
-                </a:solidFill>
-                <a:latin typeface="Red Hat Text"/>
-              </a:rPr>
-              <a:t>Three nodes (or three zones) each holding one replica evenly, with a maxSkew=1 caption; a fourth would-be pod bouncing off with "DoNotSchedule → Pending" vs sliding in with "ScheduleAnyway".</a:t>
             </a:r>
           </a:p>
         </p:txBody>
@@ -8726,11 +9372,11 @@
         <p:spPr>
           <a:xfrm>
             <a:off x="841248" y="2395728"/>
-            <a:ext cx="5715000" cy="530352"/>
+            <a:ext cx="5138928" cy="786384"/>
           </a:xfrm>
           <a:prstGeom prst="roundRect">
             <a:avLst>
-              <a:gd name="adj" fmla="val 6000"/>
+              <a:gd name="adj" fmla="val 7000"/>
             </a:avLst>
           </a:prstGeom>
           <a:solidFill>
@@ -8765,9 +9411,55 @@
           </a:p>
         </p:txBody>
       </p:sp>
+      <p:sp>
+        <p:nvSpPr>
+          <p:cNvPr id="7" name="Rounded Rectangle 6"/>
+          <p:cNvSpPr/>
+          <p:nvPr/>
+        </p:nvSpPr>
+        <p:spPr>
+          <a:xfrm>
+            <a:off x="987552" y="2532888"/>
+            <a:ext cx="512064" cy="512064"/>
+          </a:xfrm>
+          <a:prstGeom prst="roundRect">
+            <a:avLst>
+              <a:gd name="adj" fmla="val 26000"/>
+            </a:avLst>
+          </a:prstGeom>
+          <a:solidFill>
+            <a:srgbClr val="EE0000"/>
+          </a:solidFill>
+          <a:ln>
+            <a:noFill/>
+          </a:ln>
+          <a:effectLst/>
+        </p:spPr>
+        <p:style>
+          <a:lnRef idx="1">
+            <a:schemeClr val="accent1"/>
+          </a:lnRef>
+          <a:fillRef idx="3">
+            <a:schemeClr val="accent1"/>
+          </a:fillRef>
+          <a:effectRef idx="2">
+            <a:schemeClr val="accent1"/>
+          </a:effectRef>
+          <a:fontRef idx="minor">
+            <a:schemeClr val="lt1"/>
+          </a:fontRef>
+        </p:style>
+        <p:txBody>
+          <a:bodyPr rtlCol="0" anchor="ctr"/>
+          <a:lstStyle/>
+          <a:p>
+            <a:pPr algn="ctr"/>
+          </a:p>
+        </p:txBody>
+      </p:sp>
       <p:pic>
         <p:nvPicPr>
-          <p:cNvPr id="7" name="Picture 6" descr="check_steel.png"/>
+          <p:cNvPr id="8" name="Picture 7" descr="check_white.png"/>
           <p:cNvPicPr>
             <a:picLocks noChangeAspect="1"/>
           </p:cNvPicPr>
@@ -8781,8 +9473,8 @@
         </p:blipFill>
         <p:spPr>
           <a:xfrm>
-            <a:off x="987552" y="2542032"/>
-            <a:ext cx="237744" cy="237744"/>
+            <a:off x="1110447" y="2655783"/>
+            <a:ext cx="266273" cy="266273"/>
           </a:xfrm>
           <a:prstGeom prst="rect">
             <a:avLst/>
@@ -8791,14 +9483,14 @@
       </p:pic>
       <p:sp>
         <p:nvSpPr>
-          <p:cNvPr id="8" name="TextBox 7"/>
+          <p:cNvPr id="9" name="TextBox 8"/>
           <p:cNvSpPr txBox="1"/>
           <p:nvPr/>
         </p:nvSpPr>
         <p:spPr>
           <a:xfrm>
-            <a:off x="1353312" y="2395728"/>
-            <a:ext cx="5029200" cy="530352"/>
+            <a:off x="1627632" y="2395728"/>
+            <a:ext cx="4206240" cy="786384"/>
           </a:xfrm>
           <a:prstGeom prst="rect">
             <a:avLst/>
@@ -8823,7 +9515,7 @@
               </a:spcAft>
             </a:pPr>
             <a:r>
-              <a:rPr sz="1200" b="0">
+              <a:rPr sz="1150" b="0">
                 <a:solidFill>
                   <a:srgbClr val="1A1A1A"/>
                 </a:solidFill>
@@ -8836,18 +9528,18 @@
       </p:sp>
       <p:sp>
         <p:nvSpPr>
-          <p:cNvPr id="9" name="Rounded Rectangle 8"/>
+          <p:cNvPr id="10" name="Rounded Rectangle 9"/>
           <p:cNvSpPr/>
           <p:nvPr/>
         </p:nvSpPr>
         <p:spPr>
           <a:xfrm>
-            <a:off x="841248" y="2999232"/>
-            <a:ext cx="5715000" cy="530352"/>
+            <a:off x="6254496" y="2395728"/>
+            <a:ext cx="5138928" cy="786384"/>
           </a:xfrm>
           <a:prstGeom prst="roundRect">
             <a:avLst>
-              <a:gd name="adj" fmla="val 6000"/>
+              <a:gd name="adj" fmla="val 7000"/>
             </a:avLst>
           </a:prstGeom>
           <a:solidFill>
@@ -8882,9 +9574,55 @@
           </a:p>
         </p:txBody>
       </p:sp>
+      <p:sp>
+        <p:nvSpPr>
+          <p:cNvPr id="11" name="Rounded Rectangle 10"/>
+          <p:cNvSpPr/>
+          <p:nvPr/>
+        </p:nvSpPr>
+        <p:spPr>
+          <a:xfrm>
+            <a:off x="6400800" y="2532888"/>
+            <a:ext cx="512064" cy="512064"/>
+          </a:xfrm>
+          <a:prstGeom prst="roundRect">
+            <a:avLst>
+              <a:gd name="adj" fmla="val 26000"/>
+            </a:avLst>
+          </a:prstGeom>
+          <a:solidFill>
+            <a:srgbClr val="EE0000"/>
+          </a:solidFill>
+          <a:ln>
+            <a:noFill/>
+          </a:ln>
+          <a:effectLst/>
+        </p:spPr>
+        <p:style>
+          <a:lnRef idx="1">
+            <a:schemeClr val="accent1"/>
+          </a:lnRef>
+          <a:fillRef idx="3">
+            <a:schemeClr val="accent1"/>
+          </a:fillRef>
+          <a:effectRef idx="2">
+            <a:schemeClr val="accent1"/>
+          </a:effectRef>
+          <a:fontRef idx="minor">
+            <a:schemeClr val="lt1"/>
+          </a:fontRef>
+        </p:style>
+        <p:txBody>
+          <a:bodyPr rtlCol="0" anchor="ctr"/>
+          <a:lstStyle/>
+          <a:p>
+            <a:pPr algn="ctr"/>
+          </a:p>
+        </p:txBody>
+      </p:sp>
       <p:pic>
         <p:nvPicPr>
-          <p:cNvPr id="10" name="Picture 9" descr="check_steel.png"/>
+          <p:cNvPr id="12" name="Picture 11" descr="check_white.png"/>
           <p:cNvPicPr>
             <a:picLocks noChangeAspect="1"/>
           </p:cNvPicPr>
@@ -8898,8 +9636,8 @@
         </p:blipFill>
         <p:spPr>
           <a:xfrm>
-            <a:off x="987552" y="3145536"/>
-            <a:ext cx="237744" cy="237744"/>
+            <a:off x="6523695" y="2655783"/>
+            <a:ext cx="266273" cy="266273"/>
           </a:xfrm>
           <a:prstGeom prst="rect">
             <a:avLst/>
@@ -8908,14 +9646,14 @@
       </p:pic>
       <p:sp>
         <p:nvSpPr>
-          <p:cNvPr id="11" name="TextBox 10"/>
+          <p:cNvPr id="13" name="TextBox 12"/>
           <p:cNvSpPr txBox="1"/>
           <p:nvPr/>
         </p:nvSpPr>
         <p:spPr>
           <a:xfrm>
-            <a:off x="1353312" y="2999232"/>
-            <a:ext cx="5029200" cy="530352"/>
+            <a:off x="7040880" y="2395728"/>
+            <a:ext cx="4206240" cy="786384"/>
           </a:xfrm>
           <a:prstGeom prst="rect">
             <a:avLst/>
@@ -8940,7 +9678,7 @@
               </a:spcAft>
             </a:pPr>
             <a:r>
-              <a:rPr sz="1200" b="0">
+              <a:rPr sz="1150" b="0">
                 <a:solidFill>
                   <a:srgbClr val="1A1A1A"/>
                 </a:solidFill>
@@ -8953,18 +9691,18 @@
       </p:sp>
       <p:sp>
         <p:nvSpPr>
-          <p:cNvPr id="12" name="Rounded Rectangle 11"/>
+          <p:cNvPr id="14" name="Rounded Rectangle 13"/>
           <p:cNvSpPr/>
           <p:nvPr/>
         </p:nvSpPr>
         <p:spPr>
           <a:xfrm>
-            <a:off x="841248" y="3602736"/>
-            <a:ext cx="5715000" cy="530352"/>
+            <a:off x="841248" y="3328416"/>
+            <a:ext cx="5138928" cy="786384"/>
           </a:xfrm>
           <a:prstGeom prst="roundRect">
             <a:avLst>
-              <a:gd name="adj" fmla="val 6000"/>
+              <a:gd name="adj" fmla="val 7000"/>
             </a:avLst>
           </a:prstGeom>
           <a:solidFill>
@@ -8999,9 +9737,55 @@
           </a:p>
         </p:txBody>
       </p:sp>
+      <p:sp>
+        <p:nvSpPr>
+          <p:cNvPr id="15" name="Rounded Rectangle 14"/>
+          <p:cNvSpPr/>
+          <p:nvPr/>
+        </p:nvSpPr>
+        <p:spPr>
+          <a:xfrm>
+            <a:off x="987552" y="3465576"/>
+            <a:ext cx="512064" cy="512064"/>
+          </a:xfrm>
+          <a:prstGeom prst="roundRect">
+            <a:avLst>
+              <a:gd name="adj" fmla="val 26000"/>
+            </a:avLst>
+          </a:prstGeom>
+          <a:solidFill>
+            <a:srgbClr val="EE0000"/>
+          </a:solidFill>
+          <a:ln>
+            <a:noFill/>
+          </a:ln>
+          <a:effectLst/>
+        </p:spPr>
+        <p:style>
+          <a:lnRef idx="1">
+            <a:schemeClr val="accent1"/>
+          </a:lnRef>
+          <a:fillRef idx="3">
+            <a:schemeClr val="accent1"/>
+          </a:fillRef>
+          <a:effectRef idx="2">
+            <a:schemeClr val="accent1"/>
+          </a:effectRef>
+          <a:fontRef idx="minor">
+            <a:schemeClr val="lt1"/>
+          </a:fontRef>
+        </p:style>
+        <p:txBody>
+          <a:bodyPr rtlCol="0" anchor="ctr"/>
+          <a:lstStyle/>
+          <a:p>
+            <a:pPr algn="ctr"/>
+          </a:p>
+        </p:txBody>
+      </p:sp>
       <p:pic>
         <p:nvPicPr>
-          <p:cNvPr id="13" name="Picture 12" descr="check_steel.png"/>
+          <p:cNvPr id="16" name="Picture 15" descr="check_white.png"/>
           <p:cNvPicPr>
             <a:picLocks noChangeAspect="1"/>
           </p:cNvPicPr>
@@ -9015,8 +9799,8 @@
         </p:blipFill>
         <p:spPr>
           <a:xfrm>
-            <a:off x="987552" y="3749040"/>
-            <a:ext cx="237744" cy="237744"/>
+            <a:off x="1110447" y="3588471"/>
+            <a:ext cx="266273" cy="266273"/>
           </a:xfrm>
           <a:prstGeom prst="rect">
             <a:avLst/>
@@ -9025,14 +9809,14 @@
       </p:pic>
       <p:sp>
         <p:nvSpPr>
-          <p:cNvPr id="14" name="TextBox 13"/>
+          <p:cNvPr id="17" name="TextBox 16"/>
           <p:cNvSpPr txBox="1"/>
           <p:nvPr/>
         </p:nvSpPr>
         <p:spPr>
           <a:xfrm>
-            <a:off x="1353312" y="3602736"/>
-            <a:ext cx="5029200" cy="530352"/>
+            <a:off x="1627632" y="3328416"/>
+            <a:ext cx="4206240" cy="786384"/>
           </a:xfrm>
           <a:prstGeom prst="rect">
             <a:avLst/>
@@ -9057,7 +9841,7 @@
               </a:spcAft>
             </a:pPr>
             <a:r>
-              <a:rPr sz="1200" b="0">
+              <a:rPr sz="1150" b="0">
                 <a:solidFill>
                   <a:srgbClr val="1A1A1A"/>
                 </a:solidFill>
@@ -9070,18 +9854,18 @@
       </p:sp>
       <p:sp>
         <p:nvSpPr>
-          <p:cNvPr id="15" name="Rounded Rectangle 14"/>
+          <p:cNvPr id="18" name="Rounded Rectangle 17"/>
           <p:cNvSpPr/>
           <p:nvPr/>
         </p:nvSpPr>
         <p:spPr>
           <a:xfrm>
-            <a:off x="841248" y="4206240"/>
-            <a:ext cx="5715000" cy="530352"/>
+            <a:off x="6254496" y="3328416"/>
+            <a:ext cx="5138928" cy="786384"/>
           </a:xfrm>
           <a:prstGeom prst="roundRect">
             <a:avLst>
-              <a:gd name="adj" fmla="val 6000"/>
+              <a:gd name="adj" fmla="val 7000"/>
             </a:avLst>
           </a:prstGeom>
           <a:solidFill>
@@ -9116,9 +9900,55 @@
           </a:p>
         </p:txBody>
       </p:sp>
+      <p:sp>
+        <p:nvSpPr>
+          <p:cNvPr id="19" name="Rounded Rectangle 18"/>
+          <p:cNvSpPr/>
+          <p:nvPr/>
+        </p:nvSpPr>
+        <p:spPr>
+          <a:xfrm>
+            <a:off x="6400800" y="3465576"/>
+            <a:ext cx="512064" cy="512064"/>
+          </a:xfrm>
+          <a:prstGeom prst="roundRect">
+            <a:avLst>
+              <a:gd name="adj" fmla="val 26000"/>
+            </a:avLst>
+          </a:prstGeom>
+          <a:solidFill>
+            <a:srgbClr val="EE0000"/>
+          </a:solidFill>
+          <a:ln>
+            <a:noFill/>
+          </a:ln>
+          <a:effectLst/>
+        </p:spPr>
+        <p:style>
+          <a:lnRef idx="1">
+            <a:schemeClr val="accent1"/>
+          </a:lnRef>
+          <a:fillRef idx="3">
+            <a:schemeClr val="accent1"/>
+          </a:fillRef>
+          <a:effectRef idx="2">
+            <a:schemeClr val="accent1"/>
+          </a:effectRef>
+          <a:fontRef idx="minor">
+            <a:schemeClr val="lt1"/>
+          </a:fontRef>
+        </p:style>
+        <p:txBody>
+          <a:bodyPr rtlCol="0" anchor="ctr"/>
+          <a:lstStyle/>
+          <a:p>
+            <a:pPr algn="ctr"/>
+          </a:p>
+        </p:txBody>
+      </p:sp>
       <p:pic>
         <p:nvPicPr>
-          <p:cNvPr id="16" name="Picture 15" descr="check_steel.png"/>
+          <p:cNvPr id="20" name="Picture 19" descr="check_white.png"/>
           <p:cNvPicPr>
             <a:picLocks noChangeAspect="1"/>
           </p:cNvPicPr>
@@ -9132,8 +9962,8 @@
         </p:blipFill>
         <p:spPr>
           <a:xfrm>
-            <a:off x="987552" y="4352544"/>
-            <a:ext cx="237744" cy="237744"/>
+            <a:off x="6523695" y="3588471"/>
+            <a:ext cx="266273" cy="266273"/>
           </a:xfrm>
           <a:prstGeom prst="rect">
             <a:avLst/>
@@ -9142,14 +9972,14 @@
       </p:pic>
       <p:sp>
         <p:nvSpPr>
-          <p:cNvPr id="17" name="TextBox 16"/>
+          <p:cNvPr id="21" name="TextBox 20"/>
           <p:cNvSpPr txBox="1"/>
           <p:nvPr/>
         </p:nvSpPr>
         <p:spPr>
           <a:xfrm>
-            <a:off x="1353312" y="4206240"/>
-            <a:ext cx="5029200" cy="530352"/>
+            <a:off x="7040880" y="3328416"/>
+            <a:ext cx="4206240" cy="786384"/>
           </a:xfrm>
           <a:prstGeom prst="rect">
             <a:avLst/>
@@ -9174,7 +10004,7 @@
               </a:spcAft>
             </a:pPr>
             <a:r>
-              <a:rPr sz="1200" b="0">
+              <a:rPr sz="1150" b="0">
                 <a:solidFill>
                   <a:srgbClr val="1A1A1A"/>
                 </a:solidFill>
@@ -9187,18 +10017,18 @@
       </p:sp>
       <p:sp>
         <p:nvSpPr>
-          <p:cNvPr id="18" name="Rounded Rectangle 17"/>
+          <p:cNvPr id="22" name="Rounded Rectangle 21"/>
           <p:cNvSpPr/>
           <p:nvPr/>
         </p:nvSpPr>
         <p:spPr>
           <a:xfrm>
-            <a:off x="841248" y="4809744"/>
-            <a:ext cx="5715000" cy="530352"/>
+            <a:off x="841248" y="4261104"/>
+            <a:ext cx="5138928" cy="786384"/>
           </a:xfrm>
           <a:prstGeom prst="roundRect">
             <a:avLst>
-              <a:gd name="adj" fmla="val 6000"/>
+              <a:gd name="adj" fmla="val 7000"/>
             </a:avLst>
           </a:prstGeom>
           <a:solidFill>
@@ -9233,9 +10063,55 @@
           </a:p>
         </p:txBody>
       </p:sp>
+      <p:sp>
+        <p:nvSpPr>
+          <p:cNvPr id="23" name="Rounded Rectangle 22"/>
+          <p:cNvSpPr/>
+          <p:nvPr/>
+        </p:nvSpPr>
+        <p:spPr>
+          <a:xfrm>
+            <a:off x="987552" y="4398264"/>
+            <a:ext cx="512064" cy="512064"/>
+          </a:xfrm>
+          <a:prstGeom prst="roundRect">
+            <a:avLst>
+              <a:gd name="adj" fmla="val 26000"/>
+            </a:avLst>
+          </a:prstGeom>
+          <a:solidFill>
+            <a:srgbClr val="EE0000"/>
+          </a:solidFill>
+          <a:ln>
+            <a:noFill/>
+          </a:ln>
+          <a:effectLst/>
+        </p:spPr>
+        <p:style>
+          <a:lnRef idx="1">
+            <a:schemeClr val="accent1"/>
+          </a:lnRef>
+          <a:fillRef idx="3">
+            <a:schemeClr val="accent1"/>
+          </a:fillRef>
+          <a:effectRef idx="2">
+            <a:schemeClr val="accent1"/>
+          </a:effectRef>
+          <a:fontRef idx="minor">
+            <a:schemeClr val="lt1"/>
+          </a:fontRef>
+        </p:style>
+        <p:txBody>
+          <a:bodyPr rtlCol="0" anchor="ctr"/>
+          <a:lstStyle/>
+          <a:p>
+            <a:pPr algn="ctr"/>
+          </a:p>
+        </p:txBody>
+      </p:sp>
       <p:pic>
         <p:nvPicPr>
-          <p:cNvPr id="19" name="Picture 18" descr="check_steel.png"/>
+          <p:cNvPr id="24" name="Picture 23" descr="check_white.png"/>
           <p:cNvPicPr>
             <a:picLocks noChangeAspect="1"/>
           </p:cNvPicPr>
@@ -9249,8 +10125,8 @@
         </p:blipFill>
         <p:spPr>
           <a:xfrm>
-            <a:off x="987552" y="4956048"/>
-            <a:ext cx="237744" cy="237744"/>
+            <a:off x="1110447" y="4521159"/>
+            <a:ext cx="266273" cy="266273"/>
           </a:xfrm>
           <a:prstGeom prst="rect">
             <a:avLst/>
@@ -9259,14 +10135,14 @@
       </p:pic>
       <p:sp>
         <p:nvSpPr>
-          <p:cNvPr id="20" name="TextBox 19"/>
+          <p:cNvPr id="25" name="TextBox 24"/>
           <p:cNvSpPr txBox="1"/>
           <p:nvPr/>
         </p:nvSpPr>
         <p:spPr>
           <a:xfrm>
-            <a:off x="1353312" y="4809744"/>
-            <a:ext cx="5029200" cy="530352"/>
+            <a:off x="1627632" y="4261104"/>
+            <a:ext cx="4206240" cy="786384"/>
           </a:xfrm>
           <a:prstGeom prst="rect">
             <a:avLst/>
@@ -9291,221 +10167,13 @@
               </a:spcAft>
             </a:pPr>
             <a:r>
-              <a:rPr sz="1200" b="0">
+              <a:rPr sz="1150" b="0">
                 <a:solidFill>
                   <a:srgbClr val="1A1A1A"/>
                 </a:solidFill>
                 <a:latin typeface="Red Hat Text"/>
               </a:rPr>
               <a:t>GPU / batch / licensed-software pools work this way</a:t>
-            </a:r>
-          </a:p>
-        </p:txBody>
-      </p:sp>
-      <p:sp>
-        <p:nvSpPr>
-          <p:cNvPr id="21" name="Rounded Rectangle 20"/>
-          <p:cNvSpPr/>
-          <p:nvPr/>
-        </p:nvSpPr>
-        <p:spPr>
-          <a:xfrm>
-            <a:off x="6812280" y="2395728"/>
-            <a:ext cx="4538167" cy="2944368"/>
-          </a:xfrm>
-          <a:prstGeom prst="roundRect">
-            <a:avLst>
-              <a:gd name="adj" fmla="val 4000"/>
-            </a:avLst>
-          </a:prstGeom>
-          <a:solidFill>
-            <a:srgbClr val="FFFFFF"/>
-          </a:solidFill>
-          <a:ln w="15240">
-            <a:solidFill>
-              <a:srgbClr val="DDE1E6"/>
-            </a:solidFill>
-          </a:ln>
-          <a:effectLst/>
-        </p:spPr>
-        <p:style>
-          <a:lnRef idx="1">
-            <a:schemeClr val="accent1"/>
-          </a:lnRef>
-          <a:fillRef idx="3">
-            <a:schemeClr val="accent1"/>
-          </a:fillRef>
-          <a:effectRef idx="2">
-            <a:schemeClr val="accent1"/>
-          </a:effectRef>
-          <a:fontRef idx="minor">
-            <a:schemeClr val="lt1"/>
-          </a:fontRef>
-        </p:style>
-        <p:txBody>
-          <a:bodyPr rtlCol="0" anchor="ctr"/>
-          <a:lstStyle/>
-          <a:p>
-            <a:pPr algn="ctr"/>
-          </a:p>
-        </p:txBody>
-      </p:sp>
-      <p:sp>
-        <p:nvSpPr>
-          <p:cNvPr id="22" name="Rounded Rectangle 21"/>
-          <p:cNvSpPr/>
-          <p:nvPr/>
-        </p:nvSpPr>
-        <p:spPr>
-          <a:xfrm>
-            <a:off x="7013448" y="2596896"/>
-            <a:ext cx="1298448" cy="310896"/>
-          </a:xfrm>
-          <a:prstGeom prst="roundRect">
-            <a:avLst>
-              <a:gd name="adj" fmla="val 50000"/>
-            </a:avLst>
-          </a:prstGeom>
-          <a:solidFill>
-            <a:srgbClr val="FCECEC"/>
-          </a:solidFill>
-          <a:ln>
-            <a:noFill/>
-          </a:ln>
-          <a:effectLst/>
-        </p:spPr>
-        <p:style>
-          <a:lnRef idx="1">
-            <a:schemeClr val="accent1"/>
-          </a:lnRef>
-          <a:fillRef idx="3">
-            <a:schemeClr val="accent1"/>
-          </a:fillRef>
-          <a:effectRef idx="2">
-            <a:schemeClr val="accent1"/>
-          </a:effectRef>
-          <a:fontRef idx="minor">
-            <a:schemeClr val="lt1"/>
-          </a:fontRef>
-        </p:style>
-        <p:txBody>
-          <a:bodyPr rtlCol="0" anchor="ctr"/>
-          <a:lstStyle/>
-          <a:p>
-            <a:pPr algn="ctr"/>
-          </a:p>
-        </p:txBody>
-      </p:sp>
-      <p:sp>
-        <p:nvSpPr>
-          <p:cNvPr id="23" name="TextBox 22"/>
-          <p:cNvSpPr txBox="1"/>
-          <p:nvPr/>
-        </p:nvSpPr>
-        <p:spPr>
-          <a:xfrm>
-            <a:off x="7013448" y="2596896"/>
-            <a:ext cx="1298448" cy="310896"/>
-          </a:xfrm>
-          <a:prstGeom prst="rect">
-            <a:avLst/>
-          </a:prstGeom>
-          <a:noFill/>
-        </p:spPr>
-        <p:txBody>
-          <a:bodyPr wrap="none" anchor="ctr" lIns="0" rIns="0" tIns="0" bIns="0">
-            <a:spAutoFit/>
-          </a:bodyPr>
-          <a:lstStyle/>
-          <a:p>
-            <a:pPr algn="ctr">
-              <a:lnSpc>
-                <a:spcPct val="106000"/>
-              </a:lnSpc>
-              <a:spcBef>
-                <a:spcPts val="0"/>
-              </a:spcBef>
-              <a:spcAft>
-                <a:spcPts val="0"/>
-              </a:spcAft>
-            </a:pPr>
-            <a:r>
-              <a:rPr sz="850" b="1">
-                <a:solidFill>
-                  <a:srgbClr val="B80000"/>
-                </a:solidFill>
-                <a:latin typeface="Red Hat Display"/>
-              </a:rPr>
-              <a:t>MEDIA PASS</a:t>
-            </a:r>
-          </a:p>
-        </p:txBody>
-      </p:sp>
-      <p:pic>
-        <p:nvPicPr>
-          <p:cNvPr id="24" name="Picture 23" descr="eye_slate.png"/>
-          <p:cNvPicPr>
-            <a:picLocks noChangeAspect="1"/>
-          </p:cNvPicPr>
-          <p:nvPr/>
-        </p:nvPicPr>
-        <p:blipFill>
-          <a:blip r:embed="rId4"/>
-          <a:stretch>
-            <a:fillRect/>
-          </a:stretch>
-        </p:blipFill>
-        <p:spPr>
-          <a:xfrm>
-            <a:off x="8843619" y="3108960"/>
-            <a:ext cx="475488" cy="475488"/>
-          </a:xfrm>
-          <a:prstGeom prst="rect">
-            <a:avLst/>
-          </a:prstGeom>
-        </p:spPr>
-      </p:pic>
-      <p:sp>
-        <p:nvSpPr>
-          <p:cNvPr id="25" name="TextBox 24"/>
-          <p:cNvSpPr txBox="1"/>
-          <p:nvPr/>
-        </p:nvSpPr>
-        <p:spPr>
-          <a:xfrm>
-            <a:off x="7050024" y="3721608"/>
-            <a:ext cx="4062679" cy="1481328"/>
-          </a:xfrm>
-          <a:prstGeom prst="rect">
-            <a:avLst/>
-          </a:prstGeom>
-          <a:noFill/>
-        </p:spPr>
-        <p:txBody>
-          <a:bodyPr wrap="square" anchor="t" lIns="0" rIns="0" tIns="0" bIns="0">
-            <a:spAutoFit/>
-          </a:bodyPr>
-          <a:lstStyle/>
-          <a:p>
-            <a:pPr algn="l">
-              <a:lnSpc>
-                <a:spcPct val="120000"/>
-              </a:lnSpc>
-              <a:spcBef>
-                <a:spcPts val="0"/>
-              </a:spcBef>
-              <a:spcAft>
-                <a:spcPts val="0"/>
-              </a:spcAft>
-            </a:pPr>
-            <a:r>
-              <a:rPr sz="950" b="0">
-                <a:solidFill>
-                  <a:srgbClr val="8A9099"/>
-                </a:solidFill>
-                <a:latin typeface="Red Hat Text"/>
-              </a:rPr>
-              <a:t>A three-step strip: (1) platform taints the pool, (2) pod + toleration = permitted, (3) pod + selector = directed; with a red inset "selector alone → Pending."</a:t>
             </a:r>
           </a:p>
         </p:txBody>
@@ -9813,11 +10481,11 @@
         <p:spPr>
           <a:xfrm>
             <a:off x="841248" y="2395728"/>
-            <a:ext cx="5715000" cy="530352"/>
+            <a:ext cx="5138928" cy="786384"/>
           </a:xfrm>
           <a:prstGeom prst="roundRect">
             <a:avLst>
-              <a:gd name="adj" fmla="val 6000"/>
+              <a:gd name="adj" fmla="val 7000"/>
             </a:avLst>
           </a:prstGeom>
           <a:solidFill>
@@ -9852,9 +10520,55 @@
           </a:p>
         </p:txBody>
       </p:sp>
+      <p:sp>
+        <p:nvSpPr>
+          <p:cNvPr id="7" name="Rounded Rectangle 6"/>
+          <p:cNvSpPr/>
+          <p:nvPr/>
+        </p:nvSpPr>
+        <p:spPr>
+          <a:xfrm>
+            <a:off x="987552" y="2532888"/>
+            <a:ext cx="512064" cy="512064"/>
+          </a:xfrm>
+          <a:prstGeom prst="roundRect">
+            <a:avLst>
+              <a:gd name="adj" fmla="val 26000"/>
+            </a:avLst>
+          </a:prstGeom>
+          <a:solidFill>
+            <a:srgbClr val="EE0000"/>
+          </a:solidFill>
+          <a:ln>
+            <a:noFill/>
+          </a:ln>
+          <a:effectLst/>
+        </p:spPr>
+        <p:style>
+          <a:lnRef idx="1">
+            <a:schemeClr val="accent1"/>
+          </a:lnRef>
+          <a:fillRef idx="3">
+            <a:schemeClr val="accent1"/>
+          </a:fillRef>
+          <a:effectRef idx="2">
+            <a:schemeClr val="accent1"/>
+          </a:effectRef>
+          <a:fontRef idx="minor">
+            <a:schemeClr val="lt1"/>
+          </a:fontRef>
+        </p:style>
+        <p:txBody>
+          <a:bodyPr rtlCol="0" anchor="ctr"/>
+          <a:lstStyle/>
+          <a:p>
+            <a:pPr algn="ctr"/>
+          </a:p>
+        </p:txBody>
+      </p:sp>
       <p:pic>
         <p:nvPicPr>
-          <p:cNvPr id="7" name="Picture 6" descr="check_steel.png"/>
+          <p:cNvPr id="8" name="Picture 7" descr="check_white.png"/>
           <p:cNvPicPr>
             <a:picLocks noChangeAspect="1"/>
           </p:cNvPicPr>
@@ -9868,8 +10582,8 @@
         </p:blipFill>
         <p:spPr>
           <a:xfrm>
-            <a:off x="987552" y="2542032"/>
-            <a:ext cx="237744" cy="237744"/>
+            <a:off x="1110447" y="2655783"/>
+            <a:ext cx="266273" cy="266273"/>
           </a:xfrm>
           <a:prstGeom prst="rect">
             <a:avLst/>
@@ -9878,14 +10592,14 @@
       </p:pic>
       <p:sp>
         <p:nvSpPr>
-          <p:cNvPr id="8" name="TextBox 7"/>
+          <p:cNvPr id="9" name="TextBox 8"/>
           <p:cNvSpPr txBox="1"/>
           <p:nvPr/>
         </p:nvSpPr>
         <p:spPr>
           <a:xfrm>
-            <a:off x="1353312" y="2395728"/>
-            <a:ext cx="5029200" cy="530352"/>
+            <a:off x="1627632" y="2395728"/>
+            <a:ext cx="4206240" cy="786384"/>
           </a:xfrm>
           <a:prstGeom prst="rect">
             <a:avLst/>
@@ -9910,7 +10624,7 @@
               </a:spcAft>
             </a:pPr>
             <a:r>
-              <a:rPr sz="1200" b="0">
+              <a:rPr sz="1150" b="0">
                 <a:solidFill>
                   <a:srgbClr val="1A1A1A"/>
                 </a:solidFill>
@@ -9923,18 +10637,18 @@
       </p:sp>
       <p:sp>
         <p:nvSpPr>
-          <p:cNvPr id="9" name="Rounded Rectangle 8"/>
+          <p:cNvPr id="10" name="Rounded Rectangle 9"/>
           <p:cNvSpPr/>
           <p:nvPr/>
         </p:nvSpPr>
         <p:spPr>
           <a:xfrm>
-            <a:off x="841248" y="2999232"/>
-            <a:ext cx="5715000" cy="530352"/>
+            <a:off x="6254496" y="2395728"/>
+            <a:ext cx="5138928" cy="786384"/>
           </a:xfrm>
           <a:prstGeom prst="roundRect">
             <a:avLst>
-              <a:gd name="adj" fmla="val 6000"/>
+              <a:gd name="adj" fmla="val 7000"/>
             </a:avLst>
           </a:prstGeom>
           <a:solidFill>
@@ -9969,9 +10683,55 @@
           </a:p>
         </p:txBody>
       </p:sp>
+      <p:sp>
+        <p:nvSpPr>
+          <p:cNvPr id="11" name="Rounded Rectangle 10"/>
+          <p:cNvSpPr/>
+          <p:nvPr/>
+        </p:nvSpPr>
+        <p:spPr>
+          <a:xfrm>
+            <a:off x="6400800" y="2532888"/>
+            <a:ext cx="512064" cy="512064"/>
+          </a:xfrm>
+          <a:prstGeom prst="roundRect">
+            <a:avLst>
+              <a:gd name="adj" fmla="val 26000"/>
+            </a:avLst>
+          </a:prstGeom>
+          <a:solidFill>
+            <a:srgbClr val="EE0000"/>
+          </a:solidFill>
+          <a:ln>
+            <a:noFill/>
+          </a:ln>
+          <a:effectLst/>
+        </p:spPr>
+        <p:style>
+          <a:lnRef idx="1">
+            <a:schemeClr val="accent1"/>
+          </a:lnRef>
+          <a:fillRef idx="3">
+            <a:schemeClr val="accent1"/>
+          </a:fillRef>
+          <a:effectRef idx="2">
+            <a:schemeClr val="accent1"/>
+          </a:effectRef>
+          <a:fontRef idx="minor">
+            <a:schemeClr val="lt1"/>
+          </a:fontRef>
+        </p:style>
+        <p:txBody>
+          <a:bodyPr rtlCol="0" anchor="ctr"/>
+          <a:lstStyle/>
+          <a:p>
+            <a:pPr algn="ctr"/>
+          </a:p>
+        </p:txBody>
+      </p:sp>
       <p:pic>
         <p:nvPicPr>
-          <p:cNvPr id="10" name="Picture 9" descr="check_steel.png"/>
+          <p:cNvPr id="12" name="Picture 11" descr="check_white.png"/>
           <p:cNvPicPr>
             <a:picLocks noChangeAspect="1"/>
           </p:cNvPicPr>
@@ -9985,8 +10745,8 @@
         </p:blipFill>
         <p:spPr>
           <a:xfrm>
-            <a:off x="987552" y="3145536"/>
-            <a:ext cx="237744" cy="237744"/>
+            <a:off x="6523695" y="2655783"/>
+            <a:ext cx="266273" cy="266273"/>
           </a:xfrm>
           <a:prstGeom prst="rect">
             <a:avLst/>
@@ -9995,14 +10755,14 @@
       </p:pic>
       <p:sp>
         <p:nvSpPr>
-          <p:cNvPr id="11" name="TextBox 10"/>
+          <p:cNvPr id="13" name="TextBox 12"/>
           <p:cNvSpPr txBox="1"/>
           <p:nvPr/>
         </p:nvSpPr>
         <p:spPr>
           <a:xfrm>
-            <a:off x="1353312" y="2999232"/>
-            <a:ext cx="5029200" cy="530352"/>
+            <a:off x="7040880" y="2395728"/>
+            <a:ext cx="4206240" cy="786384"/>
           </a:xfrm>
           <a:prstGeom prst="rect">
             <a:avLst/>
@@ -10027,7 +10787,7 @@
               </a:spcAft>
             </a:pPr>
             <a:r>
-              <a:rPr sz="1200" b="0">
+              <a:rPr sz="1150" b="0">
                 <a:solidFill>
                   <a:srgbClr val="1A1A1A"/>
                 </a:solidFill>
@@ -10040,18 +10800,18 @@
       </p:sp>
       <p:sp>
         <p:nvSpPr>
-          <p:cNvPr id="12" name="Rounded Rectangle 11"/>
+          <p:cNvPr id="14" name="Rounded Rectangle 13"/>
           <p:cNvSpPr/>
           <p:nvPr/>
         </p:nvSpPr>
         <p:spPr>
           <a:xfrm>
-            <a:off x="841248" y="3602736"/>
-            <a:ext cx="5715000" cy="530352"/>
+            <a:off x="841248" y="3328416"/>
+            <a:ext cx="5138928" cy="786384"/>
           </a:xfrm>
           <a:prstGeom prst="roundRect">
             <a:avLst>
-              <a:gd name="adj" fmla="val 6000"/>
+              <a:gd name="adj" fmla="val 7000"/>
             </a:avLst>
           </a:prstGeom>
           <a:solidFill>
@@ -10086,9 +10846,55 @@
           </a:p>
         </p:txBody>
       </p:sp>
+      <p:sp>
+        <p:nvSpPr>
+          <p:cNvPr id="15" name="Rounded Rectangle 14"/>
+          <p:cNvSpPr/>
+          <p:nvPr/>
+        </p:nvSpPr>
+        <p:spPr>
+          <a:xfrm>
+            <a:off x="987552" y="3465576"/>
+            <a:ext cx="512064" cy="512064"/>
+          </a:xfrm>
+          <a:prstGeom prst="roundRect">
+            <a:avLst>
+              <a:gd name="adj" fmla="val 26000"/>
+            </a:avLst>
+          </a:prstGeom>
+          <a:solidFill>
+            <a:srgbClr val="EE0000"/>
+          </a:solidFill>
+          <a:ln>
+            <a:noFill/>
+          </a:ln>
+          <a:effectLst/>
+        </p:spPr>
+        <p:style>
+          <a:lnRef idx="1">
+            <a:schemeClr val="accent1"/>
+          </a:lnRef>
+          <a:fillRef idx="3">
+            <a:schemeClr val="accent1"/>
+          </a:fillRef>
+          <a:effectRef idx="2">
+            <a:schemeClr val="accent1"/>
+          </a:effectRef>
+          <a:fontRef idx="minor">
+            <a:schemeClr val="lt1"/>
+          </a:fontRef>
+        </p:style>
+        <p:txBody>
+          <a:bodyPr rtlCol="0" anchor="ctr"/>
+          <a:lstStyle/>
+          <a:p>
+            <a:pPr algn="ctr"/>
+          </a:p>
+        </p:txBody>
+      </p:sp>
       <p:pic>
         <p:nvPicPr>
-          <p:cNvPr id="13" name="Picture 12" descr="check_steel.png"/>
+          <p:cNvPr id="16" name="Picture 15" descr="check_white.png"/>
           <p:cNvPicPr>
             <a:picLocks noChangeAspect="1"/>
           </p:cNvPicPr>
@@ -10102,8 +10908,8 @@
         </p:blipFill>
         <p:spPr>
           <a:xfrm>
-            <a:off x="987552" y="3749040"/>
-            <a:ext cx="237744" cy="237744"/>
+            <a:off x="1110447" y="3588471"/>
+            <a:ext cx="266273" cy="266273"/>
           </a:xfrm>
           <a:prstGeom prst="rect">
             <a:avLst/>
@@ -10112,14 +10918,14 @@
       </p:pic>
       <p:sp>
         <p:nvSpPr>
-          <p:cNvPr id="14" name="TextBox 13"/>
+          <p:cNvPr id="17" name="TextBox 16"/>
           <p:cNvSpPr txBox="1"/>
           <p:nvPr/>
         </p:nvSpPr>
         <p:spPr>
           <a:xfrm>
-            <a:off x="1353312" y="3602736"/>
-            <a:ext cx="5029200" cy="530352"/>
+            <a:off x="1627632" y="3328416"/>
+            <a:ext cx="4206240" cy="786384"/>
           </a:xfrm>
           <a:prstGeom prst="rect">
             <a:avLst/>
@@ -10144,7 +10950,7 @@
               </a:spcAft>
             </a:pPr>
             <a:r>
-              <a:rPr sz="1200" b="0">
+              <a:rPr sz="1150" b="0">
                 <a:solidFill>
                   <a:srgbClr val="1A1A1A"/>
                 </a:solidFill>
@@ -10157,18 +10963,18 @@
       </p:sp>
       <p:sp>
         <p:nvSpPr>
-          <p:cNvPr id="15" name="Rounded Rectangle 14"/>
+          <p:cNvPr id="18" name="Rounded Rectangle 17"/>
           <p:cNvSpPr/>
           <p:nvPr/>
         </p:nvSpPr>
         <p:spPr>
           <a:xfrm>
-            <a:off x="841248" y="4206240"/>
-            <a:ext cx="5715000" cy="530352"/>
+            <a:off x="6254496" y="3328416"/>
+            <a:ext cx="5138928" cy="786384"/>
           </a:xfrm>
           <a:prstGeom prst="roundRect">
             <a:avLst>
-              <a:gd name="adj" fmla="val 6000"/>
+              <a:gd name="adj" fmla="val 7000"/>
             </a:avLst>
           </a:prstGeom>
           <a:solidFill>
@@ -10203,9 +11009,55 @@
           </a:p>
         </p:txBody>
       </p:sp>
+      <p:sp>
+        <p:nvSpPr>
+          <p:cNvPr id="19" name="Rounded Rectangle 18"/>
+          <p:cNvSpPr/>
+          <p:nvPr/>
+        </p:nvSpPr>
+        <p:spPr>
+          <a:xfrm>
+            <a:off x="6400800" y="3465576"/>
+            <a:ext cx="512064" cy="512064"/>
+          </a:xfrm>
+          <a:prstGeom prst="roundRect">
+            <a:avLst>
+              <a:gd name="adj" fmla="val 26000"/>
+            </a:avLst>
+          </a:prstGeom>
+          <a:solidFill>
+            <a:srgbClr val="EE0000"/>
+          </a:solidFill>
+          <a:ln>
+            <a:noFill/>
+          </a:ln>
+          <a:effectLst/>
+        </p:spPr>
+        <p:style>
+          <a:lnRef idx="1">
+            <a:schemeClr val="accent1"/>
+          </a:lnRef>
+          <a:fillRef idx="3">
+            <a:schemeClr val="accent1"/>
+          </a:fillRef>
+          <a:effectRef idx="2">
+            <a:schemeClr val="accent1"/>
+          </a:effectRef>
+          <a:fontRef idx="minor">
+            <a:schemeClr val="lt1"/>
+          </a:fontRef>
+        </p:style>
+        <p:txBody>
+          <a:bodyPr rtlCol="0" anchor="ctr"/>
+          <a:lstStyle/>
+          <a:p>
+            <a:pPr algn="ctr"/>
+          </a:p>
+        </p:txBody>
+      </p:sp>
       <p:pic>
         <p:nvPicPr>
-          <p:cNvPr id="16" name="Picture 15" descr="check_steel.png"/>
+          <p:cNvPr id="20" name="Picture 19" descr="check_white.png"/>
           <p:cNvPicPr>
             <a:picLocks noChangeAspect="1"/>
           </p:cNvPicPr>
@@ -10219,8 +11071,8 @@
         </p:blipFill>
         <p:spPr>
           <a:xfrm>
-            <a:off x="987552" y="4352544"/>
-            <a:ext cx="237744" cy="237744"/>
+            <a:off x="6523695" y="3588471"/>
+            <a:ext cx="266273" cy="266273"/>
           </a:xfrm>
           <a:prstGeom prst="rect">
             <a:avLst/>
@@ -10229,14 +11081,14 @@
       </p:pic>
       <p:sp>
         <p:nvSpPr>
-          <p:cNvPr id="17" name="TextBox 16"/>
+          <p:cNvPr id="21" name="TextBox 20"/>
           <p:cNvSpPr txBox="1"/>
           <p:nvPr/>
         </p:nvSpPr>
         <p:spPr>
           <a:xfrm>
-            <a:off x="1353312" y="4206240"/>
-            <a:ext cx="5029200" cy="530352"/>
+            <a:off x="7040880" y="3328416"/>
+            <a:ext cx="4206240" cy="786384"/>
           </a:xfrm>
           <a:prstGeom prst="rect">
             <a:avLst/>
@@ -10261,7 +11113,7 @@
               </a:spcAft>
             </a:pPr>
             <a:r>
-              <a:rPr sz="1200" b="0">
+              <a:rPr sz="1150" b="0">
                 <a:solidFill>
                   <a:srgbClr val="1A1A1A"/>
                 </a:solidFill>
@@ -10274,18 +11126,18 @@
       </p:sp>
       <p:sp>
         <p:nvSpPr>
-          <p:cNvPr id="18" name="Rounded Rectangle 17"/>
+          <p:cNvPr id="22" name="Rounded Rectangle 21"/>
           <p:cNvSpPr/>
           <p:nvPr/>
         </p:nvSpPr>
         <p:spPr>
           <a:xfrm>
-            <a:off x="841248" y="4809744"/>
-            <a:ext cx="5715000" cy="530352"/>
+            <a:off x="841248" y="4261104"/>
+            <a:ext cx="5138928" cy="786384"/>
           </a:xfrm>
           <a:prstGeom prst="roundRect">
             <a:avLst>
-              <a:gd name="adj" fmla="val 6000"/>
+              <a:gd name="adj" fmla="val 7000"/>
             </a:avLst>
           </a:prstGeom>
           <a:solidFill>
@@ -10320,9 +11172,55 @@
           </a:p>
         </p:txBody>
       </p:sp>
+      <p:sp>
+        <p:nvSpPr>
+          <p:cNvPr id="23" name="Rounded Rectangle 22"/>
+          <p:cNvSpPr/>
+          <p:nvPr/>
+        </p:nvSpPr>
+        <p:spPr>
+          <a:xfrm>
+            <a:off x="987552" y="4398264"/>
+            <a:ext cx="512064" cy="512064"/>
+          </a:xfrm>
+          <a:prstGeom prst="roundRect">
+            <a:avLst>
+              <a:gd name="adj" fmla="val 26000"/>
+            </a:avLst>
+          </a:prstGeom>
+          <a:solidFill>
+            <a:srgbClr val="EE0000"/>
+          </a:solidFill>
+          <a:ln>
+            <a:noFill/>
+          </a:ln>
+          <a:effectLst/>
+        </p:spPr>
+        <p:style>
+          <a:lnRef idx="1">
+            <a:schemeClr val="accent1"/>
+          </a:lnRef>
+          <a:fillRef idx="3">
+            <a:schemeClr val="accent1"/>
+          </a:fillRef>
+          <a:effectRef idx="2">
+            <a:schemeClr val="accent1"/>
+          </a:effectRef>
+          <a:fontRef idx="minor">
+            <a:schemeClr val="lt1"/>
+          </a:fontRef>
+        </p:style>
+        <p:txBody>
+          <a:bodyPr rtlCol="0" anchor="ctr"/>
+          <a:lstStyle/>
+          <a:p>
+            <a:pPr algn="ctr"/>
+          </a:p>
+        </p:txBody>
+      </p:sp>
       <p:pic>
         <p:nvPicPr>
-          <p:cNvPr id="19" name="Picture 18" descr="check_steel.png"/>
+          <p:cNvPr id="24" name="Picture 23" descr="check_white.png"/>
           <p:cNvPicPr>
             <a:picLocks noChangeAspect="1"/>
           </p:cNvPicPr>
@@ -10336,8 +11234,8 @@
         </p:blipFill>
         <p:spPr>
           <a:xfrm>
-            <a:off x="987552" y="4956048"/>
-            <a:ext cx="237744" cy="237744"/>
+            <a:off x="1110447" y="4521159"/>
+            <a:ext cx="266273" cy="266273"/>
           </a:xfrm>
           <a:prstGeom prst="rect">
             <a:avLst/>
@@ -10346,14 +11244,14 @@
       </p:pic>
       <p:sp>
         <p:nvSpPr>
-          <p:cNvPr id="20" name="TextBox 19"/>
+          <p:cNvPr id="25" name="TextBox 24"/>
           <p:cNvSpPr txBox="1"/>
           <p:nvPr/>
         </p:nvSpPr>
         <p:spPr>
           <a:xfrm>
-            <a:off x="1353312" y="4809744"/>
-            <a:ext cx="5029200" cy="530352"/>
+            <a:off x="1627632" y="4261104"/>
+            <a:ext cx="4206240" cy="786384"/>
           </a:xfrm>
           <a:prstGeom prst="rect">
             <a:avLst/>
@@ -10378,221 +11276,13 @@
               </a:spcAft>
             </a:pPr>
             <a:r>
-              <a:rPr sz="1200" b="0">
+              <a:rPr sz="1150" b="0">
                 <a:solidFill>
                   <a:srgbClr val="1A1A1A"/>
                 </a:solidFill>
                 <a:latin typeface="Red Hat Text"/>
               </a:rPr>
               <a:t>A PDB makes a node drain wait its turn</a:t>
-            </a:r>
-          </a:p>
-        </p:txBody>
-      </p:sp>
-      <p:sp>
-        <p:nvSpPr>
-          <p:cNvPr id="21" name="Rounded Rectangle 20"/>
-          <p:cNvSpPr/>
-          <p:nvPr/>
-        </p:nvSpPr>
-        <p:spPr>
-          <a:xfrm>
-            <a:off x="6812280" y="2395728"/>
-            <a:ext cx="4538167" cy="2944368"/>
-          </a:xfrm>
-          <a:prstGeom prst="roundRect">
-            <a:avLst>
-              <a:gd name="adj" fmla="val 4000"/>
-            </a:avLst>
-          </a:prstGeom>
-          <a:solidFill>
-            <a:srgbClr val="FFFFFF"/>
-          </a:solidFill>
-          <a:ln w="15240">
-            <a:solidFill>
-              <a:srgbClr val="DDE1E6"/>
-            </a:solidFill>
-          </a:ln>
-          <a:effectLst/>
-        </p:spPr>
-        <p:style>
-          <a:lnRef idx="1">
-            <a:schemeClr val="accent1"/>
-          </a:lnRef>
-          <a:fillRef idx="3">
-            <a:schemeClr val="accent1"/>
-          </a:fillRef>
-          <a:effectRef idx="2">
-            <a:schemeClr val="accent1"/>
-          </a:effectRef>
-          <a:fontRef idx="minor">
-            <a:schemeClr val="lt1"/>
-          </a:fontRef>
-        </p:style>
-        <p:txBody>
-          <a:bodyPr rtlCol="0" anchor="ctr"/>
-          <a:lstStyle/>
-          <a:p>
-            <a:pPr algn="ctr"/>
-          </a:p>
-        </p:txBody>
-      </p:sp>
-      <p:sp>
-        <p:nvSpPr>
-          <p:cNvPr id="22" name="Rounded Rectangle 21"/>
-          <p:cNvSpPr/>
-          <p:nvPr/>
-        </p:nvSpPr>
-        <p:spPr>
-          <a:xfrm>
-            <a:off x="7013448" y="2596896"/>
-            <a:ext cx="1298448" cy="310896"/>
-          </a:xfrm>
-          <a:prstGeom prst="roundRect">
-            <a:avLst>
-              <a:gd name="adj" fmla="val 50000"/>
-            </a:avLst>
-          </a:prstGeom>
-          <a:solidFill>
-            <a:srgbClr val="FCECEC"/>
-          </a:solidFill>
-          <a:ln>
-            <a:noFill/>
-          </a:ln>
-          <a:effectLst/>
-        </p:spPr>
-        <p:style>
-          <a:lnRef idx="1">
-            <a:schemeClr val="accent1"/>
-          </a:lnRef>
-          <a:fillRef idx="3">
-            <a:schemeClr val="accent1"/>
-          </a:fillRef>
-          <a:effectRef idx="2">
-            <a:schemeClr val="accent1"/>
-          </a:effectRef>
-          <a:fontRef idx="minor">
-            <a:schemeClr val="lt1"/>
-          </a:fontRef>
-        </p:style>
-        <p:txBody>
-          <a:bodyPr rtlCol="0" anchor="ctr"/>
-          <a:lstStyle/>
-          <a:p>
-            <a:pPr algn="ctr"/>
-          </a:p>
-        </p:txBody>
-      </p:sp>
-      <p:sp>
-        <p:nvSpPr>
-          <p:cNvPr id="23" name="TextBox 22"/>
-          <p:cNvSpPr txBox="1"/>
-          <p:nvPr/>
-        </p:nvSpPr>
-        <p:spPr>
-          <a:xfrm>
-            <a:off x="7013448" y="2596896"/>
-            <a:ext cx="1298448" cy="310896"/>
-          </a:xfrm>
-          <a:prstGeom prst="rect">
-            <a:avLst/>
-          </a:prstGeom>
-          <a:noFill/>
-        </p:spPr>
-        <p:txBody>
-          <a:bodyPr wrap="none" anchor="ctr" lIns="0" rIns="0" tIns="0" bIns="0">
-            <a:spAutoFit/>
-          </a:bodyPr>
-          <a:lstStyle/>
-          <a:p>
-            <a:pPr algn="ctr">
-              <a:lnSpc>
-                <a:spcPct val="106000"/>
-              </a:lnSpc>
-              <a:spcBef>
-                <a:spcPts val="0"/>
-              </a:spcBef>
-              <a:spcAft>
-                <a:spcPts val="0"/>
-              </a:spcAft>
-            </a:pPr>
-            <a:r>
-              <a:rPr sz="850" b="1">
-                <a:solidFill>
-                  <a:srgbClr val="B80000"/>
-                </a:solidFill>
-                <a:latin typeface="Red Hat Display"/>
-              </a:rPr>
-              <a:t>MEDIA PASS</a:t>
-            </a:r>
-          </a:p>
-        </p:txBody>
-      </p:sp>
-      <p:pic>
-        <p:nvPicPr>
-          <p:cNvPr id="24" name="Picture 23" descr="eye_slate.png"/>
-          <p:cNvPicPr>
-            <a:picLocks noChangeAspect="1"/>
-          </p:cNvPicPr>
-          <p:nvPr/>
-        </p:nvPicPr>
-        <p:blipFill>
-          <a:blip r:embed="rId4"/>
-          <a:stretch>
-            <a:fillRect/>
-          </a:stretch>
-        </p:blipFill>
-        <p:spPr>
-          <a:xfrm>
-            <a:off x="8843619" y="3108960"/>
-            <a:ext cx="475488" cy="475488"/>
-          </a:xfrm>
-          <a:prstGeom prst="rect">
-            <a:avLst/>
-          </a:prstGeom>
-        </p:spPr>
-      </p:pic>
-      <p:sp>
-        <p:nvSpPr>
-          <p:cNvPr id="25" name="TextBox 24"/>
-          <p:cNvSpPr txBox="1"/>
-          <p:nvPr/>
-        </p:nvSpPr>
-        <p:spPr>
-          <a:xfrm>
-            <a:off x="7050024" y="3721608"/>
-            <a:ext cx="4062679" cy="1481328"/>
-          </a:xfrm>
-          <a:prstGeom prst="rect">
-            <a:avLst/>
-          </a:prstGeom>
-          <a:noFill/>
-        </p:spPr>
-        <p:txBody>
-          <a:bodyPr wrap="square" anchor="t" lIns="0" rIns="0" tIns="0" bIns="0">
-            <a:spAutoFit/>
-          </a:bodyPr>
-          <a:lstStyle/>
-          <a:p>
-            <a:pPr algn="l">
-              <a:lnSpc>
-                <a:spcPct val="120000"/>
-              </a:lnSpc>
-              <a:spcBef>
-                <a:spcPts val="0"/>
-              </a:spcBef>
-              <a:spcAft>
-                <a:spcPts val="0"/>
-              </a:spcAft>
-            </a:pPr>
-            <a:r>
-              <a:rPr sz="950" b="0">
-                <a:solidFill>
-                  <a:srgbClr val="8A9099"/>
-                </a:solidFill>
-                <a:latin typeface="Red Hat Text"/>
-              </a:rPr>
-              <a:t>Two panels — top "maxUnavailable:0" with a flat "3/3 ready" line through a rollout; bottom a new pod's "drop-and-create on boot" arrow wiping a shared database while an old pod still reads it, labelled "data plane, at startup."</a:t>
             </a:r>
           </a:p>
         </p:txBody>
@@ -10900,11 +11590,11 @@
         <p:spPr>
           <a:xfrm>
             <a:off x="841248" y="2395728"/>
-            <a:ext cx="5715000" cy="530352"/>
+            <a:ext cx="5138928" cy="786384"/>
           </a:xfrm>
           <a:prstGeom prst="roundRect">
             <a:avLst>
-              <a:gd name="adj" fmla="val 6000"/>
+              <a:gd name="adj" fmla="val 7000"/>
             </a:avLst>
           </a:prstGeom>
           <a:solidFill>
@@ -10939,9 +11629,55 @@
           </a:p>
         </p:txBody>
       </p:sp>
+      <p:sp>
+        <p:nvSpPr>
+          <p:cNvPr id="7" name="Rounded Rectangle 6"/>
+          <p:cNvSpPr/>
+          <p:nvPr/>
+        </p:nvSpPr>
+        <p:spPr>
+          <a:xfrm>
+            <a:off x="987552" y="2532888"/>
+            <a:ext cx="512064" cy="512064"/>
+          </a:xfrm>
+          <a:prstGeom prst="roundRect">
+            <a:avLst>
+              <a:gd name="adj" fmla="val 26000"/>
+            </a:avLst>
+          </a:prstGeom>
+          <a:solidFill>
+            <a:srgbClr val="EE0000"/>
+          </a:solidFill>
+          <a:ln>
+            <a:noFill/>
+          </a:ln>
+          <a:effectLst/>
+        </p:spPr>
+        <p:style>
+          <a:lnRef idx="1">
+            <a:schemeClr val="accent1"/>
+          </a:lnRef>
+          <a:fillRef idx="3">
+            <a:schemeClr val="accent1"/>
+          </a:fillRef>
+          <a:effectRef idx="2">
+            <a:schemeClr val="accent1"/>
+          </a:effectRef>
+          <a:fontRef idx="minor">
+            <a:schemeClr val="lt1"/>
+          </a:fontRef>
+        </p:style>
+        <p:txBody>
+          <a:bodyPr rtlCol="0" anchor="ctr"/>
+          <a:lstStyle/>
+          <a:p>
+            <a:pPr algn="ctr"/>
+          </a:p>
+        </p:txBody>
+      </p:sp>
       <p:pic>
         <p:nvPicPr>
-          <p:cNvPr id="7" name="Picture 6" descr="check_steel.png"/>
+          <p:cNvPr id="8" name="Picture 7" descr="check_white.png"/>
           <p:cNvPicPr>
             <a:picLocks noChangeAspect="1"/>
           </p:cNvPicPr>
@@ -10955,8 +11691,8 @@
         </p:blipFill>
         <p:spPr>
           <a:xfrm>
-            <a:off x="987552" y="2542032"/>
-            <a:ext cx="237744" cy="237744"/>
+            <a:off x="1110447" y="2655783"/>
+            <a:ext cx="266273" cy="266273"/>
           </a:xfrm>
           <a:prstGeom prst="rect">
             <a:avLst/>
@@ -10965,14 +11701,14 @@
       </p:pic>
       <p:sp>
         <p:nvSpPr>
-          <p:cNvPr id="8" name="TextBox 7"/>
+          <p:cNvPr id="9" name="TextBox 8"/>
           <p:cNvSpPr txBox="1"/>
           <p:nvPr/>
         </p:nvSpPr>
         <p:spPr>
           <a:xfrm>
-            <a:off x="1353312" y="2395728"/>
-            <a:ext cx="5029200" cy="530352"/>
+            <a:off x="1627632" y="2395728"/>
+            <a:ext cx="4206240" cy="786384"/>
           </a:xfrm>
           <a:prstGeom prst="rect">
             <a:avLst/>
@@ -10997,7 +11733,7 @@
               </a:spcAft>
             </a:pPr>
             <a:r>
-              <a:rPr sz="1200" b="0">
+              <a:rPr sz="1150" b="0">
                 <a:solidFill>
                   <a:srgbClr val="1A1A1A"/>
                 </a:solidFill>
@@ -11010,18 +11746,18 @@
       </p:sp>
       <p:sp>
         <p:nvSpPr>
-          <p:cNvPr id="9" name="Rounded Rectangle 8"/>
+          <p:cNvPr id="10" name="Rounded Rectangle 9"/>
           <p:cNvSpPr/>
           <p:nvPr/>
         </p:nvSpPr>
         <p:spPr>
           <a:xfrm>
-            <a:off x="841248" y="2999232"/>
-            <a:ext cx="5715000" cy="530352"/>
+            <a:off x="6254496" y="2395728"/>
+            <a:ext cx="5138928" cy="786384"/>
           </a:xfrm>
           <a:prstGeom prst="roundRect">
             <a:avLst>
-              <a:gd name="adj" fmla="val 6000"/>
+              <a:gd name="adj" fmla="val 7000"/>
             </a:avLst>
           </a:prstGeom>
           <a:solidFill>
@@ -11056,9 +11792,55 @@
           </a:p>
         </p:txBody>
       </p:sp>
+      <p:sp>
+        <p:nvSpPr>
+          <p:cNvPr id="11" name="Rounded Rectangle 10"/>
+          <p:cNvSpPr/>
+          <p:nvPr/>
+        </p:nvSpPr>
+        <p:spPr>
+          <a:xfrm>
+            <a:off x="6400800" y="2532888"/>
+            <a:ext cx="512064" cy="512064"/>
+          </a:xfrm>
+          <a:prstGeom prst="roundRect">
+            <a:avLst>
+              <a:gd name="adj" fmla="val 26000"/>
+            </a:avLst>
+          </a:prstGeom>
+          <a:solidFill>
+            <a:srgbClr val="EE0000"/>
+          </a:solidFill>
+          <a:ln>
+            <a:noFill/>
+          </a:ln>
+          <a:effectLst/>
+        </p:spPr>
+        <p:style>
+          <a:lnRef idx="1">
+            <a:schemeClr val="accent1"/>
+          </a:lnRef>
+          <a:fillRef idx="3">
+            <a:schemeClr val="accent1"/>
+          </a:fillRef>
+          <a:effectRef idx="2">
+            <a:schemeClr val="accent1"/>
+          </a:effectRef>
+          <a:fontRef idx="minor">
+            <a:schemeClr val="lt1"/>
+          </a:fontRef>
+        </p:style>
+        <p:txBody>
+          <a:bodyPr rtlCol="0" anchor="ctr"/>
+          <a:lstStyle/>
+          <a:p>
+            <a:pPr algn="ctr"/>
+          </a:p>
+        </p:txBody>
+      </p:sp>
       <p:pic>
         <p:nvPicPr>
-          <p:cNvPr id="10" name="Picture 9" descr="check_steel.png"/>
+          <p:cNvPr id="12" name="Picture 11" descr="check_white.png"/>
           <p:cNvPicPr>
             <a:picLocks noChangeAspect="1"/>
           </p:cNvPicPr>
@@ -11072,8 +11854,8 @@
         </p:blipFill>
         <p:spPr>
           <a:xfrm>
-            <a:off x="987552" y="3145536"/>
-            <a:ext cx="237744" cy="237744"/>
+            <a:off x="6523695" y="2655783"/>
+            <a:ext cx="266273" cy="266273"/>
           </a:xfrm>
           <a:prstGeom prst="rect">
             <a:avLst/>
@@ -11082,14 +11864,14 @@
       </p:pic>
       <p:sp>
         <p:nvSpPr>
-          <p:cNvPr id="11" name="TextBox 10"/>
+          <p:cNvPr id="13" name="TextBox 12"/>
           <p:cNvSpPr txBox="1"/>
           <p:nvPr/>
         </p:nvSpPr>
         <p:spPr>
           <a:xfrm>
-            <a:off x="1353312" y="2999232"/>
-            <a:ext cx="5029200" cy="530352"/>
+            <a:off x="7040880" y="2395728"/>
+            <a:ext cx="4206240" cy="786384"/>
           </a:xfrm>
           <a:prstGeom prst="rect">
             <a:avLst/>
@@ -11114,7 +11896,7 @@
               </a:spcAft>
             </a:pPr>
             <a:r>
-              <a:rPr sz="1200" b="0">
+              <a:rPr sz="1150" b="0">
                 <a:solidFill>
                   <a:srgbClr val="1A1A1A"/>
                 </a:solidFill>
@@ -11127,18 +11909,18 @@
       </p:sp>
       <p:sp>
         <p:nvSpPr>
-          <p:cNvPr id="12" name="Rounded Rectangle 11"/>
+          <p:cNvPr id="14" name="Rounded Rectangle 13"/>
           <p:cNvSpPr/>
           <p:nvPr/>
         </p:nvSpPr>
         <p:spPr>
           <a:xfrm>
-            <a:off x="841248" y="3602736"/>
-            <a:ext cx="5715000" cy="530352"/>
+            <a:off x="841248" y="3328416"/>
+            <a:ext cx="5138928" cy="786384"/>
           </a:xfrm>
           <a:prstGeom prst="roundRect">
             <a:avLst>
-              <a:gd name="adj" fmla="val 6000"/>
+              <a:gd name="adj" fmla="val 7000"/>
             </a:avLst>
           </a:prstGeom>
           <a:solidFill>
@@ -11173,9 +11955,55 @@
           </a:p>
         </p:txBody>
       </p:sp>
+      <p:sp>
+        <p:nvSpPr>
+          <p:cNvPr id="15" name="Rounded Rectangle 14"/>
+          <p:cNvSpPr/>
+          <p:nvPr/>
+        </p:nvSpPr>
+        <p:spPr>
+          <a:xfrm>
+            <a:off x="987552" y="3465576"/>
+            <a:ext cx="512064" cy="512064"/>
+          </a:xfrm>
+          <a:prstGeom prst="roundRect">
+            <a:avLst>
+              <a:gd name="adj" fmla="val 26000"/>
+            </a:avLst>
+          </a:prstGeom>
+          <a:solidFill>
+            <a:srgbClr val="EE0000"/>
+          </a:solidFill>
+          <a:ln>
+            <a:noFill/>
+          </a:ln>
+          <a:effectLst/>
+        </p:spPr>
+        <p:style>
+          <a:lnRef idx="1">
+            <a:schemeClr val="accent1"/>
+          </a:lnRef>
+          <a:fillRef idx="3">
+            <a:schemeClr val="accent1"/>
+          </a:fillRef>
+          <a:effectRef idx="2">
+            <a:schemeClr val="accent1"/>
+          </a:effectRef>
+          <a:fontRef idx="minor">
+            <a:schemeClr val="lt1"/>
+          </a:fontRef>
+        </p:style>
+        <p:txBody>
+          <a:bodyPr rtlCol="0" anchor="ctr"/>
+          <a:lstStyle/>
+          <a:p>
+            <a:pPr algn="ctr"/>
+          </a:p>
+        </p:txBody>
+      </p:sp>
       <p:pic>
         <p:nvPicPr>
-          <p:cNvPr id="13" name="Picture 12" descr="check_steel.png"/>
+          <p:cNvPr id="16" name="Picture 15" descr="check_white.png"/>
           <p:cNvPicPr>
             <a:picLocks noChangeAspect="1"/>
           </p:cNvPicPr>
@@ -11189,8 +12017,8 @@
         </p:blipFill>
         <p:spPr>
           <a:xfrm>
-            <a:off x="987552" y="3749040"/>
-            <a:ext cx="237744" cy="237744"/>
+            <a:off x="1110447" y="3588471"/>
+            <a:ext cx="266273" cy="266273"/>
           </a:xfrm>
           <a:prstGeom prst="rect">
             <a:avLst/>
@@ -11199,14 +12027,14 @@
       </p:pic>
       <p:sp>
         <p:nvSpPr>
-          <p:cNvPr id="14" name="TextBox 13"/>
+          <p:cNvPr id="17" name="TextBox 16"/>
           <p:cNvSpPr txBox="1"/>
           <p:nvPr/>
         </p:nvSpPr>
         <p:spPr>
           <a:xfrm>
-            <a:off x="1353312" y="3602736"/>
-            <a:ext cx="5029200" cy="530352"/>
+            <a:off x="1627632" y="3328416"/>
+            <a:ext cx="4206240" cy="786384"/>
           </a:xfrm>
           <a:prstGeom prst="rect">
             <a:avLst/>
@@ -11231,7 +12059,7 @@
               </a:spcAft>
             </a:pPr>
             <a:r>
-              <a:rPr sz="1200" b="0">
+              <a:rPr sz="1150" b="0">
                 <a:solidFill>
                   <a:srgbClr val="1A1A1A"/>
                 </a:solidFill>
@@ -11244,18 +12072,18 @@
       </p:sp>
       <p:sp>
         <p:nvSpPr>
-          <p:cNvPr id="15" name="Rounded Rectangle 14"/>
+          <p:cNvPr id="18" name="Rounded Rectangle 17"/>
           <p:cNvSpPr/>
           <p:nvPr/>
         </p:nvSpPr>
         <p:spPr>
           <a:xfrm>
-            <a:off x="841248" y="4206240"/>
-            <a:ext cx="5715000" cy="530352"/>
+            <a:off x="6254496" y="3328416"/>
+            <a:ext cx="5138928" cy="786384"/>
           </a:xfrm>
           <a:prstGeom prst="roundRect">
             <a:avLst>
-              <a:gd name="adj" fmla="val 6000"/>
+              <a:gd name="adj" fmla="val 7000"/>
             </a:avLst>
           </a:prstGeom>
           <a:solidFill>
@@ -11290,9 +12118,55 @@
           </a:p>
         </p:txBody>
       </p:sp>
+      <p:sp>
+        <p:nvSpPr>
+          <p:cNvPr id="19" name="Rounded Rectangle 18"/>
+          <p:cNvSpPr/>
+          <p:nvPr/>
+        </p:nvSpPr>
+        <p:spPr>
+          <a:xfrm>
+            <a:off x="6400800" y="3465576"/>
+            <a:ext cx="512064" cy="512064"/>
+          </a:xfrm>
+          <a:prstGeom prst="roundRect">
+            <a:avLst>
+              <a:gd name="adj" fmla="val 26000"/>
+            </a:avLst>
+          </a:prstGeom>
+          <a:solidFill>
+            <a:srgbClr val="EE0000"/>
+          </a:solidFill>
+          <a:ln>
+            <a:noFill/>
+          </a:ln>
+          <a:effectLst/>
+        </p:spPr>
+        <p:style>
+          <a:lnRef idx="1">
+            <a:schemeClr val="accent1"/>
+          </a:lnRef>
+          <a:fillRef idx="3">
+            <a:schemeClr val="accent1"/>
+          </a:fillRef>
+          <a:effectRef idx="2">
+            <a:schemeClr val="accent1"/>
+          </a:effectRef>
+          <a:fontRef idx="minor">
+            <a:schemeClr val="lt1"/>
+          </a:fontRef>
+        </p:style>
+        <p:txBody>
+          <a:bodyPr rtlCol="0" anchor="ctr"/>
+          <a:lstStyle/>
+          <a:p>
+            <a:pPr algn="ctr"/>
+          </a:p>
+        </p:txBody>
+      </p:sp>
       <p:pic>
         <p:nvPicPr>
-          <p:cNvPr id="16" name="Picture 15" descr="check_steel.png"/>
+          <p:cNvPr id="20" name="Picture 19" descr="check_white.png"/>
           <p:cNvPicPr>
             <a:picLocks noChangeAspect="1"/>
           </p:cNvPicPr>
@@ -11306,8 +12180,8 @@
         </p:blipFill>
         <p:spPr>
           <a:xfrm>
-            <a:off x="987552" y="4352544"/>
-            <a:ext cx="237744" cy="237744"/>
+            <a:off x="6523695" y="3588471"/>
+            <a:ext cx="266273" cy="266273"/>
           </a:xfrm>
           <a:prstGeom prst="rect">
             <a:avLst/>
@@ -11316,14 +12190,14 @@
       </p:pic>
       <p:sp>
         <p:nvSpPr>
-          <p:cNvPr id="17" name="TextBox 16"/>
+          <p:cNvPr id="21" name="TextBox 20"/>
           <p:cNvSpPr txBox="1"/>
           <p:nvPr/>
         </p:nvSpPr>
         <p:spPr>
           <a:xfrm>
-            <a:off x="1353312" y="4206240"/>
-            <a:ext cx="5029200" cy="530352"/>
+            <a:off x="7040880" y="3328416"/>
+            <a:ext cx="4206240" cy="786384"/>
           </a:xfrm>
           <a:prstGeom prst="rect">
             <a:avLst/>
@@ -11348,7 +12222,7 @@
               </a:spcAft>
             </a:pPr>
             <a:r>
-              <a:rPr sz="1200" b="0">
+              <a:rPr sz="1150" b="0">
                 <a:solidFill>
                   <a:srgbClr val="1A1A1A"/>
                 </a:solidFill>
@@ -11361,18 +12235,18 @@
       </p:sp>
       <p:sp>
         <p:nvSpPr>
-          <p:cNvPr id="18" name="Rounded Rectangle 17"/>
+          <p:cNvPr id="22" name="Rounded Rectangle 21"/>
           <p:cNvSpPr/>
           <p:nvPr/>
         </p:nvSpPr>
         <p:spPr>
           <a:xfrm>
-            <a:off x="841248" y="4809744"/>
-            <a:ext cx="5715000" cy="530352"/>
+            <a:off x="841248" y="4261104"/>
+            <a:ext cx="5138928" cy="786384"/>
           </a:xfrm>
           <a:prstGeom prst="roundRect">
             <a:avLst>
-              <a:gd name="adj" fmla="val 6000"/>
+              <a:gd name="adj" fmla="val 7000"/>
             </a:avLst>
           </a:prstGeom>
           <a:solidFill>
@@ -11407,9 +12281,55 @@
           </a:p>
         </p:txBody>
       </p:sp>
+      <p:sp>
+        <p:nvSpPr>
+          <p:cNvPr id="23" name="Rounded Rectangle 22"/>
+          <p:cNvSpPr/>
+          <p:nvPr/>
+        </p:nvSpPr>
+        <p:spPr>
+          <a:xfrm>
+            <a:off x="987552" y="4398264"/>
+            <a:ext cx="512064" cy="512064"/>
+          </a:xfrm>
+          <a:prstGeom prst="roundRect">
+            <a:avLst>
+              <a:gd name="adj" fmla="val 26000"/>
+            </a:avLst>
+          </a:prstGeom>
+          <a:solidFill>
+            <a:srgbClr val="EE0000"/>
+          </a:solidFill>
+          <a:ln>
+            <a:noFill/>
+          </a:ln>
+          <a:effectLst/>
+        </p:spPr>
+        <p:style>
+          <a:lnRef idx="1">
+            <a:schemeClr val="accent1"/>
+          </a:lnRef>
+          <a:fillRef idx="3">
+            <a:schemeClr val="accent1"/>
+          </a:fillRef>
+          <a:effectRef idx="2">
+            <a:schemeClr val="accent1"/>
+          </a:effectRef>
+          <a:fontRef idx="minor">
+            <a:schemeClr val="lt1"/>
+          </a:fontRef>
+        </p:style>
+        <p:txBody>
+          <a:bodyPr rtlCol="0" anchor="ctr"/>
+          <a:lstStyle/>
+          <a:p>
+            <a:pPr algn="ctr"/>
+          </a:p>
+        </p:txBody>
+      </p:sp>
       <p:pic>
         <p:nvPicPr>
-          <p:cNvPr id="19" name="Picture 18" descr="check_steel.png"/>
+          <p:cNvPr id="24" name="Picture 23" descr="check_white.png"/>
           <p:cNvPicPr>
             <a:picLocks noChangeAspect="1"/>
           </p:cNvPicPr>
@@ -11423,8 +12343,8 @@
         </p:blipFill>
         <p:spPr>
           <a:xfrm>
-            <a:off x="987552" y="4956048"/>
-            <a:ext cx="237744" cy="237744"/>
+            <a:off x="1110447" y="4521159"/>
+            <a:ext cx="266273" cy="266273"/>
           </a:xfrm>
           <a:prstGeom prst="rect">
             <a:avLst/>
@@ -11433,14 +12353,14 @@
       </p:pic>
       <p:sp>
         <p:nvSpPr>
-          <p:cNvPr id="20" name="TextBox 19"/>
+          <p:cNvPr id="25" name="TextBox 24"/>
           <p:cNvSpPr txBox="1"/>
           <p:nvPr/>
         </p:nvSpPr>
         <p:spPr>
           <a:xfrm>
-            <a:off x="1353312" y="4809744"/>
-            <a:ext cx="5029200" cy="530352"/>
+            <a:off x="1627632" y="4261104"/>
+            <a:ext cx="4206240" cy="786384"/>
           </a:xfrm>
           <a:prstGeom prst="rect">
             <a:avLst/>
@@ -11465,221 +12385,13 @@
               </a:spcAft>
             </a:pPr>
             <a:r>
-              <a:rPr sz="1200" b="0">
+              <a:rPr sz="1150" b="0">
                 <a:solidFill>
                   <a:srgbClr val="1A1A1A"/>
                 </a:solidFill>
                 <a:latin typeface="Red Hat Text"/>
               </a:rPr>
               <a:t>You read these; creating a pool is cluster-wide</a:t>
-            </a:r>
-          </a:p>
-        </p:txBody>
-      </p:sp>
-      <p:sp>
-        <p:nvSpPr>
-          <p:cNvPr id="21" name="Rounded Rectangle 20"/>
-          <p:cNvSpPr/>
-          <p:nvPr/>
-        </p:nvSpPr>
-        <p:spPr>
-          <a:xfrm>
-            <a:off x="6812280" y="2395728"/>
-            <a:ext cx="4538167" cy="2944368"/>
-          </a:xfrm>
-          <a:prstGeom prst="roundRect">
-            <a:avLst>
-              <a:gd name="adj" fmla="val 4000"/>
-            </a:avLst>
-          </a:prstGeom>
-          <a:solidFill>
-            <a:srgbClr val="FFFFFF"/>
-          </a:solidFill>
-          <a:ln w="15240">
-            <a:solidFill>
-              <a:srgbClr val="DDE1E6"/>
-            </a:solidFill>
-          </a:ln>
-          <a:effectLst/>
-        </p:spPr>
-        <p:style>
-          <a:lnRef idx="1">
-            <a:schemeClr val="accent1"/>
-          </a:lnRef>
-          <a:fillRef idx="3">
-            <a:schemeClr val="accent1"/>
-          </a:fillRef>
-          <a:effectRef idx="2">
-            <a:schemeClr val="accent1"/>
-          </a:effectRef>
-          <a:fontRef idx="minor">
-            <a:schemeClr val="lt1"/>
-          </a:fontRef>
-        </p:style>
-        <p:txBody>
-          <a:bodyPr rtlCol="0" anchor="ctr"/>
-          <a:lstStyle/>
-          <a:p>
-            <a:pPr algn="ctr"/>
-          </a:p>
-        </p:txBody>
-      </p:sp>
-      <p:sp>
-        <p:nvSpPr>
-          <p:cNvPr id="22" name="Rounded Rectangle 21"/>
-          <p:cNvSpPr/>
-          <p:nvPr/>
-        </p:nvSpPr>
-        <p:spPr>
-          <a:xfrm>
-            <a:off x="7013448" y="2596896"/>
-            <a:ext cx="1298448" cy="310896"/>
-          </a:xfrm>
-          <a:prstGeom prst="roundRect">
-            <a:avLst>
-              <a:gd name="adj" fmla="val 50000"/>
-            </a:avLst>
-          </a:prstGeom>
-          <a:solidFill>
-            <a:srgbClr val="FCECEC"/>
-          </a:solidFill>
-          <a:ln>
-            <a:noFill/>
-          </a:ln>
-          <a:effectLst/>
-        </p:spPr>
-        <p:style>
-          <a:lnRef idx="1">
-            <a:schemeClr val="accent1"/>
-          </a:lnRef>
-          <a:fillRef idx="3">
-            <a:schemeClr val="accent1"/>
-          </a:fillRef>
-          <a:effectRef idx="2">
-            <a:schemeClr val="accent1"/>
-          </a:effectRef>
-          <a:fontRef idx="minor">
-            <a:schemeClr val="lt1"/>
-          </a:fontRef>
-        </p:style>
-        <p:txBody>
-          <a:bodyPr rtlCol="0" anchor="ctr"/>
-          <a:lstStyle/>
-          <a:p>
-            <a:pPr algn="ctr"/>
-          </a:p>
-        </p:txBody>
-      </p:sp>
-      <p:sp>
-        <p:nvSpPr>
-          <p:cNvPr id="23" name="TextBox 22"/>
-          <p:cNvSpPr txBox="1"/>
-          <p:nvPr/>
-        </p:nvSpPr>
-        <p:spPr>
-          <a:xfrm>
-            <a:off x="7013448" y="2596896"/>
-            <a:ext cx="1298448" cy="310896"/>
-          </a:xfrm>
-          <a:prstGeom prst="rect">
-            <a:avLst/>
-          </a:prstGeom>
-          <a:noFill/>
-        </p:spPr>
-        <p:txBody>
-          <a:bodyPr wrap="none" anchor="ctr" lIns="0" rIns="0" tIns="0" bIns="0">
-            <a:spAutoFit/>
-          </a:bodyPr>
-          <a:lstStyle/>
-          <a:p>
-            <a:pPr algn="ctr">
-              <a:lnSpc>
-                <a:spcPct val="106000"/>
-              </a:lnSpc>
-              <a:spcBef>
-                <a:spcPts val="0"/>
-              </a:spcBef>
-              <a:spcAft>
-                <a:spcPts val="0"/>
-              </a:spcAft>
-            </a:pPr>
-            <a:r>
-              <a:rPr sz="850" b="1">
-                <a:solidFill>
-                  <a:srgbClr val="B80000"/>
-                </a:solidFill>
-                <a:latin typeface="Red Hat Display"/>
-              </a:rPr>
-              <a:t>MEDIA PASS</a:t>
-            </a:r>
-          </a:p>
-        </p:txBody>
-      </p:sp>
-      <p:pic>
-        <p:nvPicPr>
-          <p:cNvPr id="24" name="Picture 23" descr="eye_slate.png"/>
-          <p:cNvPicPr>
-            <a:picLocks noChangeAspect="1"/>
-          </p:cNvPicPr>
-          <p:nvPr/>
-        </p:nvPicPr>
-        <p:blipFill>
-          <a:blip r:embed="rId4"/>
-          <a:stretch>
-            <a:fillRect/>
-          </a:stretch>
-        </p:blipFill>
-        <p:spPr>
-          <a:xfrm>
-            <a:off x="8843619" y="3108960"/>
-            <a:ext cx="475488" cy="475488"/>
-          </a:xfrm>
-          <a:prstGeom prst="rect">
-            <a:avLst/>
-          </a:prstGeom>
-        </p:spPr>
-      </p:pic>
-      <p:sp>
-        <p:nvSpPr>
-          <p:cNvPr id="25" name="TextBox 24"/>
-          <p:cNvSpPr txBox="1"/>
-          <p:nvPr/>
-        </p:nvSpPr>
-        <p:spPr>
-          <a:xfrm>
-            <a:off x="7050024" y="3721608"/>
-            <a:ext cx="4062679" cy="1481328"/>
-          </a:xfrm>
-          <a:prstGeom prst="rect">
-            <a:avLst/>
-          </a:prstGeom>
-          <a:noFill/>
-        </p:spPr>
-        <p:txBody>
-          <a:bodyPr wrap="square" anchor="t" lIns="0" rIns="0" tIns="0" bIns="0">
-            <a:spAutoFit/>
-          </a:bodyPr>
-          <a:lstStyle/>
-          <a:p>
-            <a:pPr algn="l">
-              <a:lnSpc>
-                <a:spcPct val="120000"/>
-              </a:lnSpc>
-              <a:spcBef>
-                <a:spcPts val="0"/>
-              </a:spcBef>
-              <a:spcAft>
-                <a:spcPts val="0"/>
-              </a:spcAft>
-            </a:pPr>
-            <a:r>
-              <a:rPr sz="950" b="0">
-                <a:solidFill>
-                  <a:srgbClr val="8A9099"/>
-                </a:solidFill>
-                <a:latin typeface="Red Hat Text"/>
-              </a:rPr>
-              <a:t>A node grid with a DaemonSet agent icon on every node; one agent only on the control-plane row (nodeSelector); a side callout "MachineSet → labels + taints → the pool you target."</a:t>
             </a:r>
           </a:p>
         </p:txBody>
@@ -11987,11 +12699,11 @@
         <p:spPr>
           <a:xfrm>
             <a:off x="841248" y="2395728"/>
-            <a:ext cx="5715000" cy="530352"/>
+            <a:ext cx="5138928" cy="786384"/>
           </a:xfrm>
           <a:prstGeom prst="roundRect">
             <a:avLst>
-              <a:gd name="adj" fmla="val 6000"/>
+              <a:gd name="adj" fmla="val 7000"/>
             </a:avLst>
           </a:prstGeom>
           <a:solidFill>
@@ -12026,9 +12738,55 @@
           </a:p>
         </p:txBody>
       </p:sp>
+      <p:sp>
+        <p:nvSpPr>
+          <p:cNvPr id="7" name="Rounded Rectangle 6"/>
+          <p:cNvSpPr/>
+          <p:nvPr/>
+        </p:nvSpPr>
+        <p:spPr>
+          <a:xfrm>
+            <a:off x="987552" y="2532888"/>
+            <a:ext cx="512064" cy="512064"/>
+          </a:xfrm>
+          <a:prstGeom prst="roundRect">
+            <a:avLst>
+              <a:gd name="adj" fmla="val 26000"/>
+            </a:avLst>
+          </a:prstGeom>
+          <a:solidFill>
+            <a:srgbClr val="EE0000"/>
+          </a:solidFill>
+          <a:ln>
+            <a:noFill/>
+          </a:ln>
+          <a:effectLst/>
+        </p:spPr>
+        <p:style>
+          <a:lnRef idx="1">
+            <a:schemeClr val="accent1"/>
+          </a:lnRef>
+          <a:fillRef idx="3">
+            <a:schemeClr val="accent1"/>
+          </a:fillRef>
+          <a:effectRef idx="2">
+            <a:schemeClr val="accent1"/>
+          </a:effectRef>
+          <a:fontRef idx="minor">
+            <a:schemeClr val="lt1"/>
+          </a:fontRef>
+        </p:style>
+        <p:txBody>
+          <a:bodyPr rtlCol="0" anchor="ctr"/>
+          <a:lstStyle/>
+          <a:p>
+            <a:pPr algn="ctr"/>
+          </a:p>
+        </p:txBody>
+      </p:sp>
       <p:pic>
         <p:nvPicPr>
-          <p:cNvPr id="7" name="Picture 6" descr="check_steel.png"/>
+          <p:cNvPr id="8" name="Picture 7" descr="check_white.png"/>
           <p:cNvPicPr>
             <a:picLocks noChangeAspect="1"/>
           </p:cNvPicPr>
@@ -12042,8 +12800,8 @@
         </p:blipFill>
         <p:spPr>
           <a:xfrm>
-            <a:off x="987552" y="2542032"/>
-            <a:ext cx="237744" cy="237744"/>
+            <a:off x="1110447" y="2655783"/>
+            <a:ext cx="266273" cy="266273"/>
           </a:xfrm>
           <a:prstGeom prst="rect">
             <a:avLst/>
@@ -12052,14 +12810,14 @@
       </p:pic>
       <p:sp>
         <p:nvSpPr>
-          <p:cNvPr id="8" name="TextBox 7"/>
+          <p:cNvPr id="9" name="TextBox 8"/>
           <p:cNvSpPr txBox="1"/>
           <p:nvPr/>
         </p:nvSpPr>
         <p:spPr>
           <a:xfrm>
-            <a:off x="1353312" y="2395728"/>
-            <a:ext cx="5029200" cy="530352"/>
+            <a:off x="1627632" y="2395728"/>
+            <a:ext cx="4206240" cy="786384"/>
           </a:xfrm>
           <a:prstGeom prst="rect">
             <a:avLst/>
@@ -12084,7 +12842,7 @@
               </a:spcAft>
             </a:pPr>
             <a:r>
-              <a:rPr sz="1200" b="0">
+              <a:rPr sz="1150" b="0">
                 <a:solidFill>
                   <a:srgbClr val="1A1A1A"/>
                 </a:solidFill>
@@ -12097,18 +12855,18 @@
       </p:sp>
       <p:sp>
         <p:nvSpPr>
-          <p:cNvPr id="9" name="Rounded Rectangle 8"/>
+          <p:cNvPr id="10" name="Rounded Rectangle 9"/>
           <p:cNvSpPr/>
           <p:nvPr/>
         </p:nvSpPr>
         <p:spPr>
           <a:xfrm>
-            <a:off x="841248" y="2999232"/>
-            <a:ext cx="5715000" cy="530352"/>
+            <a:off x="6254496" y="2395728"/>
+            <a:ext cx="5138928" cy="786384"/>
           </a:xfrm>
           <a:prstGeom prst="roundRect">
             <a:avLst>
-              <a:gd name="adj" fmla="val 6000"/>
+              <a:gd name="adj" fmla="val 7000"/>
             </a:avLst>
           </a:prstGeom>
           <a:solidFill>
@@ -12143,9 +12901,55 @@
           </a:p>
         </p:txBody>
       </p:sp>
+      <p:sp>
+        <p:nvSpPr>
+          <p:cNvPr id="11" name="Rounded Rectangle 10"/>
+          <p:cNvSpPr/>
+          <p:nvPr/>
+        </p:nvSpPr>
+        <p:spPr>
+          <a:xfrm>
+            <a:off x="6400800" y="2532888"/>
+            <a:ext cx="512064" cy="512064"/>
+          </a:xfrm>
+          <a:prstGeom prst="roundRect">
+            <a:avLst>
+              <a:gd name="adj" fmla="val 26000"/>
+            </a:avLst>
+          </a:prstGeom>
+          <a:solidFill>
+            <a:srgbClr val="EE0000"/>
+          </a:solidFill>
+          <a:ln>
+            <a:noFill/>
+          </a:ln>
+          <a:effectLst/>
+        </p:spPr>
+        <p:style>
+          <a:lnRef idx="1">
+            <a:schemeClr val="accent1"/>
+          </a:lnRef>
+          <a:fillRef idx="3">
+            <a:schemeClr val="accent1"/>
+          </a:fillRef>
+          <a:effectRef idx="2">
+            <a:schemeClr val="accent1"/>
+          </a:effectRef>
+          <a:fontRef idx="minor">
+            <a:schemeClr val="lt1"/>
+          </a:fontRef>
+        </p:style>
+        <p:txBody>
+          <a:bodyPr rtlCol="0" anchor="ctr"/>
+          <a:lstStyle/>
+          <a:p>
+            <a:pPr algn="ctr"/>
+          </a:p>
+        </p:txBody>
+      </p:sp>
       <p:pic>
         <p:nvPicPr>
-          <p:cNvPr id="10" name="Picture 9" descr="check_steel.png"/>
+          <p:cNvPr id="12" name="Picture 11" descr="check_white.png"/>
           <p:cNvPicPr>
             <a:picLocks noChangeAspect="1"/>
           </p:cNvPicPr>
@@ -12159,8 +12963,8 @@
         </p:blipFill>
         <p:spPr>
           <a:xfrm>
-            <a:off x="987552" y="3145536"/>
-            <a:ext cx="237744" cy="237744"/>
+            <a:off x="6523695" y="2655783"/>
+            <a:ext cx="266273" cy="266273"/>
           </a:xfrm>
           <a:prstGeom prst="rect">
             <a:avLst/>
@@ -12169,14 +12973,14 @@
       </p:pic>
       <p:sp>
         <p:nvSpPr>
-          <p:cNvPr id="11" name="TextBox 10"/>
+          <p:cNvPr id="13" name="TextBox 12"/>
           <p:cNvSpPr txBox="1"/>
           <p:nvPr/>
         </p:nvSpPr>
         <p:spPr>
           <a:xfrm>
-            <a:off x="1353312" y="2999232"/>
-            <a:ext cx="5029200" cy="530352"/>
+            <a:off x="7040880" y="2395728"/>
+            <a:ext cx="4206240" cy="786384"/>
           </a:xfrm>
           <a:prstGeom prst="rect">
             <a:avLst/>
@@ -12201,7 +13005,7 @@
               </a:spcAft>
             </a:pPr>
             <a:r>
-              <a:rPr sz="1200" b="0">
+              <a:rPr sz="1150" b="0">
                 <a:solidFill>
                   <a:srgbClr val="1A1A1A"/>
                 </a:solidFill>
@@ -12214,18 +13018,18 @@
       </p:sp>
       <p:sp>
         <p:nvSpPr>
-          <p:cNvPr id="12" name="Rounded Rectangle 11"/>
+          <p:cNvPr id="14" name="Rounded Rectangle 13"/>
           <p:cNvSpPr/>
           <p:nvPr/>
         </p:nvSpPr>
         <p:spPr>
           <a:xfrm>
-            <a:off x="841248" y="3602736"/>
-            <a:ext cx="5715000" cy="530352"/>
+            <a:off x="841248" y="3328416"/>
+            <a:ext cx="5138928" cy="786384"/>
           </a:xfrm>
           <a:prstGeom prst="roundRect">
             <a:avLst>
-              <a:gd name="adj" fmla="val 6000"/>
+              <a:gd name="adj" fmla="val 7000"/>
             </a:avLst>
           </a:prstGeom>
           <a:solidFill>
@@ -12260,9 +13064,55 @@
           </a:p>
         </p:txBody>
       </p:sp>
+      <p:sp>
+        <p:nvSpPr>
+          <p:cNvPr id="15" name="Rounded Rectangle 14"/>
+          <p:cNvSpPr/>
+          <p:nvPr/>
+        </p:nvSpPr>
+        <p:spPr>
+          <a:xfrm>
+            <a:off x="987552" y="3465576"/>
+            <a:ext cx="512064" cy="512064"/>
+          </a:xfrm>
+          <a:prstGeom prst="roundRect">
+            <a:avLst>
+              <a:gd name="adj" fmla="val 26000"/>
+            </a:avLst>
+          </a:prstGeom>
+          <a:solidFill>
+            <a:srgbClr val="EE0000"/>
+          </a:solidFill>
+          <a:ln>
+            <a:noFill/>
+          </a:ln>
+          <a:effectLst/>
+        </p:spPr>
+        <p:style>
+          <a:lnRef idx="1">
+            <a:schemeClr val="accent1"/>
+          </a:lnRef>
+          <a:fillRef idx="3">
+            <a:schemeClr val="accent1"/>
+          </a:fillRef>
+          <a:effectRef idx="2">
+            <a:schemeClr val="accent1"/>
+          </a:effectRef>
+          <a:fontRef idx="minor">
+            <a:schemeClr val="lt1"/>
+          </a:fontRef>
+        </p:style>
+        <p:txBody>
+          <a:bodyPr rtlCol="0" anchor="ctr"/>
+          <a:lstStyle/>
+          <a:p>
+            <a:pPr algn="ctr"/>
+          </a:p>
+        </p:txBody>
+      </p:sp>
       <p:pic>
         <p:nvPicPr>
-          <p:cNvPr id="13" name="Picture 12" descr="check_steel.png"/>
+          <p:cNvPr id="16" name="Picture 15" descr="check_white.png"/>
           <p:cNvPicPr>
             <a:picLocks noChangeAspect="1"/>
           </p:cNvPicPr>
@@ -12276,8 +13126,8 @@
         </p:blipFill>
         <p:spPr>
           <a:xfrm>
-            <a:off x="987552" y="3749040"/>
-            <a:ext cx="237744" cy="237744"/>
+            <a:off x="1110447" y="3588471"/>
+            <a:ext cx="266273" cy="266273"/>
           </a:xfrm>
           <a:prstGeom prst="rect">
             <a:avLst/>
@@ -12286,14 +13136,14 @@
       </p:pic>
       <p:sp>
         <p:nvSpPr>
-          <p:cNvPr id="14" name="TextBox 13"/>
+          <p:cNvPr id="17" name="TextBox 16"/>
           <p:cNvSpPr txBox="1"/>
           <p:nvPr/>
         </p:nvSpPr>
         <p:spPr>
           <a:xfrm>
-            <a:off x="1353312" y="3602736"/>
-            <a:ext cx="5029200" cy="530352"/>
+            <a:off x="1627632" y="3328416"/>
+            <a:ext cx="4206240" cy="786384"/>
           </a:xfrm>
           <a:prstGeom prst="rect">
             <a:avLst/>
@@ -12318,7 +13168,7 @@
               </a:spcAft>
             </a:pPr>
             <a:r>
-              <a:rPr sz="1200" b="0">
+              <a:rPr sz="1150" b="0">
                 <a:solidFill>
                   <a:srgbClr val="1A1A1A"/>
                 </a:solidFill>
@@ -12331,18 +13181,18 @@
       </p:sp>
       <p:sp>
         <p:nvSpPr>
-          <p:cNvPr id="15" name="Rounded Rectangle 14"/>
+          <p:cNvPr id="18" name="Rounded Rectangle 17"/>
           <p:cNvSpPr/>
           <p:nvPr/>
         </p:nvSpPr>
         <p:spPr>
           <a:xfrm>
-            <a:off x="841248" y="4206240"/>
-            <a:ext cx="5715000" cy="530352"/>
+            <a:off x="6254496" y="3328416"/>
+            <a:ext cx="5138928" cy="786384"/>
           </a:xfrm>
           <a:prstGeom prst="roundRect">
             <a:avLst>
-              <a:gd name="adj" fmla="val 6000"/>
+              <a:gd name="adj" fmla="val 7000"/>
             </a:avLst>
           </a:prstGeom>
           <a:solidFill>
@@ -12377,9 +13227,55 @@
           </a:p>
         </p:txBody>
       </p:sp>
+      <p:sp>
+        <p:nvSpPr>
+          <p:cNvPr id="19" name="Rounded Rectangle 18"/>
+          <p:cNvSpPr/>
+          <p:nvPr/>
+        </p:nvSpPr>
+        <p:spPr>
+          <a:xfrm>
+            <a:off x="6400800" y="3465576"/>
+            <a:ext cx="512064" cy="512064"/>
+          </a:xfrm>
+          <a:prstGeom prst="roundRect">
+            <a:avLst>
+              <a:gd name="adj" fmla="val 26000"/>
+            </a:avLst>
+          </a:prstGeom>
+          <a:solidFill>
+            <a:srgbClr val="EE0000"/>
+          </a:solidFill>
+          <a:ln>
+            <a:noFill/>
+          </a:ln>
+          <a:effectLst/>
+        </p:spPr>
+        <p:style>
+          <a:lnRef idx="1">
+            <a:schemeClr val="accent1"/>
+          </a:lnRef>
+          <a:fillRef idx="3">
+            <a:schemeClr val="accent1"/>
+          </a:fillRef>
+          <a:effectRef idx="2">
+            <a:schemeClr val="accent1"/>
+          </a:effectRef>
+          <a:fontRef idx="minor">
+            <a:schemeClr val="lt1"/>
+          </a:fontRef>
+        </p:style>
+        <p:txBody>
+          <a:bodyPr rtlCol="0" anchor="ctr"/>
+          <a:lstStyle/>
+          <a:p>
+            <a:pPr algn="ctr"/>
+          </a:p>
+        </p:txBody>
+      </p:sp>
       <p:pic>
         <p:nvPicPr>
-          <p:cNvPr id="16" name="Picture 15" descr="check_steel.png"/>
+          <p:cNvPr id="20" name="Picture 19" descr="check_white.png"/>
           <p:cNvPicPr>
             <a:picLocks noChangeAspect="1"/>
           </p:cNvPicPr>
@@ -12393,8 +13289,8 @@
         </p:blipFill>
         <p:spPr>
           <a:xfrm>
-            <a:off x="987552" y="4352544"/>
-            <a:ext cx="237744" cy="237744"/>
+            <a:off x="6523695" y="3588471"/>
+            <a:ext cx="266273" cy="266273"/>
           </a:xfrm>
           <a:prstGeom prst="rect">
             <a:avLst/>
@@ -12403,14 +13299,14 @@
       </p:pic>
       <p:sp>
         <p:nvSpPr>
-          <p:cNvPr id="17" name="TextBox 16"/>
+          <p:cNvPr id="21" name="TextBox 20"/>
           <p:cNvSpPr txBox="1"/>
           <p:nvPr/>
         </p:nvSpPr>
         <p:spPr>
           <a:xfrm>
-            <a:off x="1353312" y="4206240"/>
-            <a:ext cx="5029200" cy="530352"/>
+            <a:off x="7040880" y="3328416"/>
+            <a:ext cx="4206240" cy="786384"/>
           </a:xfrm>
           <a:prstGeom prst="rect">
             <a:avLst/>
@@ -12435,7 +13331,7 @@
               </a:spcAft>
             </a:pPr>
             <a:r>
-              <a:rPr sz="1200" b="0">
+              <a:rPr sz="1150" b="0">
                 <a:solidFill>
                   <a:srgbClr val="1A1A1A"/>
                 </a:solidFill>
@@ -12448,18 +13344,18 @@
       </p:sp>
       <p:sp>
         <p:nvSpPr>
-          <p:cNvPr id="18" name="Rounded Rectangle 17"/>
+          <p:cNvPr id="22" name="Rounded Rectangle 21"/>
           <p:cNvSpPr/>
           <p:nvPr/>
         </p:nvSpPr>
         <p:spPr>
           <a:xfrm>
-            <a:off x="841248" y="4809744"/>
-            <a:ext cx="5715000" cy="530352"/>
+            <a:off x="841248" y="4261104"/>
+            <a:ext cx="5138928" cy="786384"/>
           </a:xfrm>
           <a:prstGeom prst="roundRect">
             <a:avLst>
-              <a:gd name="adj" fmla="val 6000"/>
+              <a:gd name="adj" fmla="val 7000"/>
             </a:avLst>
           </a:prstGeom>
           <a:solidFill>
@@ -12494,9 +13390,55 @@
           </a:p>
         </p:txBody>
       </p:sp>
+      <p:sp>
+        <p:nvSpPr>
+          <p:cNvPr id="23" name="Rounded Rectangle 22"/>
+          <p:cNvSpPr/>
+          <p:nvPr/>
+        </p:nvSpPr>
+        <p:spPr>
+          <a:xfrm>
+            <a:off x="987552" y="4398264"/>
+            <a:ext cx="512064" cy="512064"/>
+          </a:xfrm>
+          <a:prstGeom prst="roundRect">
+            <a:avLst>
+              <a:gd name="adj" fmla="val 26000"/>
+            </a:avLst>
+          </a:prstGeom>
+          <a:solidFill>
+            <a:srgbClr val="EE0000"/>
+          </a:solidFill>
+          <a:ln>
+            <a:noFill/>
+          </a:ln>
+          <a:effectLst/>
+        </p:spPr>
+        <p:style>
+          <a:lnRef idx="1">
+            <a:schemeClr val="accent1"/>
+          </a:lnRef>
+          <a:fillRef idx="3">
+            <a:schemeClr val="accent1"/>
+          </a:fillRef>
+          <a:effectRef idx="2">
+            <a:schemeClr val="accent1"/>
+          </a:effectRef>
+          <a:fontRef idx="minor">
+            <a:schemeClr val="lt1"/>
+          </a:fontRef>
+        </p:style>
+        <p:txBody>
+          <a:bodyPr rtlCol="0" anchor="ctr"/>
+          <a:lstStyle/>
+          <a:p>
+            <a:pPr algn="ctr"/>
+          </a:p>
+        </p:txBody>
+      </p:sp>
       <p:pic>
         <p:nvPicPr>
-          <p:cNvPr id="19" name="Picture 18" descr="check_steel.png"/>
+          <p:cNvPr id="24" name="Picture 23" descr="check_white.png"/>
           <p:cNvPicPr>
             <a:picLocks noChangeAspect="1"/>
           </p:cNvPicPr>
@@ -12510,8 +13452,8 @@
         </p:blipFill>
         <p:spPr>
           <a:xfrm>
-            <a:off x="987552" y="4956048"/>
-            <a:ext cx="237744" cy="237744"/>
+            <a:off x="1110447" y="4521159"/>
+            <a:ext cx="266273" cy="266273"/>
           </a:xfrm>
           <a:prstGeom prst="rect">
             <a:avLst/>
@@ -12520,14 +13462,14 @@
       </p:pic>
       <p:sp>
         <p:nvSpPr>
-          <p:cNvPr id="20" name="TextBox 19"/>
+          <p:cNvPr id="25" name="TextBox 24"/>
           <p:cNvSpPr txBox="1"/>
           <p:nvPr/>
         </p:nvSpPr>
         <p:spPr>
           <a:xfrm>
-            <a:off x="1353312" y="4809744"/>
-            <a:ext cx="5029200" cy="530352"/>
+            <a:off x="1627632" y="4261104"/>
+            <a:ext cx="4206240" cy="786384"/>
           </a:xfrm>
           <a:prstGeom prst="rect">
             <a:avLst/>
@@ -12552,221 +13494,13 @@
               </a:spcAft>
             </a:pPr>
             <a:r>
-              <a:rPr sz="1200" b="0">
+              <a:rPr sz="1150" b="0">
                 <a:solidFill>
                   <a:srgbClr val="1A1A1A"/>
                 </a:solidFill>
                 <a:latin typeface="Red Hat Text"/>
               </a:rPr>
               <a:t>If that node died now — replica elsewhere, guaranteed?</a:t>
-            </a:r>
-          </a:p>
-        </p:txBody>
-      </p:sp>
-      <p:sp>
-        <p:nvSpPr>
-          <p:cNvPr id="21" name="Rounded Rectangle 20"/>
-          <p:cNvSpPr/>
-          <p:nvPr/>
-        </p:nvSpPr>
-        <p:spPr>
-          <a:xfrm>
-            <a:off x="6812280" y="2395728"/>
-            <a:ext cx="4538167" cy="2944368"/>
-          </a:xfrm>
-          <a:prstGeom prst="roundRect">
-            <a:avLst>
-              <a:gd name="adj" fmla="val 4000"/>
-            </a:avLst>
-          </a:prstGeom>
-          <a:solidFill>
-            <a:srgbClr val="FFFFFF"/>
-          </a:solidFill>
-          <a:ln w="15240">
-            <a:solidFill>
-              <a:srgbClr val="DDE1E6"/>
-            </a:solidFill>
-          </a:ln>
-          <a:effectLst/>
-        </p:spPr>
-        <p:style>
-          <a:lnRef idx="1">
-            <a:schemeClr val="accent1"/>
-          </a:lnRef>
-          <a:fillRef idx="3">
-            <a:schemeClr val="accent1"/>
-          </a:fillRef>
-          <a:effectRef idx="2">
-            <a:schemeClr val="accent1"/>
-          </a:effectRef>
-          <a:fontRef idx="minor">
-            <a:schemeClr val="lt1"/>
-          </a:fontRef>
-        </p:style>
-        <p:txBody>
-          <a:bodyPr rtlCol="0" anchor="ctr"/>
-          <a:lstStyle/>
-          <a:p>
-            <a:pPr algn="ctr"/>
-          </a:p>
-        </p:txBody>
-      </p:sp>
-      <p:sp>
-        <p:nvSpPr>
-          <p:cNvPr id="22" name="Rounded Rectangle 21"/>
-          <p:cNvSpPr/>
-          <p:nvPr/>
-        </p:nvSpPr>
-        <p:spPr>
-          <a:xfrm>
-            <a:off x="7013448" y="2596896"/>
-            <a:ext cx="1298448" cy="310896"/>
-          </a:xfrm>
-          <a:prstGeom prst="roundRect">
-            <a:avLst>
-              <a:gd name="adj" fmla="val 50000"/>
-            </a:avLst>
-          </a:prstGeom>
-          <a:solidFill>
-            <a:srgbClr val="FCECEC"/>
-          </a:solidFill>
-          <a:ln>
-            <a:noFill/>
-          </a:ln>
-          <a:effectLst/>
-        </p:spPr>
-        <p:style>
-          <a:lnRef idx="1">
-            <a:schemeClr val="accent1"/>
-          </a:lnRef>
-          <a:fillRef idx="3">
-            <a:schemeClr val="accent1"/>
-          </a:fillRef>
-          <a:effectRef idx="2">
-            <a:schemeClr val="accent1"/>
-          </a:effectRef>
-          <a:fontRef idx="minor">
-            <a:schemeClr val="lt1"/>
-          </a:fontRef>
-        </p:style>
-        <p:txBody>
-          <a:bodyPr rtlCol="0" anchor="ctr"/>
-          <a:lstStyle/>
-          <a:p>
-            <a:pPr algn="ctr"/>
-          </a:p>
-        </p:txBody>
-      </p:sp>
-      <p:sp>
-        <p:nvSpPr>
-          <p:cNvPr id="23" name="TextBox 22"/>
-          <p:cNvSpPr txBox="1"/>
-          <p:nvPr/>
-        </p:nvSpPr>
-        <p:spPr>
-          <a:xfrm>
-            <a:off x="7013448" y="2596896"/>
-            <a:ext cx="1298448" cy="310896"/>
-          </a:xfrm>
-          <a:prstGeom prst="rect">
-            <a:avLst/>
-          </a:prstGeom>
-          <a:noFill/>
-        </p:spPr>
-        <p:txBody>
-          <a:bodyPr wrap="none" anchor="ctr" lIns="0" rIns="0" tIns="0" bIns="0">
-            <a:spAutoFit/>
-          </a:bodyPr>
-          <a:lstStyle/>
-          <a:p>
-            <a:pPr algn="ctr">
-              <a:lnSpc>
-                <a:spcPct val="106000"/>
-              </a:lnSpc>
-              <a:spcBef>
-                <a:spcPts val="0"/>
-              </a:spcBef>
-              <a:spcAft>
-                <a:spcPts val="0"/>
-              </a:spcAft>
-            </a:pPr>
-            <a:r>
-              <a:rPr sz="850" b="1">
-                <a:solidFill>
-                  <a:srgbClr val="B80000"/>
-                </a:solidFill>
-                <a:latin typeface="Red Hat Display"/>
-              </a:rPr>
-              <a:t>MEDIA PASS</a:t>
-            </a:r>
-          </a:p>
-        </p:txBody>
-      </p:sp>
-      <p:pic>
-        <p:nvPicPr>
-          <p:cNvPr id="24" name="Picture 23" descr="eye_slate.png"/>
-          <p:cNvPicPr>
-            <a:picLocks noChangeAspect="1"/>
-          </p:cNvPicPr>
-          <p:nvPr/>
-        </p:nvPicPr>
-        <p:blipFill>
-          <a:blip r:embed="rId4"/>
-          <a:stretch>
-            <a:fillRect/>
-          </a:stretch>
-        </p:blipFill>
-        <p:spPr>
-          <a:xfrm>
-            <a:off x="8843619" y="3108960"/>
-            <a:ext cx="475488" cy="475488"/>
-          </a:xfrm>
-          <a:prstGeom prst="rect">
-            <a:avLst/>
-          </a:prstGeom>
-        </p:spPr>
-      </p:pic>
-      <p:sp>
-        <p:nvSpPr>
-          <p:cNvPr id="25" name="TextBox 24"/>
-          <p:cNvSpPr txBox="1"/>
-          <p:nvPr/>
-        </p:nvSpPr>
-        <p:spPr>
-          <a:xfrm>
-            <a:off x="7050024" y="3721608"/>
-            <a:ext cx="4062679" cy="1481328"/>
-          </a:xfrm>
-          <a:prstGeom prst="rect">
-            <a:avLst/>
-          </a:prstGeom>
-          <a:noFill/>
-        </p:spPr>
-        <p:txBody>
-          <a:bodyPr wrap="square" anchor="t" lIns="0" rIns="0" tIns="0" bIns="0">
-            <a:spAutoFit/>
-          </a:bodyPr>
-          <a:lstStyle/>
-          <a:p>
-            <a:pPr algn="l">
-              <a:lnSpc>
-                <a:spcPct val="120000"/>
-              </a:lnSpc>
-              <a:spcBef>
-                <a:spcPts val="0"/>
-              </a:spcBef>
-              <a:spcAft>
-                <a:spcPts val="0"/>
-              </a:spcAft>
-            </a:pPr>
-            <a:r>
-              <a:rPr sz="950" b="0">
-                <a:solidFill>
-                  <a:srgbClr val="8A9099"/>
-                </a:solidFill>
-                <a:latin typeface="Red Hat Text"/>
-              </a:rPr>
-              <a:t>Numbered arc strip: read/force-apart → spread → dedicated pool (break-fix) → zero-downtime roll + PDB; footnote pointer to the GitOps at Scale module for canary/blue-green.</a:t>
             </a:r>
           </a:p>
         </p:txBody>
